--- a/S1-CL2-Cloud-Disaster-Recovery/delivery/topic_09/Topic_09_Slides.pptx
+++ b/S1-CL2-Cloud-Disaster-Recovery/delivery/topic_09/Topic_09_Slides.pptx
@@ -4969,7 +4969,7 @@
           <a:noFill/>
         </p:spPr>
         <p:txBody>
-          <a:bodyPr wrap="square" anchor="t" lIns="0" rIns="0" tIns="0" bIns="0">
+          <a:bodyPr wrap="square" anchor="ctr" lIns="0" rIns="0" tIns="0" bIns="0">
             <a:spAutoFit/>
           </a:bodyPr>
           <a:lstStyle/>
@@ -4986,7 +4986,7 @@
               </a:spcAft>
             </a:pPr>
             <a:r>
-              <a:rPr sz="1800" b="1" i="0">
+              <a:rPr sz="2400" b="1" i="0">
                 <a:solidFill>
                   <a:srgbClr val="EDAB0C"/>
                 </a:solidFill>
@@ -4995,7 +4995,7 @@
               <a:t>■  </a:t>
             </a:r>
             <a:r>
-              <a:rPr sz="1800" b="0" i="0">
+              <a:rPr sz="2400" b="0" i="0">
                 <a:solidFill>
                   <a:srgbClr val="2A2929"/>
                 </a:solidFill>
@@ -5017,7 +5017,7 @@
               </a:spcAft>
             </a:pPr>
             <a:r>
-              <a:rPr sz="1800" b="1" i="0">
+              <a:rPr sz="2400" b="1" i="0">
                 <a:solidFill>
                   <a:srgbClr val="EDAB0C"/>
                 </a:solidFill>
@@ -5026,7 +5026,7 @@
               <a:t>■  </a:t>
             </a:r>
             <a:r>
-              <a:rPr sz="1800" b="0" i="0">
+              <a:rPr sz="2400" b="0" i="0">
                 <a:solidFill>
                   <a:srgbClr val="2A2929"/>
                 </a:solidFill>
@@ -5048,7 +5048,7 @@
               </a:spcAft>
             </a:pPr>
             <a:r>
-              <a:rPr sz="1800" b="1" i="0">
+              <a:rPr sz="2400" b="1" i="0">
                 <a:solidFill>
                   <a:srgbClr val="EDAB0C"/>
                 </a:solidFill>
@@ -5057,7 +5057,7 @@
               <a:t>■  </a:t>
             </a:r>
             <a:r>
-              <a:rPr sz="1800" b="0" i="0">
+              <a:rPr sz="2400" b="0" i="0">
                 <a:solidFill>
                   <a:srgbClr val="2A2929"/>
                 </a:solidFill>
@@ -5311,7 +5311,7 @@
           <a:noFill/>
         </p:spPr>
         <p:txBody>
-          <a:bodyPr wrap="square" anchor="t" lIns="0" rIns="0" tIns="0" bIns="0">
+          <a:bodyPr wrap="square" anchor="ctr" lIns="0" rIns="0" tIns="0" bIns="0">
             <a:spAutoFit/>
           </a:bodyPr>
           <a:lstStyle/>
@@ -5328,7 +5328,7 @@
               </a:spcAft>
             </a:pPr>
             <a:r>
-              <a:rPr sz="1800" b="1" i="0">
+              <a:rPr sz="2400" b="1" i="0">
                 <a:solidFill>
                   <a:srgbClr val="EDAB0C"/>
                 </a:solidFill>
@@ -5337,7 +5337,7 @@
               <a:t>■  </a:t>
             </a:r>
             <a:r>
-              <a:rPr sz="1800" b="0" i="0">
+              <a:rPr sz="2400" b="0" i="0">
                 <a:solidFill>
                   <a:srgbClr val="2A2929"/>
                 </a:solidFill>
@@ -5359,7 +5359,7 @@
               </a:spcAft>
             </a:pPr>
             <a:r>
-              <a:rPr sz="1800" b="1" i="0">
+              <a:rPr sz="2400" b="1" i="0">
                 <a:solidFill>
                   <a:srgbClr val="EDAB0C"/>
                 </a:solidFill>
@@ -5368,7 +5368,7 @@
               <a:t>■  </a:t>
             </a:r>
             <a:r>
-              <a:rPr sz="1800" b="0" i="0">
+              <a:rPr sz="2400" b="0" i="0">
                 <a:solidFill>
                   <a:srgbClr val="2A2929"/>
                 </a:solidFill>
@@ -5390,7 +5390,7 @@
               </a:spcAft>
             </a:pPr>
             <a:r>
-              <a:rPr sz="1800" b="1" i="0">
+              <a:rPr sz="2400" b="1" i="0">
                 <a:solidFill>
                   <a:srgbClr val="EDAB0C"/>
                 </a:solidFill>
@@ -5399,7 +5399,7 @@
               <a:t>■  </a:t>
             </a:r>
             <a:r>
-              <a:rPr sz="1800" b="0" i="0">
+              <a:rPr sz="2400" b="0" i="0">
                 <a:solidFill>
                   <a:srgbClr val="2A2929"/>
                 </a:solidFill>
@@ -5421,7 +5421,7 @@
               </a:spcAft>
             </a:pPr>
             <a:r>
-              <a:rPr sz="1800" b="1" i="0">
+              <a:rPr sz="2400" b="1" i="0">
                 <a:solidFill>
                   <a:srgbClr val="EDAB0C"/>
                 </a:solidFill>
@@ -5430,7 +5430,7 @@
               <a:t>■  </a:t>
             </a:r>
             <a:r>
-              <a:rPr sz="1800" b="0" i="0">
+              <a:rPr sz="2400" b="0" i="0">
                 <a:solidFill>
                   <a:srgbClr val="2A2929"/>
                 </a:solidFill>
@@ -5976,7 +5976,7 @@
           <a:noFill/>
         </p:spPr>
         <p:txBody>
-          <a:bodyPr wrap="square" anchor="t" lIns="0" rIns="0" tIns="0" bIns="0">
+          <a:bodyPr wrap="square" anchor="ctr" lIns="0" rIns="0" tIns="0" bIns="0">
             <a:spAutoFit/>
           </a:bodyPr>
           <a:lstStyle/>
@@ -5993,7 +5993,7 @@
               </a:spcAft>
             </a:pPr>
             <a:r>
-              <a:rPr sz="1800" b="1" i="0">
+              <a:rPr sz="2400" b="1" i="0">
                 <a:solidFill>
                   <a:srgbClr val="EDAB0C"/>
                 </a:solidFill>
@@ -6002,7 +6002,7 @@
               <a:t>■  </a:t>
             </a:r>
             <a:r>
-              <a:rPr sz="1800" b="0" i="0">
+              <a:rPr sz="2400" b="0" i="0">
                 <a:solidFill>
                   <a:srgbClr val="2A2929"/>
                 </a:solidFill>
@@ -6024,7 +6024,7 @@
               </a:spcAft>
             </a:pPr>
             <a:r>
-              <a:rPr sz="1800" b="1" i="0">
+              <a:rPr sz="2400" b="1" i="0">
                 <a:solidFill>
                   <a:srgbClr val="EDAB0C"/>
                 </a:solidFill>
@@ -6033,7 +6033,7 @@
               <a:t>■  </a:t>
             </a:r>
             <a:r>
-              <a:rPr sz="1800" b="0" i="0">
+              <a:rPr sz="2400" b="0" i="0">
                 <a:solidFill>
                   <a:srgbClr val="2A2929"/>
                 </a:solidFill>
@@ -6055,7 +6055,7 @@
               </a:spcAft>
             </a:pPr>
             <a:r>
-              <a:rPr sz="1800" b="1" i="0">
+              <a:rPr sz="2400" b="1" i="0">
                 <a:solidFill>
                   <a:srgbClr val="EDAB0C"/>
                 </a:solidFill>
@@ -6064,7 +6064,7 @@
               <a:t>■  </a:t>
             </a:r>
             <a:r>
-              <a:rPr sz="1800" b="0" i="0">
+              <a:rPr sz="2400" b="0" i="0">
                 <a:solidFill>
                   <a:srgbClr val="2A2929"/>
                 </a:solidFill>

--- a/S1-CL2-Cloud-Disaster-Recovery/delivery/topic_09/Topic_09_Slides.pptx
+++ b/S1-CL2-Cloud-Disaster-Recovery/delivery/topic_09/Topic_09_Slides.pptx
@@ -7,15 +7,15 @@
   <p:sldIdLst>
     <p:sldId id="256" r:id="rId7"/>
     <p:sldId id="257" r:id="rId8"/>
-    <p:sldId id="258" r:id="rId9"/>
-    <p:sldId id="259" r:id="rId10"/>
-    <p:sldId id="260" r:id="rId11"/>
-    <p:sldId id="261" r:id="rId12"/>
-    <p:sldId id="262" r:id="rId13"/>
-    <p:sldId id="263" r:id="rId14"/>
-    <p:sldId id="264" r:id="rId15"/>
-    <p:sldId id="265" r:id="rId16"/>
-    <p:sldId id="266" r:id="rId17"/>
+    <p:sldId id="258" r:id="rId10"/>
+    <p:sldId id="259" r:id="rId11"/>
+    <p:sldId id="260" r:id="rId12"/>
+    <p:sldId id="261" r:id="rId13"/>
+    <p:sldId id="262" r:id="rId14"/>
+    <p:sldId id="263" r:id="rId15"/>
+    <p:sldId id="264" r:id="rId16"/>
+    <p:sldId id="265" r:id="rId17"/>
+    <p:sldId id="266" r:id="rId18"/>
   </p:sldIdLst>
   <p:sldSz cx="12191695" cy="6858000" type="screen4x3"/>
   <p:notesSz cx="6858000" cy="9144000"/>
@@ -115,6 +115,1199 @@
     </a:lvl9pPr>
   </p:defaultTextStyle>
 </p:presentation>
+</file>
+
+<file path=ppt/notesMasters/notesMaster1.xml><?xml version="1.0" encoding="utf-8"?>
+<p:notesMaster xmlns:a="http://schemas.openxmlformats.org/drawingml/2006/main" xmlns:p="http://schemas.openxmlformats.org/presentationml/2006/main" xmlns:r="http://schemas.openxmlformats.org/officeDocument/2006/relationships">
+  <p:cSld>
+    <p:bg>
+      <p:bgRef idx="1001">
+        <a:schemeClr val="bg1"/>
+      </p:bgRef>
+    </p:bg>
+    <p:spTree>
+      <p:nvGrpSpPr>
+        <p:cNvPr id="1" name=""/>
+        <p:cNvGrpSpPr/>
+        <p:nvPr/>
+      </p:nvGrpSpPr>
+      <p:grpSpPr>
+        <a:xfrm>
+          <a:off x="0" y="0"/>
+          <a:ext cx="0" cy="0"/>
+          <a:chOff x="0" y="0"/>
+          <a:chExt cx="0" cy="0"/>
+        </a:xfrm>
+      </p:grpSpPr>
+      <p:sp>
+        <p:nvSpPr>
+          <p:cNvPr id="2" name="Header Placeholder 1"/>
+          <p:cNvSpPr>
+            <a:spLocks noGrp="1"/>
+          </p:cNvSpPr>
+          <p:nvPr>
+            <p:ph type="hdr" sz="quarter"/>
+          </p:nvPr>
+        </p:nvSpPr>
+        <p:spPr>
+          <a:xfrm>
+            <a:off x="0" y="0"/>
+            <a:ext cx="2971800" cy="457200"/>
+          </a:xfrm>
+          <a:prstGeom prst="rect">
+            <a:avLst/>
+          </a:prstGeom>
+        </p:spPr>
+        <p:txBody>
+          <a:bodyPr vert="horz" lIns="91440" tIns="45720" rIns="91440" bIns="45720" rtlCol="0"/>
+          <a:lstStyle>
+            <a:lvl1pPr algn="l">
+              <a:defRPr sz="1200"/>
+            </a:lvl1pPr>
+          </a:lstStyle>
+          <a:p>
+            <a:endParaRPr lang="en-US"/>
+          </a:p>
+        </p:txBody>
+      </p:sp>
+      <p:sp>
+        <p:nvSpPr>
+          <p:cNvPr id="3" name="Date Placeholder 2"/>
+          <p:cNvSpPr>
+            <a:spLocks noGrp="1"/>
+          </p:cNvSpPr>
+          <p:nvPr>
+            <p:ph type="dt" idx="1"/>
+          </p:nvPr>
+        </p:nvSpPr>
+        <p:spPr>
+          <a:xfrm>
+            <a:off x="3884613" y="0"/>
+            <a:ext cx="2971800" cy="457200"/>
+          </a:xfrm>
+          <a:prstGeom prst="rect">
+            <a:avLst/>
+          </a:prstGeom>
+        </p:spPr>
+        <p:txBody>
+          <a:bodyPr vert="horz" lIns="91440" tIns="45720" rIns="91440" bIns="45720" rtlCol="0"/>
+          <a:lstStyle>
+            <a:lvl1pPr algn="r">
+              <a:defRPr sz="1200"/>
+            </a:lvl1pPr>
+          </a:lstStyle>
+          <a:p>
+            <a:fld id="{0F89C1C7-3DCD-1040-A9CF-14679D8B5DDD}" type="datetimeFigureOut">
+              <a:rPr lang="en-US" smtClean="0"/>
+              <a:t>10/17/16</a:t>
+            </a:fld>
+            <a:endParaRPr lang="en-US"/>
+          </a:p>
+        </p:txBody>
+      </p:sp>
+      <p:sp>
+        <p:nvSpPr>
+          <p:cNvPr id="4" name="Slide Image Placeholder 3"/>
+          <p:cNvSpPr>
+            <a:spLocks noGrp="1" noRot="1" noChangeAspect="1"/>
+          </p:cNvSpPr>
+          <p:nvPr>
+            <p:ph type="sldImg" idx="2"/>
+          </p:nvPr>
+        </p:nvSpPr>
+        <p:spPr>
+          <a:xfrm>
+            <a:off x="1143000" y="685800"/>
+            <a:ext cx="4572000" cy="3429000"/>
+          </a:xfrm>
+          <a:prstGeom prst="rect">
+            <a:avLst/>
+          </a:prstGeom>
+          <a:noFill/>
+          <a:ln w="12700">
+            <a:solidFill>
+              <a:prstClr val="black"/>
+            </a:solidFill>
+          </a:ln>
+        </p:spPr>
+        <p:txBody>
+          <a:bodyPr vert="horz" lIns="91440" tIns="45720" rIns="91440" bIns="45720" rtlCol="0" anchor="ctr"/>
+          <a:lstStyle/>
+          <a:p>
+            <a:endParaRPr lang="en-US"/>
+          </a:p>
+        </p:txBody>
+      </p:sp>
+      <p:sp>
+        <p:nvSpPr>
+          <p:cNvPr id="5" name="Notes Placeholder 4"/>
+          <p:cNvSpPr>
+            <a:spLocks noGrp="1"/>
+          </p:cNvSpPr>
+          <p:nvPr>
+            <p:ph type="body" sz="quarter" idx="3"/>
+          </p:nvPr>
+        </p:nvSpPr>
+        <p:spPr>
+          <a:xfrm>
+            <a:off x="685800" y="4343400"/>
+            <a:ext cx="5486400" cy="4114800"/>
+          </a:xfrm>
+          <a:prstGeom prst="rect">
+            <a:avLst/>
+          </a:prstGeom>
+        </p:spPr>
+        <p:txBody>
+          <a:bodyPr vert="horz" lIns="91440" tIns="45720" rIns="91440" bIns="45720" rtlCol="0"/>
+          <a:lstStyle/>
+          <a:p>
+            <a:pPr lvl="0"/>
+            <a:r>
+              <a:rPr lang="en-US" smtClean="0"/>
+              <a:t>Click to edit Master text styles</a:t>
+            </a:r>
+          </a:p>
+          <a:p>
+            <a:pPr lvl="1"/>
+            <a:r>
+              <a:rPr lang="en-US" smtClean="0"/>
+              <a:t>Second level</a:t>
+            </a:r>
+          </a:p>
+          <a:p>
+            <a:pPr lvl="2"/>
+            <a:r>
+              <a:rPr lang="en-US" smtClean="0"/>
+              <a:t>Third level</a:t>
+            </a:r>
+          </a:p>
+          <a:p>
+            <a:pPr lvl="3"/>
+            <a:r>
+              <a:rPr lang="en-US" smtClean="0"/>
+              <a:t>Fourth level</a:t>
+            </a:r>
+          </a:p>
+          <a:p>
+            <a:pPr lvl="4"/>
+            <a:r>
+              <a:rPr lang="en-US" smtClean="0"/>
+              <a:t>Fifth level</a:t>
+            </a:r>
+            <a:endParaRPr lang="en-US"/>
+          </a:p>
+        </p:txBody>
+      </p:sp>
+      <p:sp>
+        <p:nvSpPr>
+          <p:cNvPr id="6" name="Footer Placeholder 5"/>
+          <p:cNvSpPr>
+            <a:spLocks noGrp="1"/>
+          </p:cNvSpPr>
+          <p:nvPr>
+            <p:ph type="ftr" sz="quarter" idx="4"/>
+          </p:nvPr>
+        </p:nvSpPr>
+        <p:spPr>
+          <a:xfrm>
+            <a:off x="0" y="8685213"/>
+            <a:ext cx="2971800" cy="457200"/>
+          </a:xfrm>
+          <a:prstGeom prst="rect">
+            <a:avLst/>
+          </a:prstGeom>
+        </p:spPr>
+        <p:txBody>
+          <a:bodyPr vert="horz" lIns="91440" tIns="45720" rIns="91440" bIns="45720" rtlCol="0" anchor="b"/>
+          <a:lstStyle>
+            <a:lvl1pPr algn="l">
+              <a:defRPr sz="1200"/>
+            </a:lvl1pPr>
+          </a:lstStyle>
+          <a:p>
+            <a:endParaRPr lang="en-US"/>
+          </a:p>
+        </p:txBody>
+      </p:sp>
+      <p:sp>
+        <p:nvSpPr>
+          <p:cNvPr id="7" name="Slide Number Placeholder 6"/>
+          <p:cNvSpPr>
+            <a:spLocks noGrp="1"/>
+          </p:cNvSpPr>
+          <p:nvPr>
+            <p:ph type="sldNum" sz="quarter" idx="5"/>
+          </p:nvPr>
+        </p:nvSpPr>
+        <p:spPr>
+          <a:xfrm>
+            <a:off x="3884613" y="8685213"/>
+            <a:ext cx="2971800" cy="457200"/>
+          </a:xfrm>
+          <a:prstGeom prst="rect">
+            <a:avLst/>
+          </a:prstGeom>
+        </p:spPr>
+        <p:txBody>
+          <a:bodyPr vert="horz" lIns="91440" tIns="45720" rIns="91440" bIns="45720" rtlCol="0" anchor="b"/>
+          <a:lstStyle>
+            <a:lvl1pPr algn="r">
+              <a:defRPr sz="1200"/>
+            </a:lvl1pPr>
+          </a:lstStyle>
+          <a:p>
+            <a:fld id="{BB5E49A5-4136-284D-997B-48E1D791AD67}" type="slidenum">
+              <a:rPr lang="en-US" smtClean="0"/>
+              <a:t>‹#›</a:t>
+            </a:fld>
+            <a:endParaRPr lang="en-US"/>
+          </a:p>
+        </p:txBody>
+      </p:sp>
+    </p:spTree>
+    <p:extLst>
+      <p:ext uri="{BB962C8B-B14F-4D97-AF65-F5344CB8AC3E}">
+        <p14:creationId xmlns:p14="http://schemas.microsoft.com/office/powerpoint/2010/main" val="2623252185"/>
+      </p:ext>
+    </p:extLst>
+  </p:cSld>
+  <p:clrMap bg1="lt1" tx1="dk1" bg2="lt2" tx2="dk2" accent1="accent1" accent2="accent2" accent3="accent3" accent4="accent4" accent5="accent5" accent6="accent6" hlink="hlink" folHlink="folHlink"/>
+  <p:notesStyle>
+    <a:lvl1pPr marL="0" algn="l" defTabSz="457200" rtl="0" eaLnBrk="1" latinLnBrk="0" hangingPunct="1">
+      <a:defRPr sz="1200" kern="1200">
+        <a:solidFill>
+          <a:schemeClr val="tx1"/>
+        </a:solidFill>
+        <a:latin typeface="+mn-lt"/>
+        <a:ea typeface="+mn-ea"/>
+        <a:cs typeface="+mn-cs"/>
+      </a:defRPr>
+    </a:lvl1pPr>
+    <a:lvl2pPr marL="457200" algn="l" defTabSz="457200" rtl="0" eaLnBrk="1" latinLnBrk="0" hangingPunct="1">
+      <a:defRPr sz="1200" kern="1200">
+        <a:solidFill>
+          <a:schemeClr val="tx1"/>
+        </a:solidFill>
+        <a:latin typeface="+mn-lt"/>
+        <a:ea typeface="+mn-ea"/>
+        <a:cs typeface="+mn-cs"/>
+      </a:defRPr>
+    </a:lvl2pPr>
+    <a:lvl3pPr marL="914400" algn="l" defTabSz="457200" rtl="0" eaLnBrk="1" latinLnBrk="0" hangingPunct="1">
+      <a:defRPr sz="1200" kern="1200">
+        <a:solidFill>
+          <a:schemeClr val="tx1"/>
+        </a:solidFill>
+        <a:latin typeface="+mn-lt"/>
+        <a:ea typeface="+mn-ea"/>
+        <a:cs typeface="+mn-cs"/>
+      </a:defRPr>
+    </a:lvl3pPr>
+    <a:lvl4pPr marL="1371600" algn="l" defTabSz="457200" rtl="0" eaLnBrk="1" latinLnBrk="0" hangingPunct="1">
+      <a:defRPr sz="1200" kern="1200">
+        <a:solidFill>
+          <a:schemeClr val="tx1"/>
+        </a:solidFill>
+        <a:latin typeface="+mn-lt"/>
+        <a:ea typeface="+mn-ea"/>
+        <a:cs typeface="+mn-cs"/>
+      </a:defRPr>
+    </a:lvl4pPr>
+    <a:lvl5pPr marL="1828800" algn="l" defTabSz="457200" rtl="0" eaLnBrk="1" latinLnBrk="0" hangingPunct="1">
+      <a:defRPr sz="1200" kern="1200">
+        <a:solidFill>
+          <a:schemeClr val="tx1"/>
+        </a:solidFill>
+        <a:latin typeface="+mn-lt"/>
+        <a:ea typeface="+mn-ea"/>
+        <a:cs typeface="+mn-cs"/>
+      </a:defRPr>
+    </a:lvl5pPr>
+    <a:lvl6pPr marL="2286000" algn="l" defTabSz="457200" rtl="0" eaLnBrk="1" latinLnBrk="0" hangingPunct="1">
+      <a:defRPr sz="1200" kern="1200">
+        <a:solidFill>
+          <a:schemeClr val="tx1"/>
+        </a:solidFill>
+        <a:latin typeface="+mn-lt"/>
+        <a:ea typeface="+mn-ea"/>
+        <a:cs typeface="+mn-cs"/>
+      </a:defRPr>
+    </a:lvl6pPr>
+    <a:lvl7pPr marL="2743200" algn="l" defTabSz="457200" rtl="0" eaLnBrk="1" latinLnBrk="0" hangingPunct="1">
+      <a:defRPr sz="1200" kern="1200">
+        <a:solidFill>
+          <a:schemeClr val="tx1"/>
+        </a:solidFill>
+        <a:latin typeface="+mn-lt"/>
+        <a:ea typeface="+mn-ea"/>
+        <a:cs typeface="+mn-cs"/>
+      </a:defRPr>
+    </a:lvl7pPr>
+    <a:lvl8pPr marL="3200400" algn="l" defTabSz="457200" rtl="0" eaLnBrk="1" latinLnBrk="0" hangingPunct="1">
+      <a:defRPr sz="1200" kern="1200">
+        <a:solidFill>
+          <a:schemeClr val="tx1"/>
+        </a:solidFill>
+        <a:latin typeface="+mn-lt"/>
+        <a:ea typeface="+mn-ea"/>
+        <a:cs typeface="+mn-cs"/>
+      </a:defRPr>
+    </a:lvl8pPr>
+    <a:lvl9pPr marL="3657600" algn="l" defTabSz="457200" rtl="0" eaLnBrk="1" latinLnBrk="0" hangingPunct="1">
+      <a:defRPr sz="1200" kern="1200">
+        <a:solidFill>
+          <a:schemeClr val="tx1"/>
+        </a:solidFill>
+        <a:latin typeface="+mn-lt"/>
+        <a:ea typeface="+mn-ea"/>
+        <a:cs typeface="+mn-cs"/>
+      </a:defRPr>
+    </a:lvl9pPr>
+  </p:notesStyle>
+</p:notesMaster>
+</file>
+
+<file path=ppt/notesSlides/notesSlide1.xml><?xml version="1.0" encoding="utf-8"?>
+<p:notes xmlns:a="http://schemas.openxmlformats.org/drawingml/2006/main" xmlns:p="http://schemas.openxmlformats.org/presentationml/2006/main" xmlns:r="http://schemas.openxmlformats.org/officeDocument/2006/relationships">
+  <p:cSld>
+    <p:spTree>
+      <p:nvGrpSpPr>
+        <p:cNvPr id="1" name=""/>
+        <p:cNvGrpSpPr/>
+        <p:nvPr/>
+      </p:nvGrpSpPr>
+      <p:grpSpPr>
+        <a:xfrm>
+          <a:off x="0" y="0"/>
+          <a:ext cx="0" cy="0"/>
+          <a:chOff x="0" y="0"/>
+          <a:chExt cx="0" cy="0"/>
+        </a:xfrm>
+      </p:grpSpPr>
+      <p:sp>
+        <p:nvSpPr>
+          <p:cNvPr id="2" name="Slide Image Placeholder 1"/>
+          <p:cNvSpPr>
+            <a:spLocks noGrp="1"/>
+          </p:cNvSpPr>
+          <p:nvPr>
+            <p:ph type="sldImg" idx="2"/>
+          </p:nvPr>
+        </p:nvSpPr>
+        <p:spPr/>
+      </p:sp>
+      <p:sp>
+        <p:nvSpPr>
+          <p:cNvPr id="3" name="Notes Placeholder 2"/>
+          <p:cNvSpPr>
+            <a:spLocks noGrp="1"/>
+          </p:cNvSpPr>
+          <p:nvPr>
+            <p:ph type="body" idx="3" sz="quarter"/>
+          </p:nvPr>
+        </p:nvSpPr>
+        <p:spPr/>
+        <p:txBody>
+          <a:bodyPr/>
+          <a:lstStyle/>
+          <a:p>
+            <a:r>
+              <a:t>Frame Topic 9 as the pivot from "it runs" to "you can SEE it running." Set the mode; don't configure</a:t>
+            </a:r>
+          </a:p>
+          <a:p>
+            <a:r>
+              <a:t>an alarm yet.</a:t>
+            </a:r>
+          </a:p>
+          <a:p>
+            <a:r>
+              <a:t>• First bullet: the microservice runs (Topic 8); now make it observable so you can see trouble coming</a:t>
+            </a:r>
+          </a:p>
+          <a:p>
+            <a:r>
+              <a:t>before users feel it. Observability is a build step, not an afterthought.</a:t>
+            </a:r>
+          </a:p>
+          <a:p>
+            <a:r>
+              <a:t>• Second bullet (the tie-back): this is the PRACTICAL form of the DR plan's detection step they</a:t>
+            </a:r>
+          </a:p>
+          <a:p>
+            <a:r>
+              <a:t>designed in AT1 (Topic 4) — the paper "we'll detect failures" becomes real CloudWatch config today.</a:t>
+            </a:r>
+          </a:p>
+          <a:p>
+            <a:r>
+              <a:t>Point back to that plan.</a:t>
+            </a:r>
+          </a:p>
+          <a:p>
+            <a:r>
+              <a:t>• Third bullet: the rhythm — `teach → demo → practice`: watch a metric + alarm configured and fired,</a:t>
+            </a:r>
+          </a:p>
+          <a:p>
+            <a:r>
+              <a:t>then do it themselves.</a:t>
+            </a:r>
+          </a:p>
+          <a:p>
+            <a:r>
+              <a:t>• Fourth bullet: configured in the lab (us-east-1); the metrics and alarms are the same anywhere — no</a:t>
+            </a:r>
+          </a:p>
+          <a:p>
+            <a:r>
+              <a:t>substitution caveat beyond the Region.</a:t>
+            </a:r>
+          </a:p>
+          <a:p>
+            <a:r>
+              <a:t>Misconception to pre-empt: "monitoring is something ops bolts on later." No — the detection step of the</a:t>
+            </a:r>
+          </a:p>
+          <a:p>
+            <a:r>
+              <a:t>DR plan REQUIRES it; a system you can't observe can't meet its own recovery objectives. It's the build.</a:t>
+            </a:r>
+          </a:p>
+          <a:p>
+            <a:r>
+              <a:t>Question to pose: "Your AT1 DR plan says failures will be detected — concretely, what has to exist for</a:t>
+            </a:r>
+          </a:p>
+          <a:p>
+            <a:r>
+              <a:t>that to be true?" (a metric being watched + an alarm that alerts someone; today builds exactly that).</a:t>
+            </a:r>
+          </a:p>
+          <a:p>
+            <a:r>
+              <a:t>UoC/AT2 tie: opens the monitoring build — ICTCLD503 PC 4.1 + ICTCLD501 KE 6 — evidenced in AT2 §4.5 (D6).</a:t>
+            </a:r>
+          </a:p>
+        </p:txBody>
+      </p:sp>
+      <p:sp>
+        <p:nvSpPr>
+          <p:cNvPr id="4" name="Slide Number Placeholder 3"/>
+          <p:cNvSpPr>
+            <a:spLocks noGrp="1"/>
+          </p:cNvSpPr>
+          <p:nvPr>
+            <p:ph type="sldNum" idx="5" sz="quarter"/>
+          </p:nvPr>
+        </p:nvSpPr>
+        <p:spPr/>
+      </p:sp>
+    </p:spTree>
+  </p:cSld>
+  <p:clrMapOvr>
+    <a:masterClrMapping/>
+  </p:clrMapOvr>
+</p:notes>
+</file>
+
+<file path=ppt/notesSlides/notesSlide2.xml><?xml version="1.0" encoding="utf-8"?>
+<p:notes xmlns:a="http://schemas.openxmlformats.org/drawingml/2006/main" xmlns:p="http://schemas.openxmlformats.org/presentationml/2006/main" xmlns:r="http://schemas.openxmlformats.org/officeDocument/2006/relationships">
+  <p:cSld>
+    <p:spTree>
+      <p:nvGrpSpPr>
+        <p:cNvPr id="1" name=""/>
+        <p:cNvGrpSpPr/>
+        <p:nvPr/>
+      </p:nvGrpSpPr>
+      <p:grpSpPr>
+        <a:xfrm>
+          <a:off x="0" y="0"/>
+          <a:ext cx="0" cy="0"/>
+          <a:chOff x="0" y="0"/>
+          <a:chExt cx="0" cy="0"/>
+        </a:xfrm>
+      </p:grpSpPr>
+      <p:sp>
+        <p:nvSpPr>
+          <p:cNvPr id="2" name="Slide Image Placeholder 1"/>
+          <p:cNvSpPr>
+            <a:spLocks noGrp="1"/>
+          </p:cNvSpPr>
+          <p:nvPr>
+            <p:ph type="sldImg" idx="2"/>
+          </p:nvPr>
+        </p:nvSpPr>
+        <p:spPr/>
+      </p:sp>
+      <p:sp>
+        <p:nvSpPr>
+          <p:cNvPr id="3" name="Notes Placeholder 2"/>
+          <p:cNvSpPr>
+            <a:spLocks noGrp="1"/>
+          </p:cNvSpPr>
+          <p:nvPr>
+            <p:ph type="body" idx="3" sz="quarter"/>
+          </p:nvPr>
+        </p:nvSpPr>
+        <p:spPr/>
+        <p:txBody>
+          <a:bodyPr/>
+          <a:lstStyle/>
+          <a:p>
+            <a:r>
+              <a:t>A vendor-neutral primer on what a metric IS, before naming the microservice's specific signals. Keep</a:t>
+            </a:r>
+          </a:p>
+          <a:p>
+            <a:r>
+              <a:t>it foundational.</a:t>
+            </a:r>
+          </a:p>
+          <a:p>
+            <a:r>
+              <a:t>• First bullet: a metric is a time-series number the platform emits about a resource — a queue length,</a:t>
+            </a:r>
+          </a:p>
+          <a:p>
+            <a:r>
+              <a:t>an error count, a duration. It's data over time, not a snapshot.</a:t>
+            </a:r>
+          </a:p>
+          <a:p>
+            <a:r>
+              <a:t>• Second bullet (KE 6): monitoring is watching the metrics that PREDICT trouble, before users feel it.</a:t>
+            </a:r>
+          </a:p>
+          <a:p>
+            <a:r>
+              <a:t>The art is choosing the few signals that lead the problem, not lag it.</a:t>
+            </a:r>
+          </a:p>
+          <a:p>
+            <a:r>
+              <a:t>• Third bullet (the motto): you cannot manage what you do not measure. Say it out loud — it's why the</a:t>
+            </a:r>
+          </a:p>
+          <a:p>
+            <a:r>
+              <a:t>next slide picks specific signals.</a:t>
+            </a:r>
+          </a:p>
+          <a:p>
+            <a:r>
+              <a:t>Misconception to pre-empt: "monitor everything." No — a wall of dashboards nobody reads is not</a:t>
+            </a:r>
+          </a:p>
+          <a:p>
+            <a:r>
+              <a:t>monitoring; you pick the leading signals for THIS service. Selection is the skill.</a:t>
+            </a:r>
+          </a:p>
+          <a:p>
+            <a:r>
+              <a:t>Question to pose: "What makes a metric useful for prevention rather than a post-mortem?" (it moves</a:t>
+            </a:r>
+          </a:p>
+          <a:p>
+            <a:r>
+              <a:t>BEFORE the failure — a leading signal like a rising queue, not a lagging one like a user complaint).</a:t>
+            </a:r>
+          </a:p>
+          <a:p>
+            <a:r>
+              <a:t>UoC/AT2 tie: ICTCLD503 PC 4.1 + ICTCLD501 KE 6 — the monitoring foundation evidenced in AT2 §4.5 (D6).</a:t>
+            </a:r>
+          </a:p>
+        </p:txBody>
+      </p:sp>
+      <p:sp>
+        <p:nvSpPr>
+          <p:cNvPr id="4" name="Slide Number Placeholder 3"/>
+          <p:cNvSpPr>
+            <a:spLocks noGrp="1"/>
+          </p:cNvSpPr>
+          <p:nvPr>
+            <p:ph type="sldNum" idx="5" sz="quarter"/>
+          </p:nvPr>
+        </p:nvSpPr>
+        <p:spPr/>
+      </p:sp>
+    </p:spTree>
+  </p:cSld>
+  <p:clrMapOvr>
+    <a:masterClrMapping/>
+  </p:clrMapOvr>
+</p:notes>
+</file>
+
+<file path=ppt/notesSlides/notesSlide3.xml><?xml version="1.0" encoding="utf-8"?>
+<p:notes xmlns:a="http://schemas.openxmlformats.org/drawingml/2006/main" xmlns:p="http://schemas.openxmlformats.org/presentationml/2006/main" xmlns:r="http://schemas.openxmlformats.org/officeDocument/2006/relationships">
+  <p:cSld>
+    <p:spTree>
+      <p:nvGrpSpPr>
+        <p:cNvPr id="1" name=""/>
+        <p:cNvGrpSpPr/>
+        <p:nvPr/>
+      </p:nvGrpSpPr>
+      <p:grpSpPr>
+        <a:xfrm>
+          <a:off x="0" y="0"/>
+          <a:ext cx="0" cy="0"/>
+          <a:chOff x="0" y="0"/>
+          <a:chExt cx="0" cy="0"/>
+        </a:xfrm>
+      </p:grpSpPr>
+      <p:sp>
+        <p:nvSpPr>
+          <p:cNvPr id="2" name="Slide Image Placeholder 1"/>
+          <p:cNvSpPr>
+            <a:spLocks noGrp="1"/>
+          </p:cNvSpPr>
+          <p:nvPr>
+            <p:ph type="sldImg" idx="2"/>
+          </p:nvPr>
+        </p:nvSpPr>
+        <p:spPr/>
+      </p:sp>
+      <p:sp>
+        <p:nvSpPr>
+          <p:cNvPr id="3" name="Notes Placeholder 2"/>
+          <p:cNvSpPr>
+            <a:spLocks noGrp="1"/>
+          </p:cNvSpPr>
+          <p:nvPr>
+            <p:ph type="body" idx="3" sz="quarter"/>
+          </p:nvPr>
+        </p:nvSpPr>
+        <p:spPr/>
+        <p:txBody>
+          <a:bodyPr/>
+          <a:lstStyle/>
+          <a:p>
+            <a:r>
+              <a:t>Make the primer concrete — the specific signals that matter on THIS queue-driven serverless</a:t>
+            </a:r>
+          </a:p>
+          <a:p>
+            <a:r>
+              <a:t>microservice. These are the ones they'll choose from for the alarm.</a:t>
+            </a:r>
+          </a:p>
+          <a:p>
+            <a:r>
+              <a:t>• Queue depth: the scaling signal for a queue-driven function — a rising backlog means the consumer</a:t>
+            </a:r>
+          </a:p>
+          <a:p>
+            <a:r>
+              <a:t>(the function) can't keep up with arrivals. This is the headline metric; it predicts overload.</a:t>
+            </a:r>
+          </a:p>
+          <a:p>
+            <a:r>
+              <a:t>• Function errors and throttles: the code failing (errors) or the platform limiting concurrency</a:t>
+            </a:r>
+          </a:p>
+          <a:p>
+            <a:r>
+              <a:t>(throttles). Distinguish the two — an error is your bug; a throttle is a capacity limit.</a:t>
+            </a:r>
+          </a:p>
+          <a:p>
+            <a:r>
+              <a:t>• Store throttles: the datastore rejecting writes under load — the pipeline's far end pushing back.</a:t>
+            </a:r>
+          </a:p>
+          <a:p>
+            <a:r>
+              <a:t>• Together these are the techniques to monitor a serverless service (KE 6) — pick the leading one.</a:t>
+            </a:r>
+          </a:p>
+          <a:p>
+            <a:r>
+              <a:t>Misconception to pre-empt: "watch CPU like a server." No — serverless has no server CPU to watch; the</a:t>
+            </a:r>
+          </a:p>
+          <a:p>
+            <a:r>
+              <a:t>meaningful signals are queue depth, function errors/throttles, store throttles. The metrics differ from a VM.</a:t>
+            </a:r>
+          </a:p>
+          <a:p>
+            <a:r>
+              <a:t>Question to pose: "Which single metric best tells you the microservice is falling behind under load?"</a:t>
+            </a:r>
+          </a:p>
+          <a:p>
+            <a:r>
+              <a:t>(queue depth — a growing backlog is the scaling signal; sets up the alarm spec next).</a:t>
+            </a:r>
+          </a:p>
+          <a:p>
+            <a:r>
+              <a:t>UoC/AT2 tie: ICTCLD503 PC 4.1 (set up metrics) + KE 6 → AT2 §4.5 (D6); queue depth is the natural</a:t>
+            </a:r>
+          </a:p>
+          <a:p>
+            <a:r>
+              <a:t>scaling-relevant metric to alarm on.</a:t>
+            </a:r>
+          </a:p>
+        </p:txBody>
+      </p:sp>
+      <p:sp>
+        <p:nvSpPr>
+          <p:cNvPr id="4" name="Slide Number Placeholder 3"/>
+          <p:cNvSpPr>
+            <a:spLocks noGrp="1"/>
+          </p:cNvSpPr>
+          <p:nvPr>
+            <p:ph type="sldNum" idx="5" sz="quarter"/>
+          </p:nvPr>
+        </p:nvSpPr>
+        <p:spPr/>
+      </p:sp>
+    </p:spTree>
+  </p:cSld>
+  <p:clrMapOvr>
+    <a:masterClrMapping/>
+  </p:clrMapOvr>
+</p:notes>
+</file>
+
+<file path=ppt/notesSlides/notesSlide4.xml><?xml version="1.0" encoding="utf-8"?>
+<p:notes xmlns:a="http://schemas.openxmlformats.org/drawingml/2006/main" xmlns:p="http://schemas.openxmlformats.org/presentationml/2006/main" xmlns:r="http://schemas.openxmlformats.org/officeDocument/2006/relationships">
+  <p:cSld>
+    <p:spTree>
+      <p:nvGrpSpPr>
+        <p:cNvPr id="1" name=""/>
+        <p:cNvGrpSpPr/>
+        <p:nvPr/>
+      </p:nvGrpSpPr>
+      <p:grpSpPr>
+        <a:xfrm>
+          <a:off x="0" y="0"/>
+          <a:ext cx="0" cy="0"/>
+          <a:chOff x="0" y="0"/>
+          <a:chExt cx="0" cy="0"/>
+        </a:xfrm>
+      </p:grpSpPr>
+      <p:sp>
+        <p:nvSpPr>
+          <p:cNvPr id="2" name="Slide Image Placeholder 1"/>
+          <p:cNvSpPr>
+            <a:spLocks noGrp="1"/>
+          </p:cNvSpPr>
+          <p:nvPr>
+            <p:ph type="sldImg" idx="2"/>
+          </p:nvPr>
+        </p:nvSpPr>
+        <p:spPr/>
+      </p:sp>
+      <p:sp>
+        <p:nvSpPr>
+          <p:cNvPr id="3" name="Notes Placeholder 2"/>
+          <p:cNvSpPr>
+            <a:spLocks noGrp="1"/>
+          </p:cNvSpPr>
+          <p:nvPr>
+            <p:ph type="body" idx="3" sz="quarter"/>
+          </p:nvPr>
+        </p:nvSpPr>
+        <p:spPr/>
+        <p:txBody>
+          <a:bodyPr/>
+          <a:lstStyle/>
+          <a:p>
+            <a:r>
+              <a:t>Teach the discipline that the alarm THRESHOLD must trace to the design, not be plucked from the air.</a:t>
+            </a:r>
+          </a:p>
+          <a:p>
+            <a:r>
+              <a:t>This is where monitoring meets the DR plan's numbers.</a:t>
+            </a:r>
+          </a:p>
+          <a:p>
+            <a:r>
+              <a:t>• First bullet: set up a metric and a scaling-relevant alarm to the DESIGN SPECIFICATION — a threshold</a:t>
+            </a:r>
+          </a:p>
+          <a:p>
+            <a:r>
+              <a:t>that triggers when the signal crosses the line.</a:t>
+            </a:r>
+          </a:p>
+          <a:p>
+            <a:r>
+              <a:t>• Second bullet: attach a NOTIFICATION so a person or system is alerted when it fires — the alert</a:t>
+            </a:r>
+          </a:p>
+          <a:p>
+            <a:r>
+              <a:t>method (KE 6). An alarm nobody is told about is useless; the notification is half the point.</a:t>
+            </a:r>
+          </a:p>
+          <a:p>
+            <a:r>
+              <a:t>• Third bullet (the point): alarm to the SPEC, not to a guess — the threshold traces back to the</a:t>
+            </a:r>
+          </a:p>
+          <a:p>
+            <a:r>
+              <a:t>design's target (e.g. the throughput or RPO/RTO the DR plan committed to). Justify the number.</a:t>
+            </a:r>
+          </a:p>
+          <a:p>
+            <a:r>
+              <a:t>Misconception to pre-empt: "pick a round number that looks reasonable." No — the threshold must trace</a:t>
+            </a:r>
+          </a:p>
+          <a:p>
+            <a:r>
+              <a:t>to a design target; "why 100?" should be answerable from the design, not "it felt right."</a:t>
+            </a:r>
+          </a:p>
+          <a:p>
+            <a:r>
+              <a:t>Question to pose: "Where does your alarm threshold come from — and could you defend the number to the</a:t>
+            </a:r>
+          </a:p>
+          <a:p>
+            <a:r>
+              <a:t>client?" (from the design spec / DR targets; if you can't defend it, it's a guess).</a:t>
+            </a:r>
+          </a:p>
+          <a:p>
+            <a:r>
+              <a:t>UoC/AT2 tie: ICTCLD503 PC 4.1 (trigger scaling alarms per design specs) + KE 6 → AT2 §4.5 (D6); the</a:t>
+            </a:r>
+          </a:p>
+          <a:p>
+            <a:r>
+              <a:t>spec-traceable threshold is exactly what's assessed.</a:t>
+            </a:r>
+          </a:p>
+        </p:txBody>
+      </p:sp>
+      <p:sp>
+        <p:nvSpPr>
+          <p:cNvPr id="4" name="Slide Number Placeholder 3"/>
+          <p:cNvSpPr>
+            <a:spLocks noGrp="1"/>
+          </p:cNvSpPr>
+          <p:nvPr>
+            <p:ph type="sldNum" idx="5" sz="quarter"/>
+          </p:nvPr>
+        </p:nvSpPr>
+        <p:spPr/>
+      </p:sp>
+    </p:spTree>
+  </p:cSld>
+  <p:clrMapOvr>
+    <a:masterClrMapping/>
+  </p:clrMapOvr>
+</p:notes>
+</file>
+
+<file path=ppt/notesSlides/notesSlide5.xml><?xml version="1.0" encoding="utf-8"?>
+<p:notes xmlns:a="http://schemas.openxmlformats.org/drawingml/2006/main" xmlns:p="http://schemas.openxmlformats.org/presentationml/2006/main" xmlns:r="http://schemas.openxmlformats.org/officeDocument/2006/relationships">
+  <p:cSld>
+    <p:spTree>
+      <p:nvGrpSpPr>
+        <p:cNvPr id="1" name=""/>
+        <p:cNvGrpSpPr/>
+        <p:nvPr/>
+      </p:nvGrpSpPr>
+      <p:grpSpPr>
+        <a:xfrm>
+          <a:off x="0" y="0"/>
+          <a:ext cx="0" cy="0"/>
+          <a:chOff x="0" y="0"/>
+          <a:chExt cx="0" cy="0"/>
+        </a:xfrm>
+      </p:grpSpPr>
+      <p:sp>
+        <p:nvSpPr>
+          <p:cNvPr id="2" name="Slide Image Placeholder 1"/>
+          <p:cNvSpPr>
+            <a:spLocks noGrp="1"/>
+          </p:cNvSpPr>
+          <p:nvPr>
+            <p:ph type="sldImg" idx="2"/>
+          </p:nvPr>
+        </p:nvSpPr>
+        <p:spPr/>
+      </p:sp>
+      <p:sp>
+        <p:nvSpPr>
+          <p:cNvPr id="3" name="Notes Placeholder 2"/>
+          <p:cNvSpPr>
+            <a:spLocks noGrp="1"/>
+          </p:cNvSpPr>
+          <p:nvPr>
+            <p:ph type="body" idx="3" sz="quarter"/>
+          </p:nvPr>
+        </p:nvSpPr>
+        <p:spPr/>
+        <p:txBody>
+          <a:bodyPr/>
+          <a:lstStyle/>
+          <a:p>
+            <a:r>
+              <a:t>LIVE DEMONSTRATION (educator-led — screen it live in the lab; no recorded demo for this). Configure it</a:t>
+            </a:r>
+          </a:p>
+          <a:p>
+            <a:r>
+              <a:t>AND fire it, then they replicate on the practice microservice.</a:t>
+            </a:r>
+          </a:p>
+          <a:p/>
+          <a:p>
+            <a:r>
+              <a:t>WHAT TO DEMONSTRATE (in the lab):</a:t>
+            </a:r>
+          </a:p>
+          <a:p>
+            <a:r>
+              <a:t>1. Configure a queue-depth (or function-error) alarm on the running microservice, with a threshold.</a:t>
+            </a:r>
+          </a:p>
+          <a:p>
+            <a:r>
+              <a:t>2. Attach a notification so an alert is sent when it fires.</a:t>
+            </a:r>
+          </a:p>
+          <a:p>
+            <a:r>
+              <a:t>3. DRIVE the metric past the threshold (e.g. flood the queue) — watch the alarm go to ALARM and send</a:t>
+            </a:r>
+          </a:p>
+          <a:p>
+            <a:r>
+              <a:t>the notification.</a:t>
+            </a:r>
+          </a:p>
+          <a:p>
+            <a:r>
+              <a:t>4. Let it recover — watch it return to OK.</a:t>
+            </a:r>
+          </a:p>
+          <a:p/>
+          <a:p>
+            <a:r>
+              <a:t>WHAT TO EMPHASISE:</a:t>
+            </a:r>
+          </a:p>
+          <a:p>
+            <a:r>
+              <a:t>• Say WHERE the threshold number comes from (the design spec) as you type it — model spec-traceable,</a:t>
+            </a:r>
+          </a:p>
+          <a:p>
+            <a:r>
+              <a:t>not guessed.</a:t>
+            </a:r>
+          </a:p>
+          <a:p>
+            <a:r>
+              <a:t>• Show the full lifecycle: OK → ALARM → notification → back to OK. A configured-but-never-fired alarm</a:t>
+            </a:r>
+          </a:p>
+          <a:p>
+            <a:r>
+              <a:t>is untested.</a:t>
+            </a:r>
+          </a:p>
+          <a:p>
+            <a:r>
+              <a:t>• Point out the notification actually arriving — the alert method is the assessed half.</a:t>
+            </a:r>
+          </a:p>
+          <a:p/>
+          <a:p>
+            <a:r>
+              <a:t>PREP: the microservice running (Topic 8 deploy); a way to drive the metric (a burst of events to grow</a:t>
+            </a:r>
+          </a:p>
+          <a:p>
+            <a:r>
+              <a:t>queue depth); the notification target set up so it visibly fires. ~8–10 min to screen before the activity.</a:t>
+            </a:r>
+          </a:p>
+        </p:txBody>
+      </p:sp>
+      <p:sp>
+        <p:nvSpPr>
+          <p:cNvPr id="4" name="Slide Number Placeholder 3"/>
+          <p:cNvSpPr>
+            <a:spLocks noGrp="1"/>
+          </p:cNvSpPr>
+          <p:nvPr>
+            <p:ph type="sldNum" idx="5" sz="quarter"/>
+          </p:nvPr>
+        </p:nvSpPr>
+        <p:spPr/>
+      </p:sp>
+    </p:spTree>
+  </p:cSld>
+  <p:clrMapOvr>
+    <a:masterClrMapping/>
+  </p:clrMapOvr>
+</p:notes>
+</file>
+
+<file path=ppt/notesSlides/notesSlide6.xml><?xml version="1.0" encoding="utf-8"?>
+<p:notes xmlns:a="http://schemas.openxmlformats.org/drawingml/2006/main" xmlns:p="http://schemas.openxmlformats.org/presentationml/2006/main" xmlns:r="http://schemas.openxmlformats.org/officeDocument/2006/relationships">
+  <p:cSld>
+    <p:spTree>
+      <p:nvGrpSpPr>
+        <p:cNvPr id="1" name=""/>
+        <p:cNvGrpSpPr/>
+        <p:nvPr/>
+      </p:nvGrpSpPr>
+      <p:grpSpPr>
+        <a:xfrm>
+          <a:off x="0" y="0"/>
+          <a:ext cx="0" cy="0"/>
+          <a:chOff x="0" y="0"/>
+          <a:chExt cx="0" cy="0"/>
+        </a:xfrm>
+      </p:grpSpPr>
+      <p:sp>
+        <p:nvSpPr>
+          <p:cNvPr id="2" name="Slide Image Placeholder 1"/>
+          <p:cNvSpPr>
+            <a:spLocks noGrp="1"/>
+          </p:cNvSpPr>
+          <p:nvPr>
+            <p:ph type="sldImg" idx="2"/>
+          </p:nvPr>
+        </p:nvSpPr>
+        <p:spPr/>
+      </p:sp>
+      <p:sp>
+        <p:nvSpPr>
+          <p:cNvPr id="3" name="Notes Placeholder 2"/>
+          <p:cNvSpPr>
+            <a:spLocks noGrp="1"/>
+          </p:cNvSpPr>
+          <p:nvPr>
+            <p:ph type="body" idx="3" sz="quarter"/>
+          </p:nvPr>
+        </p:nvSpPr>
+        <p:spPr/>
+        <p:txBody>
+          <a:bodyPr/>
+          <a:lstStyle/>
+          <a:p>
+            <a:r>
+              <a:t>Facilitation — the C2 practice; students configure AND test an alarm on their practice microservice.</a:t>
+            </a:r>
+          </a:p>
+          <a:p>
+            <a:r>
+              <a:t>Tell students, in these words: "On the practice microservice, configure a metric and a</a:t>
+            </a:r>
+          </a:p>
+          <a:p>
+            <a:r>
+              <a:t>scaling-relevant alarm with a notification. Then drive it to ALARM and back, and confirm the</a:t>
+            </a:r>
+          </a:p>
+          <a:p>
+            <a:r>
+              <a:t>notification fired."</a:t>
+            </a:r>
+          </a:p>
+          <a:p>
+            <a:r>
+              <a:t>Steps (put on the board):</a:t>
+            </a:r>
+          </a:p>
+          <a:p>
+            <a:r>
+              <a:t>1. Choose a scaling-relevant metric (queue depth is the natural one) and set a threshold traceable to</a:t>
+            </a:r>
+          </a:p>
+          <a:p>
+            <a:r>
+              <a:t>the design spec.</a:t>
+            </a:r>
+          </a:p>
+          <a:p>
+            <a:r>
+              <a:t>2. Create the alarm and attach a notification.</a:t>
+            </a:r>
+          </a:p>
+          <a:p>
+            <a:r>
+              <a:t>3. Drive the metric past the threshold — confirm it goes to ALARM and the notification fires.</a:t>
+            </a:r>
+          </a:p>
+          <a:p>
+            <a:r>
+              <a:t>4. Let it recover — confirm it returns to OK.</a:t>
+            </a:r>
+          </a:p>
+          <a:p>
+            <a:r>
+              <a:t>Must produce: a configured metric + alarm with a notification, and evidence it fired (ALARM state +</a:t>
+            </a:r>
+          </a:p>
+          <a:p>
+            <a:r>
+              <a:t>notification) and recovered — the §4.5 / §6.5 evidence.</a:t>
+            </a:r>
+          </a:p>
+          <a:p>
+            <a:r>
+              <a:t>Timing: ~25 min. Where they get stuck: configuring the alarm but never firing it (untested), and</a:t>
+            </a:r>
+          </a:p>
+          <a:p>
+            <a:r>
+              <a:t>picking a threshold they can't justify — push them to trace the number to the spec.</a:t>
+            </a:r>
+          </a:p>
+          <a:p>
+            <a:r>
+              <a:t>Share-back prompt: ask one student for their threshold and WHY that number (should trace to a design target).</a:t>
+            </a:r>
+          </a:p>
+          <a:p>
+            <a:r>
+              <a:t>No-leakage note: the practice microservice is comparable-not-identical to the AT2 build; keep them on</a:t>
+            </a:r>
+          </a:p>
+          <a:p>
+            <a:r>
+              <a:t>the practice service here.</a:t>
+            </a:r>
+          </a:p>
+        </p:txBody>
+      </p:sp>
+      <p:sp>
+        <p:nvSpPr>
+          <p:cNvPr id="4" name="Slide Number Placeholder 3"/>
+          <p:cNvSpPr>
+            <a:spLocks noGrp="1"/>
+          </p:cNvSpPr>
+          <p:nvPr>
+            <p:ph type="sldNum" idx="5" sz="quarter"/>
+          </p:nvPr>
+        </p:nvSpPr>
+        <p:spPr/>
+      </p:sp>
+    </p:spTree>
+  </p:cSld>
+  <p:clrMapOvr>
+    <a:masterClrMapping/>
+  </p:clrMapOvr>
+</p:notes>
 </file>
 
 <file path=ppt/slideLayouts/slideLayout1.xml><?xml version="1.0" encoding="utf-8"?>
@@ -7411,4 +8604,324 @@
   </a:objectDefaults>
   <a:extraClrSchemeLst/>
 </a:theme>
+</file>
+
+<file path=ppt/theme/theme2.xml><?xml version="1.0" encoding="utf-8"?>
+<a:theme xmlns:a="http://schemas.openxmlformats.org/drawingml/2006/main" name="Office Theme">
+  <a:themeElements>
+    <a:clrScheme name="Office">
+      <a:dk1>
+        <a:sysClr val="windowText" lastClr="000000"/>
+      </a:dk1>
+      <a:lt1>
+        <a:sysClr val="window" lastClr="FFFFFF"/>
+      </a:lt1>
+      <a:dk2>
+        <a:srgbClr val="1F497D"/>
+      </a:dk2>
+      <a:lt2>
+        <a:srgbClr val="EEECE1"/>
+      </a:lt2>
+      <a:accent1>
+        <a:srgbClr val="4F81BD"/>
+      </a:accent1>
+      <a:accent2>
+        <a:srgbClr val="C0504D"/>
+      </a:accent2>
+      <a:accent3>
+        <a:srgbClr val="9BBB59"/>
+      </a:accent3>
+      <a:accent4>
+        <a:srgbClr val="8064A2"/>
+      </a:accent4>
+      <a:accent5>
+        <a:srgbClr val="4BACC6"/>
+      </a:accent5>
+      <a:accent6>
+        <a:srgbClr val="F79646"/>
+      </a:accent6>
+      <a:hlink>
+        <a:srgbClr val="0000FF"/>
+      </a:hlink>
+      <a:folHlink>
+        <a:srgbClr val="800080"/>
+      </a:folHlink>
+    </a:clrScheme>
+    <a:fontScheme name="Office">
+      <a:majorFont>
+        <a:latin typeface="Calibri"/>
+        <a:ea typeface=""/>
+        <a:cs typeface=""/>
+        <a:font script="Jpan" typeface="ＭＳ Ｐゴシック"/>
+        <a:font script="Hang" typeface="맑은 고딕"/>
+        <a:font script="Hans" typeface="宋体"/>
+        <a:font script="Hant" typeface="新細明體"/>
+        <a:font script="Arab" typeface="Times New Roman"/>
+        <a:font script="Hebr" typeface="Times New Roman"/>
+        <a:font script="Thai" typeface="Angsana New"/>
+        <a:font script="Ethi" typeface="Nyala"/>
+        <a:font script="Beng" typeface="Vrinda"/>
+        <a:font script="Gujr" typeface="Shruti"/>
+        <a:font script="Khmr" typeface="MoolBoran"/>
+        <a:font script="Knda" typeface="Tunga"/>
+        <a:font script="Guru" typeface="Raavi"/>
+        <a:font script="Cans" typeface="Euphemia"/>
+        <a:font script="Cher" typeface="Plantagenet Cherokee"/>
+        <a:font script="Yiii" typeface="Microsoft Yi Baiti"/>
+        <a:font script="Tibt" typeface="Microsoft Himalaya"/>
+        <a:font script="Thaa" typeface="MV Boli"/>
+        <a:font script="Deva" typeface="Mangal"/>
+        <a:font script="Telu" typeface="Gautami"/>
+        <a:font script="Taml" typeface="Latha"/>
+        <a:font script="Syrc" typeface="Estrangelo Edessa"/>
+        <a:font script="Orya" typeface="Kalinga"/>
+        <a:font script="Mlym" typeface="Kartika"/>
+        <a:font script="Laoo" typeface="DokChampa"/>
+        <a:font script="Sinh" typeface="Iskoola Pota"/>
+        <a:font script="Mong" typeface="Mongolian Baiti"/>
+        <a:font script="Viet" typeface="Times New Roman"/>
+        <a:font script="Uigh" typeface="Microsoft Uighur"/>
+        <a:font script="Geor" typeface="Sylfaen"/>
+      </a:majorFont>
+      <a:minorFont>
+        <a:latin typeface="Calibri"/>
+        <a:ea typeface=""/>
+        <a:cs typeface=""/>
+        <a:font script="Jpan" typeface="ＭＳ Ｐゴシック"/>
+        <a:font script="Hang" typeface="맑은 고딕"/>
+        <a:font script="Hans" typeface="宋体"/>
+        <a:font script="Hant" typeface="新細明體"/>
+        <a:font script="Arab" typeface="Arial"/>
+        <a:font script="Hebr" typeface="Arial"/>
+        <a:font script="Thai" typeface="Cordia New"/>
+        <a:font script="Ethi" typeface="Nyala"/>
+        <a:font script="Beng" typeface="Vrinda"/>
+        <a:font script="Gujr" typeface="Shruti"/>
+        <a:font script="Khmr" typeface="DaunPenh"/>
+        <a:font script="Knda" typeface="Tunga"/>
+        <a:font script="Guru" typeface="Raavi"/>
+        <a:font script="Cans" typeface="Euphemia"/>
+        <a:font script="Cher" typeface="Plantagenet Cherokee"/>
+        <a:font script="Yiii" typeface="Microsoft Yi Baiti"/>
+        <a:font script="Tibt" typeface="Microsoft Himalaya"/>
+        <a:font script="Thaa" typeface="MV Boli"/>
+        <a:font script="Deva" typeface="Mangal"/>
+        <a:font script="Telu" typeface="Gautami"/>
+        <a:font script="Taml" typeface="Latha"/>
+        <a:font script="Syrc" typeface="Estrangelo Edessa"/>
+        <a:font script="Orya" typeface="Kalinga"/>
+        <a:font script="Mlym" typeface="Kartika"/>
+        <a:font script="Laoo" typeface="DokChampa"/>
+        <a:font script="Sinh" typeface="Iskoola Pota"/>
+        <a:font script="Mong" typeface="Mongolian Baiti"/>
+        <a:font script="Viet" typeface="Arial"/>
+        <a:font script="Uigh" typeface="Microsoft Uighur"/>
+        <a:font script="Geor" typeface="Sylfaen"/>
+      </a:minorFont>
+    </a:fontScheme>
+    <a:fmtScheme name="Office">
+      <a:fillStyleLst>
+        <a:solidFill>
+          <a:schemeClr val="phClr"/>
+        </a:solidFill>
+        <a:gradFill rotWithShape="1">
+          <a:gsLst>
+            <a:gs pos="0">
+              <a:schemeClr val="phClr">
+                <a:tint val="50000"/>
+                <a:satMod val="300000"/>
+              </a:schemeClr>
+            </a:gs>
+            <a:gs pos="35000">
+              <a:schemeClr val="phClr">
+                <a:tint val="37000"/>
+                <a:satMod val="300000"/>
+              </a:schemeClr>
+            </a:gs>
+            <a:gs pos="100000">
+              <a:schemeClr val="phClr">
+                <a:tint val="15000"/>
+                <a:satMod val="350000"/>
+              </a:schemeClr>
+            </a:gs>
+          </a:gsLst>
+          <a:lin ang="16200000" scaled="1"/>
+        </a:gradFill>
+        <a:gradFill rotWithShape="1">
+          <a:gsLst>
+            <a:gs pos="0">
+              <a:schemeClr val="phClr">
+                <a:tint val="100000"/>
+                <a:shade val="100000"/>
+                <a:satMod val="130000"/>
+              </a:schemeClr>
+            </a:gs>
+            <a:gs pos="100000">
+              <a:schemeClr val="phClr">
+                <a:tint val="50000"/>
+                <a:shade val="100000"/>
+                <a:satMod val="350000"/>
+              </a:schemeClr>
+            </a:gs>
+          </a:gsLst>
+          <a:lin ang="16200000" scaled="0"/>
+        </a:gradFill>
+      </a:fillStyleLst>
+      <a:lnStyleLst>
+        <a:ln w="9525" cap="flat" cmpd="sng" algn="ctr">
+          <a:solidFill>
+            <a:schemeClr val="phClr">
+              <a:shade val="95000"/>
+              <a:satMod val="105000"/>
+            </a:schemeClr>
+          </a:solidFill>
+          <a:prstDash val="solid"/>
+        </a:ln>
+        <a:ln w="25400" cap="flat" cmpd="sng" algn="ctr">
+          <a:solidFill>
+            <a:schemeClr val="phClr"/>
+          </a:solidFill>
+          <a:prstDash val="solid"/>
+        </a:ln>
+        <a:ln w="38100" cap="flat" cmpd="sng" algn="ctr">
+          <a:solidFill>
+            <a:schemeClr val="phClr"/>
+          </a:solidFill>
+          <a:prstDash val="solid"/>
+        </a:ln>
+      </a:lnStyleLst>
+      <a:effectStyleLst>
+        <a:effectStyle>
+          <a:effectLst>
+            <a:outerShdw blurRad="40000" dist="20000" dir="5400000" rotWithShape="0">
+              <a:srgbClr val="000000">
+                <a:alpha val="38000"/>
+              </a:srgbClr>
+            </a:outerShdw>
+          </a:effectLst>
+        </a:effectStyle>
+        <a:effectStyle>
+          <a:effectLst>
+            <a:outerShdw blurRad="40000" dist="23000" dir="5400000" rotWithShape="0">
+              <a:srgbClr val="000000">
+                <a:alpha val="35000"/>
+              </a:srgbClr>
+            </a:outerShdw>
+          </a:effectLst>
+        </a:effectStyle>
+        <a:effectStyle>
+          <a:effectLst>
+            <a:outerShdw blurRad="40000" dist="23000" dir="5400000" rotWithShape="0">
+              <a:srgbClr val="000000">
+                <a:alpha val="35000"/>
+              </a:srgbClr>
+            </a:outerShdw>
+          </a:effectLst>
+          <a:scene3d>
+            <a:camera prst="orthographicFront">
+              <a:rot lat="0" lon="0" rev="0"/>
+            </a:camera>
+            <a:lightRig rig="threePt" dir="t">
+              <a:rot lat="0" lon="0" rev="1200000"/>
+            </a:lightRig>
+          </a:scene3d>
+          <a:sp3d>
+            <a:bevelT w="63500" h="25400"/>
+          </a:sp3d>
+        </a:effectStyle>
+      </a:effectStyleLst>
+      <a:bgFillStyleLst>
+        <a:solidFill>
+          <a:schemeClr val="phClr"/>
+        </a:solidFill>
+        <a:gradFill rotWithShape="1">
+          <a:gsLst>
+            <a:gs pos="0">
+              <a:schemeClr val="phClr">
+                <a:tint val="40000"/>
+                <a:satMod val="350000"/>
+              </a:schemeClr>
+            </a:gs>
+            <a:gs pos="40000">
+              <a:schemeClr val="phClr">
+                <a:tint val="45000"/>
+                <a:shade val="99000"/>
+                <a:satMod val="350000"/>
+              </a:schemeClr>
+            </a:gs>
+            <a:gs pos="100000">
+              <a:schemeClr val="phClr">
+                <a:shade val="20000"/>
+                <a:satMod val="255000"/>
+              </a:schemeClr>
+            </a:gs>
+          </a:gsLst>
+          <a:path path="circle">
+            <a:fillToRect l="50000" t="-80000" r="50000" b="180000"/>
+          </a:path>
+        </a:gradFill>
+        <a:gradFill rotWithShape="1">
+          <a:gsLst>
+            <a:gs pos="0">
+              <a:schemeClr val="phClr">
+                <a:tint val="80000"/>
+                <a:satMod val="300000"/>
+              </a:schemeClr>
+            </a:gs>
+            <a:gs pos="100000">
+              <a:schemeClr val="phClr">
+                <a:shade val="30000"/>
+                <a:satMod val="200000"/>
+              </a:schemeClr>
+            </a:gs>
+          </a:gsLst>
+          <a:path path="circle">
+            <a:fillToRect l="50000" t="50000" r="50000" b="50000"/>
+          </a:path>
+        </a:gradFill>
+      </a:bgFillStyleLst>
+    </a:fmtScheme>
+  </a:themeElements>
+  <a:objectDefaults>
+    <a:spDef>
+      <a:spPr/>
+      <a:bodyPr/>
+      <a:lstStyle/>
+      <a:style>
+        <a:lnRef idx="1">
+          <a:schemeClr val="accent1"/>
+        </a:lnRef>
+        <a:fillRef idx="3">
+          <a:schemeClr val="accent1"/>
+        </a:fillRef>
+        <a:effectRef idx="2">
+          <a:schemeClr val="accent1"/>
+        </a:effectRef>
+        <a:fontRef idx="minor">
+          <a:schemeClr val="lt1"/>
+        </a:fontRef>
+      </a:style>
+    </a:spDef>
+    <a:lnDef>
+      <a:spPr/>
+      <a:bodyPr/>
+      <a:lstStyle/>
+      <a:style>
+        <a:lnRef idx="2">
+          <a:schemeClr val="accent1"/>
+        </a:lnRef>
+        <a:fillRef idx="0">
+          <a:schemeClr val="accent1"/>
+        </a:fillRef>
+        <a:effectRef idx="1">
+          <a:schemeClr val="accent1"/>
+        </a:effectRef>
+        <a:fontRef idx="minor">
+          <a:schemeClr val="tx1"/>
+        </a:fontRef>
+      </a:style>
+    </a:lnDef>
+  </a:objectDefaults>
+  <a:extraClrSchemeLst/>
+</a:theme>
 </file>
--- a/S1-CL2-Cloud-Disaster-Recovery/delivery/topic_09/Topic_09_Slides.pptx
+++ b/S1-CL2-Cloud-Disaster-Recovery/delivery/topic_09/Topic_09_Slides.pptx
@@ -5567,7 +5567,7 @@
                 </a:solidFill>
                 <a:latin typeface="Roboto"/>
               </a:rPr>
-              <a:t>`teach → demo → practice`: watch a metric + alarm configured and fired, then do it yourself.</a:t>
+              <a:t>teach → demo → practice: watch a metric + alarm configured and fired, then do it yourself.</a:t>
             </a:r>
           </a:p>
           <a:p>

--- a/S1-CL2-Cloud-Disaster-Recovery/delivery/topic_09/Topic_09_Slides.pptx
+++ b/S1-CL2-Cloud-Disaster-Recovery/delivery/topic_09/Topic_09_Slides.pptx
@@ -16,6 +16,16 @@
     <p:sldId id="264" r:id="rId16"/>
     <p:sldId id="265" r:id="rId17"/>
     <p:sldId id="266" r:id="rId18"/>
+    <p:sldId id="267" r:id="rId19"/>
+    <p:sldId id="268" r:id="rId20"/>
+    <p:sldId id="269" r:id="rId21"/>
+    <p:sldId id="270" r:id="rId22"/>
+    <p:sldId id="271" r:id="rId23"/>
+    <p:sldId id="272" r:id="rId24"/>
+    <p:sldId id="273" r:id="rId25"/>
+    <p:sldId id="274" r:id="rId26"/>
+    <p:sldId id="275" r:id="rId27"/>
+    <p:sldId id="276" r:id="rId28"/>
   </p:sldIdLst>
   <p:sldSz cx="12191695" cy="6858000" type="screen4x3"/>
   <p:notesSz cx="6858000" cy="9144000"/>
@@ -512,82 +522,162 @@
           <a:lstStyle/>
           <a:p>
             <a:r>
-              <a:t>Frame Topic 9 as the pivot from "it runs" to "you can SEE it running." Set the mode; don't configure</a:t>
-            </a:r>
-          </a:p>
-          <a:p>
-            <a:r>
-              <a:t>an alarm yet.</a:t>
-            </a:r>
-          </a:p>
-          <a:p>
-            <a:r>
-              <a:t>• First bullet: the microservice runs (Topic 8); now make it observable so you can see trouble coming</a:t>
-            </a:r>
-          </a:p>
-          <a:p>
-            <a:r>
-              <a:t>before users feel it. Observability is a build step, not an afterthought.</a:t>
-            </a:r>
-          </a:p>
-          <a:p>
-            <a:r>
-              <a:t>• Second bullet (the tie-back): this is the PRACTICAL form of the DR plan's detection step they</a:t>
-            </a:r>
-          </a:p>
-          <a:p>
-            <a:r>
-              <a:t>designed in AT1 (Topic 4) — the paper "we'll detect failures" becomes real CloudWatch config today.</a:t>
-            </a:r>
-          </a:p>
-          <a:p>
-            <a:r>
-              <a:t>Point back to that plan.</a:t>
-            </a:r>
-          </a:p>
-          <a:p>
-            <a:r>
-              <a:t>• Third bullet: the rhythm — `teach → demo → practice`: watch a metric + alarm configured and fired,</a:t>
-            </a:r>
-          </a:p>
-          <a:p>
-            <a:r>
-              <a:t>then do it themselves.</a:t>
-            </a:r>
-          </a:p>
-          <a:p>
-            <a:r>
-              <a:t>• Fourth bullet: configured in the lab (us-east-1); the metrics and alarms are the same anywhere — no</a:t>
-            </a:r>
-          </a:p>
-          <a:p>
-            <a:r>
-              <a:t>substitution caveat beyond the Region.</a:t>
-            </a:r>
-          </a:p>
-          <a:p>
-            <a:r>
-              <a:t>Misconception to pre-empt: "monitoring is something ops bolts on later." No — the detection step of the</a:t>
-            </a:r>
-          </a:p>
-          <a:p>
-            <a:r>
-              <a:t>DR plan REQUIRES it; a system you can't observe can't meet its own recovery objectives. It's the build.</a:t>
-            </a:r>
-          </a:p>
-          <a:p>
-            <a:r>
-              <a:t>Question to pose: "Your AT1 DR plan says failures will be detected — concretely, what has to exist for</a:t>
-            </a:r>
-          </a:p>
-          <a:p>
-            <a:r>
-              <a:t>that to be true?" (a metric being watched + an alarm that alerts someone; today builds exactly that).</a:t>
-            </a:r>
-          </a:p>
-          <a:p>
-            <a:r>
-              <a:t>UoC/AT2 tie: opens the monitoring build — ICTCLD503 PC 4.1 + ICTCLD501 KE 6 — evidenced in AT2 §4.5 (D6).</a:t>
+              <a:t>Workbook tasks 20 to 22, then the written questions Q1 to Q3.</a:t>
+            </a:r>
+          </a:p>
+          <a:p>
+            <a:r>
+              <a:t>The capture-as-you-go habit from Topic 7 pays off here; thin evidence now is a habit gap surfacing.</a:t>
+            </a:r>
+          </a:p>
+        </p:txBody>
+      </p:sp>
+      <p:sp>
+        <p:nvSpPr>
+          <p:cNvPr id="4" name="Slide Number Placeholder 3"/>
+          <p:cNvSpPr>
+            <a:spLocks noGrp="1"/>
+          </p:cNvSpPr>
+          <p:nvPr>
+            <p:ph type="sldNum" idx="5" sz="quarter"/>
+          </p:nvPr>
+        </p:nvSpPr>
+        <p:spPr/>
+      </p:sp>
+    </p:spTree>
+  </p:cSld>
+  <p:clrMapOvr>
+    <a:masterClrMapping/>
+  </p:clrMapOvr>
+</p:notes>
+</file>
+
+<file path=ppt/notesSlides/notesSlide10.xml><?xml version="1.0" encoding="utf-8"?>
+<p:notes xmlns:a="http://schemas.openxmlformats.org/drawingml/2006/main" xmlns:p="http://schemas.openxmlformats.org/presentationml/2006/main" xmlns:r="http://schemas.openxmlformats.org/officeDocument/2006/relationships">
+  <p:cSld>
+    <p:spTree>
+      <p:nvGrpSpPr>
+        <p:cNvPr id="1" name=""/>
+        <p:cNvGrpSpPr/>
+        <p:nvPr/>
+      </p:nvGrpSpPr>
+      <p:grpSpPr>
+        <a:xfrm>
+          <a:off x="0" y="0"/>
+          <a:ext cx="0" cy="0"/>
+          <a:chOff x="0" y="0"/>
+          <a:chExt cx="0" cy="0"/>
+        </a:xfrm>
+      </p:grpSpPr>
+      <p:sp>
+        <p:nvSpPr>
+          <p:cNvPr id="2" name="Slide Image Placeholder 1"/>
+          <p:cNvSpPr>
+            <a:spLocks noGrp="1"/>
+          </p:cNvSpPr>
+          <p:nvPr>
+            <p:ph type="sldImg" idx="2"/>
+          </p:nvPr>
+        </p:nvSpPr>
+        <p:spPr/>
+      </p:sp>
+      <p:sp>
+        <p:nvSpPr>
+          <p:cNvPr id="3" name="Notes Placeholder 2"/>
+          <p:cNvSpPr>
+            <a:spLocks noGrp="1"/>
+          </p:cNvSpPr>
+          <p:nvPr>
+            <p:ph type="body" idx="3" sz="quarter"/>
+          </p:nvPr>
+        </p:nvSpPr>
+        <p:spPr/>
+        <p:txBody>
+          <a:bodyPr/>
+          <a:lstStyle/>
+          <a:p>
+            <a:r>
+              <a:t>The assessment workbook carries Q1–Q3; the practice workbook carries none — rehearse with the assessment's questions against the practice build.</a:t>
+            </a:r>
+          </a:p>
+          <a:p>
+            <a:r>
+              <a:t>"How you tested" is answered from their task 15–16 record; "manage over time" from their parameterisation and updates.</a:t>
+            </a:r>
+          </a:p>
+        </p:txBody>
+      </p:sp>
+      <p:sp>
+        <p:nvSpPr>
+          <p:cNvPr id="4" name="Slide Number Placeholder 3"/>
+          <p:cNvSpPr>
+            <a:spLocks noGrp="1"/>
+          </p:cNvSpPr>
+          <p:nvPr>
+            <p:ph type="sldNum" idx="5" sz="quarter"/>
+          </p:nvPr>
+        </p:nvSpPr>
+        <p:spPr/>
+      </p:sp>
+    </p:spTree>
+  </p:cSld>
+  <p:clrMapOvr>
+    <a:masterClrMapping/>
+  </p:clrMapOvr>
+</p:notes>
+</file>
+
+<file path=ppt/notesSlides/notesSlide11.xml><?xml version="1.0" encoding="utf-8"?>
+<p:notes xmlns:a="http://schemas.openxmlformats.org/drawingml/2006/main" xmlns:p="http://schemas.openxmlformats.org/presentationml/2006/main" xmlns:r="http://schemas.openxmlformats.org/officeDocument/2006/relationships">
+  <p:cSld>
+    <p:spTree>
+      <p:nvGrpSpPr>
+        <p:cNvPr id="1" name=""/>
+        <p:cNvGrpSpPr/>
+        <p:nvPr/>
+      </p:nvGrpSpPr>
+      <p:grpSpPr>
+        <a:xfrm>
+          <a:off x="0" y="0"/>
+          <a:ext cx="0" cy="0"/>
+          <a:chOff x="0" y="0"/>
+          <a:chExt cx="0" cy="0"/>
+        </a:xfrm>
+      </p:grpSpPr>
+      <p:sp>
+        <p:nvSpPr>
+          <p:cNvPr id="2" name="Slide Image Placeholder 1"/>
+          <p:cNvSpPr>
+            <a:spLocks noGrp="1"/>
+          </p:cNvSpPr>
+          <p:nvPr>
+            <p:ph type="sldImg" idx="2"/>
+          </p:nvPr>
+        </p:nvSpPr>
+        <p:spPr/>
+      </p:sp>
+      <p:sp>
+        <p:nvSpPr>
+          <p:cNvPr id="3" name="Notes Placeholder 2"/>
+          <p:cNvSpPr>
+            <a:spLocks noGrp="1"/>
+          </p:cNvSpPr>
+          <p:nvPr>
+            <p:ph type="body" idx="3" sz="quarter"/>
+          </p:nvPr>
+        </p:nvSpPr>
+        <p:spPr/>
+        <p:txBody>
+          <a:bodyPr/>
+          <a:lstStyle/>
+          <a:p>
+            <a:r>
+              <a:t>Activity = assessment Q1–Q3 rehearsed on the practice build.</a:t>
+            </a:r>
+          </a:p>
+          <a:p>
+            <a:r>
+              <a:t>Push every generic answer back to a concrete artefact of their own.</a:t>
             </a:r>
           </a:p>
         </p:txBody>
@@ -657,67 +747,12 @@
           <a:lstStyle/>
           <a:p>
             <a:r>
-              <a:t>A vendor-neutral primer on what a metric IS, before naming the microservice's specific signals. Keep</a:t>
-            </a:r>
-          </a:p>
-          <a:p>
-            <a:r>
-              <a:t>it foundational.</a:t>
-            </a:r>
-          </a:p>
-          <a:p>
-            <a:r>
-              <a:t>• First bullet: a metric is a time-series number the platform emits about a resource — a queue length,</a:t>
-            </a:r>
-          </a:p>
-          <a:p>
-            <a:r>
-              <a:t>an error count, a duration. It's data over time, not a snapshot.</a:t>
-            </a:r>
-          </a:p>
-          <a:p>
-            <a:r>
-              <a:t>• Second bullet (KE 6): monitoring is watching the metrics that PREDICT trouble, before users feel it.</a:t>
-            </a:r>
-          </a:p>
-          <a:p>
-            <a:r>
-              <a:t>The art is choosing the few signals that lead the problem, not lag it.</a:t>
-            </a:r>
-          </a:p>
-          <a:p>
-            <a:r>
-              <a:t>• Third bullet (the motto): you cannot manage what you do not measure. Say it out loud — it's why the</a:t>
-            </a:r>
-          </a:p>
-          <a:p>
-            <a:r>
-              <a:t>next slide picks specific signals.</a:t>
-            </a:r>
-          </a:p>
-          <a:p>
-            <a:r>
-              <a:t>Misconception to pre-empt: "monitor everything." No — a wall of dashboards nobody reads is not</a:t>
-            </a:r>
-          </a:p>
-          <a:p>
-            <a:r>
-              <a:t>monitoring; you pick the leading signals for THIS service. Selection is the skill.</a:t>
-            </a:r>
-          </a:p>
-          <a:p>
-            <a:r>
-              <a:t>Question to pose: "What makes a metric useful for prevention rather than a post-mortem?" (it moves</a:t>
-            </a:r>
-          </a:p>
-          <a:p>
-            <a:r>
-              <a:t>BEFORE the failure — a leading signal like a rising queue, not a lagging one like a user complaint).</a:t>
-            </a:r>
-          </a:p>
-          <a:p>
-            <a:r>
-              <a:t>UoC/AT2 tie: ICTCLD503 PC 4.1 + ICTCLD501 KE 6 — the monitoring foundation evidenced in AT2 §4.5 (D6).</a:t>
+              <a:t>The audience is a future operator, not the author. Undocumented parameters are traps.</a:t>
+            </a:r>
+          </a:p>
+          <a:p>
+            <a:r>
+              <a:t>Readable code is not a runbook — the operations need spelling out.</a:t>
             </a:r>
           </a:p>
         </p:txBody>
@@ -787,72 +822,12 @@
           <a:lstStyle/>
           <a:p>
             <a:r>
-              <a:t>Make the primer concrete — the specific signals that matter on THIS queue-driven serverless</a:t>
-            </a:r>
-          </a:p>
-          <a:p>
-            <a:r>
-              <a:t>microservice. These are the ones they'll choose from for the alarm.</a:t>
-            </a:r>
-          </a:p>
-          <a:p>
-            <a:r>
-              <a:t>• Queue depth: the scaling signal for a queue-driven function — a rising backlog means the consumer</a:t>
-            </a:r>
-          </a:p>
-          <a:p>
-            <a:r>
-              <a:t>(the function) can't keep up with arrivals. This is the headline metric; it predicts overload.</a:t>
-            </a:r>
-          </a:p>
-          <a:p>
-            <a:r>
-              <a:t>• Function errors and throttles: the code failing (errors) or the platform limiting concurrency</a:t>
-            </a:r>
-          </a:p>
-          <a:p>
-            <a:r>
-              <a:t>(throttles). Distinguish the two — an error is your bug; a throttle is a capacity limit.</a:t>
-            </a:r>
-          </a:p>
-          <a:p>
-            <a:r>
-              <a:t>• Store throttles: the datastore rejecting writes under load — the pipeline's far end pushing back.</a:t>
-            </a:r>
-          </a:p>
-          <a:p>
-            <a:r>
-              <a:t>• Together these are the techniques to monitor a serverless service (KE 6) — pick the leading one.</a:t>
-            </a:r>
-          </a:p>
-          <a:p>
-            <a:r>
-              <a:t>Misconception to pre-empt: "watch CPU like a server." No — serverless has no server CPU to watch; the</a:t>
-            </a:r>
-          </a:p>
-          <a:p>
-            <a:r>
-              <a:t>meaningful signals are queue depth, function errors/throttles, store throttles. The metrics differ from a VM.</a:t>
-            </a:r>
-          </a:p>
-          <a:p>
-            <a:r>
-              <a:t>Question to pose: "Which single metric best tells you the microservice is falling behind under load?"</a:t>
-            </a:r>
-          </a:p>
-          <a:p>
-            <a:r>
-              <a:t>(queue depth — a growing backlog is the scaling signal; sets up the alarm spec next).</a:t>
-            </a:r>
-          </a:p>
-          <a:p>
-            <a:r>
-              <a:t>UoC/AT2 tie: ICTCLD503 PC 4.1 (set up metrics) + KE 6 → AT2 §4.5 (D6); queue depth is the natural</a:t>
-            </a:r>
-          </a:p>
-          <a:p>
-            <a:r>
-              <a:t>scaling-relevant metric to alarm on.</a:t>
+              <a:t>Workbook task 20. The common miss is describing what the template contains instead of how to operate it.</a:t>
+            </a:r>
+          </a:p>
+          <a:p>
+            <a:r>
+              <a:t>Update-via-change-set is the procedure students forget to document.</a:t>
             </a:r>
           </a:p>
         </p:txBody>
@@ -922,72 +897,12 @@
           <a:lstStyle/>
           <a:p>
             <a:r>
-              <a:t>Teach the discipline that the alarm THRESHOLD must trace to the design, not be plucked from the air.</a:t>
-            </a:r>
-          </a:p>
-          <a:p>
-            <a:r>
-              <a:t>This is where monitoring meets the DR plan's numbers.</a:t>
-            </a:r>
-          </a:p>
-          <a:p>
-            <a:r>
-              <a:t>• First bullet: set up a metric and a scaling-relevant alarm to the DESIGN SPECIFICATION — a threshold</a:t>
-            </a:r>
-          </a:p>
-          <a:p>
-            <a:r>
-              <a:t>that triggers when the signal crosses the line.</a:t>
-            </a:r>
-          </a:p>
-          <a:p>
-            <a:r>
-              <a:t>• Second bullet: attach a NOTIFICATION so a person or system is alerted when it fires — the alert</a:t>
-            </a:r>
-          </a:p>
-          <a:p>
-            <a:r>
-              <a:t>method (KE 6). An alarm nobody is told about is useless; the notification is half the point.</a:t>
-            </a:r>
-          </a:p>
-          <a:p>
-            <a:r>
-              <a:t>• Third bullet (the point): alarm to the SPEC, not to a guess — the threshold traces back to the</a:t>
-            </a:r>
-          </a:p>
-          <a:p>
-            <a:r>
-              <a:t>design's target (e.g. the throughput or RPO/RTO the DR plan committed to). Justify the number.</a:t>
-            </a:r>
-          </a:p>
-          <a:p>
-            <a:r>
-              <a:t>Misconception to pre-empt: "pick a round number that looks reasonable." No — the threshold must trace</a:t>
-            </a:r>
-          </a:p>
-          <a:p>
-            <a:r>
-              <a:t>to a design target; "why 100?" should be answerable from the design, not "it felt right."</a:t>
-            </a:r>
-          </a:p>
-          <a:p>
-            <a:r>
-              <a:t>Question to pose: "Where does your alarm threshold come from — and could you defend the number to the</a:t>
-            </a:r>
-          </a:p>
-          <a:p>
-            <a:r>
-              <a:t>client?" (from the design spec / DR targets; if you can't defend it, it's a guess).</a:t>
-            </a:r>
-          </a:p>
-          <a:p>
-            <a:r>
-              <a:t>UoC/AT2 tie: ICTCLD503 PC 4.1 (trigger scaling alarms per design specs) + KE 6 → AT2 §4.5 (D6); the</a:t>
-            </a:r>
-          </a:p>
-          <a:p>
-            <a:r>
-              <a:t>spec-traceable threshold is exactly what's assessed.</a:t>
+              <a:t>Activity = practice workbook task 20.</a:t>
+            </a:r>
+          </a:p>
+          <a:p>
+            <a:r>
+              <a:t>The swap test works: could a neighbour deploy the stack from the doc alone?</a:t>
             </a:r>
           </a:p>
         </p:txBody>
@@ -1057,85 +972,12 @@
           <a:lstStyle/>
           <a:p>
             <a:r>
-              <a:t>LIVE DEMONSTRATION (educator-led — screen it live in the lab; no recorded demo for this). Configure it</a:t>
-            </a:r>
-          </a:p>
-          <a:p>
-            <a:r>
-              <a:t>AND fire it, then they replicate on the practice microservice.</a:t>
-            </a:r>
-          </a:p>
-          <a:p/>
-          <a:p>
-            <a:r>
-              <a:t>WHAT TO DEMONSTRATE (in the lab):</a:t>
-            </a:r>
-          </a:p>
-          <a:p>
-            <a:r>
-              <a:t>1. Configure a queue-depth (or function-error) alarm on the running microservice, with a threshold.</a:t>
-            </a:r>
-          </a:p>
-          <a:p>
-            <a:r>
-              <a:t>2. Attach a notification so an alert is sent when it fires.</a:t>
-            </a:r>
-          </a:p>
-          <a:p>
-            <a:r>
-              <a:t>3. DRIVE the metric past the threshold (e.g. flood the queue) — watch the alarm go to ALARM and send</a:t>
-            </a:r>
-          </a:p>
-          <a:p>
-            <a:r>
-              <a:t>the notification.</a:t>
-            </a:r>
-          </a:p>
-          <a:p>
-            <a:r>
-              <a:t>4. Let it recover — watch it return to OK.</a:t>
-            </a:r>
-          </a:p>
-          <a:p/>
-          <a:p>
-            <a:r>
-              <a:t>WHAT TO EMPHASISE:</a:t>
-            </a:r>
-          </a:p>
-          <a:p>
-            <a:r>
-              <a:t>• Say WHERE the threshold number comes from (the design spec) as you type it — model spec-traceable,</a:t>
-            </a:r>
-          </a:p>
-          <a:p>
-            <a:r>
-              <a:t>not guessed.</a:t>
-            </a:r>
-          </a:p>
-          <a:p>
-            <a:r>
-              <a:t>• Show the full lifecycle: OK → ALARM → notification → back to OK. A configured-but-never-fired alarm</a:t>
-            </a:r>
-          </a:p>
-          <a:p>
-            <a:r>
-              <a:t>is untested.</a:t>
-            </a:r>
-          </a:p>
-          <a:p>
-            <a:r>
-              <a:t>• Point out the notification actually arriving — the alert method is the assessed half.</a:t>
-            </a:r>
-          </a:p>
-          <a:p/>
-          <a:p>
-            <a:r>
-              <a:t>PREP: the microservice running (Topic 8 deploy); a way to drive the metric (a burst of events to grow</a:t>
-            </a:r>
-          </a:p>
-          <a:p>
-            <a:r>
-              <a:t>queue depth); the notification target set up so it visibly fires. ~8–10 min to screen before the activity.</a:t>
+              <a:t>Workbook task 21. Hand-deleting resources a template owns is the closing form of drift.</a:t>
+            </a:r>
+          </a:p>
+          <a:p>
+            <a:r>
+              <a:t>Confirming the teardown is the half students skip — check the console after, not just the delete status.</a:t>
             </a:r>
           </a:p>
         </p:txBody>
@@ -1205,87 +1047,237 @@
           <a:lstStyle/>
           <a:p>
             <a:r>
-              <a:t>Facilitation — the C2 practice; students configure AND test an alarm on their practice microservice.</a:t>
-            </a:r>
-          </a:p>
-          <a:p>
-            <a:r>
-              <a:t>Tell students, in these words: "On the practice microservice, configure a metric and a</a:t>
-            </a:r>
-          </a:p>
-          <a:p>
-            <a:r>
-              <a:t>scaling-relevant alarm with a notification. Then drive it to ALARM and back, and confirm the</a:t>
-            </a:r>
-          </a:p>
-          <a:p>
-            <a:r>
-              <a:t>notification fired."</a:t>
-            </a:r>
-          </a:p>
-          <a:p>
-            <a:r>
-              <a:t>Steps (put on the board):</a:t>
-            </a:r>
-          </a:p>
-          <a:p>
-            <a:r>
-              <a:t>1. Choose a scaling-relevant metric (queue depth is the natural one) and set a threshold traceable to</a:t>
-            </a:r>
-          </a:p>
-          <a:p>
-            <a:r>
-              <a:t>the design spec.</a:t>
-            </a:r>
-          </a:p>
-          <a:p>
-            <a:r>
-              <a:t>2. Create the alarm and attach a notification.</a:t>
-            </a:r>
-          </a:p>
-          <a:p>
-            <a:r>
-              <a:t>3. Drive the metric past the threshold — confirm it goes to ALARM and the notification fires.</a:t>
-            </a:r>
-          </a:p>
-          <a:p>
-            <a:r>
-              <a:t>4. Let it recover — confirm it returns to OK.</a:t>
-            </a:r>
-          </a:p>
-          <a:p>
-            <a:r>
-              <a:t>Must produce: a configured metric + alarm with a notification, and evidence it fired (ALARM state +</a:t>
-            </a:r>
-          </a:p>
-          <a:p>
-            <a:r>
-              <a:t>notification) and recovered — the §4.5 / §6.5 evidence.</a:t>
-            </a:r>
-          </a:p>
-          <a:p>
-            <a:r>
-              <a:t>Timing: ~25 min. Where they get stuck: configuring the alarm but never firing it (untested), and</a:t>
-            </a:r>
-          </a:p>
-          <a:p>
-            <a:r>
-              <a:t>picking a threshold they can't justify — push them to trace the number to the spec.</a:t>
-            </a:r>
-          </a:p>
-          <a:p>
-            <a:r>
-              <a:t>Share-back prompt: ask one student for their threshold and WHY that number (should trace to a design target).</a:t>
-            </a:r>
-          </a:p>
-          <a:p>
-            <a:r>
-              <a:t>No-leakage note: the practice microservice is comparable-not-identical to the AT2 build; keep them on</a:t>
-            </a:r>
-          </a:p>
-          <a:p>
-            <a:r>
-              <a:t>the practice service here.</a:t>
+              <a:t>Activity = practice workbook task 21.</a:t>
+            </a:r>
+          </a:p>
+          <a:p>
+            <a:r>
+              <a:t>Ask what order they chose and why — the dependency reasoning is the teaching.</a:t>
+            </a:r>
+          </a:p>
+        </p:txBody>
+      </p:sp>
+      <p:sp>
+        <p:nvSpPr>
+          <p:cNvPr id="4" name="Slide Number Placeholder 3"/>
+          <p:cNvSpPr>
+            <a:spLocks noGrp="1"/>
+          </p:cNvSpPr>
+          <p:nvPr>
+            <p:ph type="sldNum" idx="5" sz="quarter"/>
+          </p:nvPr>
+        </p:nvSpPr>
+        <p:spPr/>
+      </p:sp>
+    </p:spTree>
+  </p:cSld>
+  <p:clrMapOvr>
+    <a:masterClrMapping/>
+  </p:clrMapOvr>
+</p:notes>
+</file>
+
+<file path=ppt/notesSlides/notesSlide7.xml><?xml version="1.0" encoding="utf-8"?>
+<p:notes xmlns:a="http://schemas.openxmlformats.org/drawingml/2006/main" xmlns:p="http://schemas.openxmlformats.org/presentationml/2006/main" xmlns:r="http://schemas.openxmlformats.org/officeDocument/2006/relationships">
+  <p:cSld>
+    <p:spTree>
+      <p:nvGrpSpPr>
+        <p:cNvPr id="1" name=""/>
+        <p:cNvGrpSpPr/>
+        <p:nvPr/>
+      </p:nvGrpSpPr>
+      <p:grpSpPr>
+        <a:xfrm>
+          <a:off x="0" y="0"/>
+          <a:ext cx="0" cy="0"/>
+          <a:chOff x="0" y="0"/>
+          <a:chExt cx="0" cy="0"/>
+        </a:xfrm>
+      </p:grpSpPr>
+      <p:sp>
+        <p:nvSpPr>
+          <p:cNvPr id="2" name="Slide Image Placeholder 1"/>
+          <p:cNvSpPr>
+            <a:spLocks noGrp="1"/>
+          </p:cNvSpPr>
+          <p:nvPr>
+            <p:ph type="sldImg" idx="2"/>
+          </p:nvPr>
+        </p:nvSpPr>
+        <p:spPr/>
+      </p:sp>
+      <p:sp>
+        <p:nvSpPr>
+          <p:cNvPr id="3" name="Notes Placeholder 2"/>
+          <p:cNvSpPr>
+            <a:spLocks noGrp="1"/>
+          </p:cNvSpPr>
+          <p:nvPr>
+            <p:ph type="body" idx="3" sz="quarter"/>
+          </p:nvPr>
+        </p:nvSpPr>
+        <p:spPr/>
+        <p:txBody>
+          <a:bodyPr/>
+          <a:lstStyle/>
+          <a:p>
+            <a:r>
+              <a:t>Workbook task 22, first half. The evidence from the build is the material — the tests, the alarm firing, the docs.</a:t>
+            </a:r>
+          </a:p>
+          <a:p>
+            <a:r>
+              <a:t>Rehearse saying "the alarm fires on queue depth" without the jargon.</a:t>
+            </a:r>
+          </a:p>
+        </p:txBody>
+      </p:sp>
+      <p:sp>
+        <p:nvSpPr>
+          <p:cNvPr id="4" name="Slide Number Placeholder 3"/>
+          <p:cNvSpPr>
+            <a:spLocks noGrp="1"/>
+          </p:cNvSpPr>
+          <p:nvPr>
+            <p:ph type="sldNum" idx="5" sz="quarter"/>
+          </p:nvPr>
+        </p:nvSpPr>
+        <p:spPr/>
+      </p:sp>
+    </p:spTree>
+  </p:cSld>
+  <p:clrMapOvr>
+    <a:masterClrMapping/>
+  </p:clrMapOvr>
+</p:notes>
+</file>
+
+<file path=ppt/notesSlides/notesSlide8.xml><?xml version="1.0" encoding="utf-8"?>
+<p:notes xmlns:a="http://schemas.openxmlformats.org/drawingml/2006/main" xmlns:p="http://schemas.openxmlformats.org/presentationml/2006/main" xmlns:r="http://schemas.openxmlformats.org/officeDocument/2006/relationships">
+  <p:cSld>
+    <p:spTree>
+      <p:nvGrpSpPr>
+        <p:cNvPr id="1" name=""/>
+        <p:cNvGrpSpPr/>
+        <p:nvPr/>
+      </p:nvGrpSpPr>
+      <p:grpSpPr>
+        <a:xfrm>
+          <a:off x="0" y="0"/>
+          <a:ext cx="0" cy="0"/>
+          <a:chOff x="0" y="0"/>
+          <a:chExt cx="0" cy="0"/>
+        </a:xfrm>
+      </p:grpSpPr>
+      <p:sp>
+        <p:nvSpPr>
+          <p:cNvPr id="2" name="Slide Image Placeholder 1"/>
+          <p:cNvSpPr>
+            <a:spLocks noGrp="1"/>
+          </p:cNvSpPr>
+          <p:nvPr>
+            <p:ph type="sldImg" idx="2"/>
+          </p:nvPr>
+        </p:nvSpPr>
+        <p:spPr/>
+      </p:sp>
+      <p:sp>
+        <p:nvSpPr>
+          <p:cNvPr id="3" name="Notes Placeholder 2"/>
+          <p:cNvSpPr>
+            <a:spLocks noGrp="1"/>
+          </p:cNvSpPr>
+          <p:nvPr>
+            <p:ph type="body" idx="3" sz="quarter"/>
+          </p:nvPr>
+        </p:nvSpPr>
+        <p:spPr/>
+        <p:txBody>
+          <a:bodyPr/>
+          <a:lstStyle/>
+          <a:p>
+            <a:r>
+              <a:t>Task 22, second half — same discipline as the AT1 sign-off in Topic 5; call back to it.</a:t>
+            </a:r>
+          </a:p>
+          <a:p>
+            <a:r>
+              <a:t>Approval with conditions is a normal outcome here too.</a:t>
+            </a:r>
+          </a:p>
+        </p:txBody>
+      </p:sp>
+      <p:sp>
+        <p:nvSpPr>
+          <p:cNvPr id="4" name="Slide Number Placeholder 3"/>
+          <p:cNvSpPr>
+            <a:spLocks noGrp="1"/>
+          </p:cNvSpPr>
+          <p:nvPr>
+            <p:ph type="sldNum" idx="5" sz="quarter"/>
+          </p:nvPr>
+        </p:nvSpPr>
+        <p:spPr/>
+      </p:sp>
+    </p:spTree>
+  </p:cSld>
+  <p:clrMapOvr>
+    <a:masterClrMapping/>
+  </p:clrMapOvr>
+</p:notes>
+</file>
+
+<file path=ppt/notesSlides/notesSlide9.xml><?xml version="1.0" encoding="utf-8"?>
+<p:notes xmlns:a="http://schemas.openxmlformats.org/drawingml/2006/main" xmlns:p="http://schemas.openxmlformats.org/presentationml/2006/main" xmlns:r="http://schemas.openxmlformats.org/officeDocument/2006/relationships">
+  <p:cSld>
+    <p:spTree>
+      <p:nvGrpSpPr>
+        <p:cNvPr id="1" name=""/>
+        <p:cNvGrpSpPr/>
+        <p:nvPr/>
+      </p:nvGrpSpPr>
+      <p:grpSpPr>
+        <a:xfrm>
+          <a:off x="0" y="0"/>
+          <a:ext cx="0" cy="0"/>
+          <a:chOff x="0" y="0"/>
+          <a:chExt cx="0" cy="0"/>
+        </a:xfrm>
+      </p:grpSpPr>
+      <p:sp>
+        <p:nvSpPr>
+          <p:cNvPr id="2" name="Slide Image Placeholder 1"/>
+          <p:cNvSpPr>
+            <a:spLocks noGrp="1"/>
+          </p:cNvSpPr>
+          <p:nvPr>
+            <p:ph type="sldImg" idx="2"/>
+          </p:nvPr>
+        </p:nvSpPr>
+        <p:spPr/>
+      </p:sp>
+      <p:sp>
+        <p:nvSpPr>
+          <p:cNvPr id="3" name="Notes Placeholder 2"/>
+          <p:cNvSpPr>
+            <a:spLocks noGrp="1"/>
+          </p:cNvSpPr>
+          <p:nvPr>
+            <p:ph type="body" idx="3" sz="quarter"/>
+          </p:nvPr>
+        </p:nvSpPr>
+        <p:spPr/>
+        <p:txBody>
+          <a:bodyPr/>
+          <a:lstStyle/>
+          <a:p>
+            <a:r>
+              <a:t>Activity = practice workbook task 22, in pairs, both roles.</a:t>
+            </a:r>
+          </a:p>
+          <a:p>
+            <a:r>
+              <a:t>The client asks at least one question and gives at least one piece of feedback — the response is the skill.</a:t>
             </a:r>
           </a:p>
         </p:txBody>
@@ -4388,7 +4380,7 @@
                 </a:solidFill>
                 <a:latin typeface="Roboto"/>
               </a:rPr>
-              <a:t>Monitoring &amp; alarms</a:t>
+              <a:t>Documenting, teardown &amp; sign-off</a:t>
             </a:r>
           </a:p>
           <a:p>
@@ -4404,7 +4396,7 @@
                 </a:solidFill>
                 <a:latin typeface="Roboto Light"/>
               </a:rPr>
-              <a:t>Make the running microservice observable — a metric and a scaling-relevant alarm</a:t>
+              <a:t>User documentation, a clean teardown, the sign-off, and the written questions</a:t>
             </a:r>
           </a:p>
         </p:txBody>
@@ -4461,6 +4453,450 @@
 </file>
 
 <file path=ppt/slides/slide10.xml><?xml version="1.0" encoding="utf-8"?>
+<p:sld xmlns:a="http://schemas.openxmlformats.org/drawingml/2006/main" xmlns:p="http://schemas.openxmlformats.org/presentationml/2006/main" xmlns:r="http://schemas.openxmlformats.org/officeDocument/2006/relationships">
+  <p:cSld>
+    <p:bg>
+      <p:bgPr>
+        <a:solidFill>
+          <a:srgbClr val="FFFFFF"/>
+        </a:solidFill>
+        <a:effectLst/>
+      </p:bgPr>
+    </p:bg>
+    <p:spTree>
+      <p:nvGrpSpPr>
+        <p:cNvPr id="1" name=""/>
+        <p:cNvGrpSpPr/>
+        <p:nvPr/>
+      </p:nvGrpSpPr>
+      <p:grpSpPr/>
+      <p:sp>
+        <p:nvSpPr>
+          <p:cNvPr id="2" name="Rectangle 1"/>
+          <p:cNvSpPr/>
+          <p:nvPr/>
+        </p:nvSpPr>
+        <p:spPr>
+          <a:xfrm>
+            <a:off x="0" y="0"/>
+            <a:ext cx="12191695" cy="1234440"/>
+          </a:xfrm>
+          <a:prstGeom prst="rect">
+            <a:avLst/>
+          </a:prstGeom>
+          <a:solidFill>
+            <a:srgbClr val="27B5CE"/>
+          </a:solidFill>
+          <a:ln>
+            <a:noFill/>
+          </a:ln>
+          <a:effectLst/>
+        </p:spPr>
+        <p:style>
+          <a:lnRef idx="1">
+            <a:schemeClr val="accent1"/>
+          </a:lnRef>
+          <a:fillRef idx="3">
+            <a:schemeClr val="accent1"/>
+          </a:fillRef>
+          <a:effectRef idx="2">
+            <a:schemeClr val="accent1"/>
+          </a:effectRef>
+          <a:fontRef idx="minor">
+            <a:schemeClr val="lt1"/>
+          </a:fontRef>
+        </p:style>
+        <p:txBody>
+          <a:bodyPr rtlCol="0" anchor="ctr"/>
+          <a:lstStyle/>
+          <a:p>
+            <a:pPr algn="ctr"/>
+          </a:p>
+        </p:txBody>
+      </p:sp>
+      <p:sp>
+        <p:nvSpPr>
+          <p:cNvPr id="3" name="Rounded Rectangle 2"/>
+          <p:cNvSpPr/>
+          <p:nvPr/>
+        </p:nvSpPr>
+        <p:spPr>
+          <a:xfrm>
+            <a:off x="640080" y="384048"/>
+            <a:ext cx="1691640" cy="457200"/>
+          </a:xfrm>
+          <a:prstGeom prst="roundRect">
+            <a:avLst/>
+          </a:prstGeom>
+          <a:solidFill>
+            <a:srgbClr val="2A2929"/>
+          </a:solidFill>
+          <a:ln>
+            <a:noFill/>
+          </a:ln>
+          <a:effectLst/>
+        </p:spPr>
+        <p:style>
+          <a:lnRef idx="1">
+            <a:schemeClr val="accent1"/>
+          </a:lnRef>
+          <a:fillRef idx="3">
+            <a:schemeClr val="accent1"/>
+          </a:fillRef>
+          <a:effectRef idx="2">
+            <a:schemeClr val="accent1"/>
+          </a:effectRef>
+          <a:fontRef idx="minor">
+            <a:schemeClr val="lt1"/>
+          </a:fontRef>
+        </p:style>
+        <p:txBody>
+          <a:bodyPr rtlCol="0" anchor="ctr"/>
+          <a:lstStyle/>
+          <a:p>
+            <a:pPr algn="ctr"/>
+            <a:r>
+              <a:rPr sz="1400" b="1" i="0">
+                <a:solidFill>
+                  <a:srgbClr val="FBB900"/>
+                </a:solidFill>
+                <a:latin typeface="Roboto"/>
+              </a:rPr>
+              <a:t>ACTIVITY</a:t>
+            </a:r>
+          </a:p>
+        </p:txBody>
+      </p:sp>
+      <p:sp>
+        <p:nvSpPr>
+          <p:cNvPr id="4" name="TextBox 3"/>
+          <p:cNvSpPr txBox="1"/>
+          <p:nvPr/>
+        </p:nvSpPr>
+        <p:spPr>
+          <a:xfrm>
+            <a:off x="2560320" y="310896"/>
+            <a:ext cx="8961120" cy="685800"/>
+          </a:xfrm>
+          <a:prstGeom prst="rect">
+            <a:avLst/>
+          </a:prstGeom>
+          <a:noFill/>
+        </p:spPr>
+        <p:txBody>
+          <a:bodyPr wrap="square" anchor="ctr" lIns="0" rIns="0" tIns="0" bIns="0">
+            <a:spAutoFit/>
+          </a:bodyPr>
+          <a:lstStyle/>
+          <a:p>
+            <a:r>
+              <a:rPr sz="2600" b="1" i="0">
+                <a:solidFill>
+                  <a:srgbClr val="FFFFFF"/>
+                </a:solidFill>
+                <a:latin typeface="Roboto"/>
+              </a:rPr>
+              <a:t>Tear it down</a:t>
+            </a:r>
+          </a:p>
+        </p:txBody>
+      </p:sp>
+      <p:sp>
+        <p:nvSpPr>
+          <p:cNvPr id="5" name="TextBox 4"/>
+          <p:cNvSpPr txBox="1"/>
+          <p:nvPr/>
+        </p:nvSpPr>
+        <p:spPr>
+          <a:xfrm>
+            <a:off x="658368" y="1554480"/>
+            <a:ext cx="10881360" cy="4297680"/>
+          </a:xfrm>
+          <a:prstGeom prst="rect">
+            <a:avLst/>
+          </a:prstGeom>
+          <a:noFill/>
+        </p:spPr>
+        <p:txBody>
+          <a:bodyPr wrap="square" anchor="t" lIns="0" rIns="0" tIns="0" bIns="0">
+            <a:spAutoFit/>
+          </a:bodyPr>
+          <a:lstStyle/>
+          <a:p>
+            <a:pPr marL="0" indent="0">
+              <a:lnSpc>
+                <a:spcPct val="105000"/>
+              </a:lnSpc>
+              <a:spcBef>
+                <a:spcPts val="0"/>
+              </a:spcBef>
+              <a:spcAft>
+                <a:spcPts val="1000"/>
+              </a:spcAft>
+            </a:pPr>
+            <a:r>
+              <a:rPr sz="1700" b="1" i="0">
+                <a:solidFill>
+                  <a:srgbClr val="EDAB0C"/>
+                </a:solidFill>
+                <a:latin typeface="Roboto"/>
+              </a:rPr>
+              <a:t>■  </a:t>
+            </a:r>
+            <a:r>
+              <a:rPr sz="1700" b="0" i="0">
+                <a:solidFill>
+                  <a:srgbClr val="2A2929"/>
+                </a:solidFill>
+                <a:latin typeface="Roboto"/>
+              </a:rPr>
+              <a:t>Workbook — task 21.</a:t>
+            </a:r>
+          </a:p>
+          <a:p>
+            <a:pPr marL="0" indent="0">
+              <a:lnSpc>
+                <a:spcPct val="105000"/>
+              </a:lnSpc>
+              <a:spcBef>
+                <a:spcPts val="0"/>
+              </a:spcBef>
+              <a:spcAft>
+                <a:spcPts val="1000"/>
+              </a:spcAft>
+            </a:pPr>
+            <a:r>
+              <a:rPr sz="1700" b="1" i="0">
+                <a:solidFill>
+                  <a:srgbClr val="EDAB0C"/>
+                </a:solidFill>
+                <a:latin typeface="Roboto"/>
+              </a:rPr>
+              <a:t>■  </a:t>
+            </a:r>
+            <a:r>
+              <a:rPr sz="1700" b="0" i="0">
+                <a:solidFill>
+                  <a:srgbClr val="2A2929"/>
+                </a:solidFill>
+                <a:latin typeface="Roboto"/>
+              </a:rPr>
+              <a:t>Remove everything you deployed using the tooling, in the right order, and confirm nothing is left behind.</a:t>
+            </a:r>
+          </a:p>
+        </p:txBody>
+      </p:sp>
+      <p:sp>
+        <p:nvSpPr>
+          <p:cNvPr id="6" name="Rounded Rectangle 5"/>
+          <p:cNvSpPr/>
+          <p:nvPr/>
+        </p:nvSpPr>
+        <p:spPr>
+          <a:xfrm>
+            <a:off x="640080" y="5897880"/>
+            <a:ext cx="4023360" cy="457200"/>
+          </a:xfrm>
+          <a:prstGeom prst="roundRect">
+            <a:avLst/>
+          </a:prstGeom>
+          <a:solidFill>
+            <a:srgbClr val="F9F9F9"/>
+          </a:solidFill>
+          <a:ln w="12700">
+            <a:solidFill>
+              <a:srgbClr val="CCCCCC"/>
+            </a:solidFill>
+          </a:ln>
+          <a:effectLst/>
+        </p:spPr>
+        <p:style>
+          <a:lnRef idx="1">
+            <a:schemeClr val="accent1"/>
+          </a:lnRef>
+          <a:fillRef idx="3">
+            <a:schemeClr val="accent1"/>
+          </a:fillRef>
+          <a:effectRef idx="2">
+            <a:schemeClr val="accent1"/>
+          </a:effectRef>
+          <a:fontRef idx="minor">
+            <a:schemeClr val="lt1"/>
+          </a:fontRef>
+        </p:style>
+        <p:txBody>
+          <a:bodyPr rtlCol="0" anchor="ctr"/>
+          <a:lstStyle/>
+          <a:p>
+            <a:pPr algn="ctr"/>
+          </a:p>
+        </p:txBody>
+      </p:sp>
+      <p:sp>
+        <p:nvSpPr>
+          <p:cNvPr id="7" name="TextBox 6"/>
+          <p:cNvSpPr txBox="1"/>
+          <p:nvPr/>
+        </p:nvSpPr>
+        <p:spPr>
+          <a:xfrm>
+            <a:off x="822960" y="5943600"/>
+            <a:ext cx="3657600" cy="365760"/>
+          </a:xfrm>
+          <a:prstGeom prst="rect">
+            <a:avLst/>
+          </a:prstGeom>
+          <a:noFill/>
+        </p:spPr>
+        <p:txBody>
+          <a:bodyPr wrap="square" anchor="ctr" lIns="0" rIns="0" tIns="0" bIns="0">
+            <a:spAutoFit/>
+          </a:bodyPr>
+          <a:lstStyle/>
+          <a:p>
+            <a:r>
+              <a:rPr sz="1500" b="1" i="0">
+                <a:solidFill>
+                  <a:srgbClr val="2A2929"/>
+                </a:solidFill>
+                <a:latin typeface="Roboto"/>
+              </a:rPr>
+              <a:t>⏱  ~20 min</a:t>
+            </a:r>
+          </a:p>
+        </p:txBody>
+      </p:sp>
+      <p:sp>
+        <p:nvSpPr>
+          <p:cNvPr id="8" name="Rectangle 7"/>
+          <p:cNvSpPr/>
+          <p:nvPr/>
+        </p:nvSpPr>
+        <p:spPr>
+          <a:xfrm>
+            <a:off x="0" y="6565392"/>
+            <a:ext cx="12191695" cy="38100"/>
+          </a:xfrm>
+          <a:prstGeom prst="rect">
+            <a:avLst/>
+          </a:prstGeom>
+          <a:solidFill>
+            <a:srgbClr val="27B5CE"/>
+          </a:solidFill>
+          <a:ln>
+            <a:noFill/>
+          </a:ln>
+          <a:effectLst/>
+        </p:spPr>
+        <p:style>
+          <a:lnRef idx="1">
+            <a:schemeClr val="accent1"/>
+          </a:lnRef>
+          <a:fillRef idx="3">
+            <a:schemeClr val="accent1"/>
+          </a:fillRef>
+          <a:effectRef idx="2">
+            <a:schemeClr val="accent1"/>
+          </a:effectRef>
+          <a:fontRef idx="minor">
+            <a:schemeClr val="lt1"/>
+          </a:fontRef>
+        </p:style>
+        <p:txBody>
+          <a:bodyPr rtlCol="0" anchor="ctr"/>
+          <a:lstStyle/>
+          <a:p>
+            <a:pPr algn="ctr"/>
+          </a:p>
+        </p:txBody>
+      </p:sp>
+      <p:sp>
+        <p:nvSpPr>
+          <p:cNvPr id="9" name="TextBox 8"/>
+          <p:cNvSpPr txBox="1"/>
+          <p:nvPr/>
+        </p:nvSpPr>
+        <p:spPr>
+          <a:xfrm>
+            <a:off x="502920" y="6400800"/>
+            <a:ext cx="5486400" cy="320040"/>
+          </a:xfrm>
+          <a:prstGeom prst="rect">
+            <a:avLst/>
+          </a:prstGeom>
+          <a:noFill/>
+        </p:spPr>
+        <p:txBody>
+          <a:bodyPr wrap="square" anchor="t" lIns="0" rIns="0" tIns="0" bIns="0">
+            <a:spAutoFit/>
+          </a:bodyPr>
+          <a:lstStyle/>
+          <a:p>
+            <a:r>
+              <a:rPr sz="1100" b="1" i="0">
+                <a:solidFill>
+                  <a:srgbClr val="2A2929"/>
+                </a:solidFill>
+                <a:latin typeface="Roboto"/>
+              </a:rPr>
+              <a:t>Kangan </a:t>
+            </a:r>
+            <a:r>
+              <a:rPr sz="1100" b="1" i="0">
+                <a:solidFill>
+                  <a:srgbClr val="D68E10"/>
+                </a:solidFill>
+                <a:latin typeface="Roboto"/>
+              </a:rPr>
+              <a:t>Institute</a:t>
+            </a:r>
+          </a:p>
+        </p:txBody>
+      </p:sp>
+      <p:sp>
+        <p:nvSpPr>
+          <p:cNvPr id="10" name="TextBox 9"/>
+          <p:cNvSpPr txBox="1"/>
+          <p:nvPr/>
+        </p:nvSpPr>
+        <p:spPr>
+          <a:xfrm>
+            <a:off x="10515600" y="6400800"/>
+            <a:ext cx="1188720" cy="320040"/>
+          </a:xfrm>
+          <a:prstGeom prst="rect">
+            <a:avLst/>
+          </a:prstGeom>
+          <a:noFill/>
+        </p:spPr>
+        <p:txBody>
+          <a:bodyPr wrap="square" anchor="t" lIns="0" rIns="0" tIns="0" bIns="0">
+            <a:spAutoFit/>
+          </a:bodyPr>
+          <a:lstStyle/>
+          <a:p>
+            <a:pPr algn="r"/>
+            <a:r>
+              <a:rPr sz="1100" b="0" i="0">
+                <a:solidFill>
+                  <a:srgbClr val="7A7A7A"/>
+                </a:solidFill>
+                <a:latin typeface="Roboto"/>
+              </a:rPr>
+              <a:t>7</a:t>
+            </a:r>
+          </a:p>
+        </p:txBody>
+      </p:sp>
+    </p:spTree>
+  </p:cSld>
+  <p:clrMapOvr>
+    <a:masterClrMapping/>
+  </p:clrMapOvr>
+</p:sld>
+</file>
+
+<file path=ppt/slides/slide11.xml><?xml version="1.0" encoding="utf-8"?>
 <p:sld xmlns:a="http://schemas.openxmlformats.org/drawingml/2006/main" xmlns:p="http://schemas.openxmlformats.org/presentationml/2006/main" xmlns:r="http://schemas.openxmlformats.org/officeDocument/2006/relationships">
   <p:cSld>
     <p:bg>
@@ -4523,7 +4959,7 @@
                 </a:solidFill>
                 <a:latin typeface="Roboto"/>
               </a:rPr>
-              <a:t>Topic 9 · Key takeaways</a:t>
+              <a:t>Section 2 · The teardown</a:t>
             </a:r>
           </a:p>
         </p:txBody>
@@ -4696,7 +5132,7 @@
                 </a:solidFill>
                 <a:latin typeface="Roboto"/>
               </a:rPr>
-              <a:t>Metrics are the signals; monitor the ones that predict trouble on a serverless service.</a:t>
+              <a:t>Through the tooling, in reverse dependency order.</a:t>
             </a:r>
           </a:p>
         </p:txBody>
@@ -4825,7 +5261,7 @@
                 </a:solidFill>
                 <a:latin typeface="Roboto"/>
               </a:rPr>
-              <a:t>Watch queue depth (scaling signal), function errors/throttles, and store throttles.</a:t>
+              <a:t>Confirmed gone, not assumed gone.</a:t>
             </a:r>
           </a:p>
         </p:txBody>
@@ -4838,54 +5274,8 @@
         </p:nvSpPr>
         <p:spPr>
           <a:xfrm>
-            <a:off x="640080" y="3867912"/>
-            <a:ext cx="10927080" cy="841248"/>
-          </a:xfrm>
-          <a:prstGeom prst="rect">
-            <a:avLst/>
-          </a:prstGeom>
-          <a:solidFill>
-            <a:srgbClr val="FFFFFF"/>
-          </a:solidFill>
-          <a:ln w="12700">
-            <a:solidFill>
-              <a:srgbClr val="CCCCCC"/>
-            </a:solidFill>
-          </a:ln>
-          <a:effectLst/>
-        </p:spPr>
-        <p:style>
-          <a:lnRef idx="1">
-            <a:schemeClr val="accent1"/>
-          </a:lnRef>
-          <a:fillRef idx="3">
-            <a:schemeClr val="accent1"/>
-          </a:fillRef>
-          <a:effectRef idx="2">
-            <a:schemeClr val="accent1"/>
-          </a:effectRef>
-          <a:fontRef idx="minor">
-            <a:schemeClr val="lt1"/>
-          </a:fontRef>
-        </p:style>
-        <p:txBody>
-          <a:bodyPr rtlCol="0" anchor="ctr"/>
-          <a:lstStyle/>
-          <a:p>
-            <a:pPr algn="ctr"/>
-          </a:p>
-        </p:txBody>
-      </p:sp>
-      <p:sp>
-        <p:nvSpPr>
-          <p:cNvPr id="11" name="Rectangle 10"/>
-          <p:cNvSpPr/>
-          <p:nvPr/>
-        </p:nvSpPr>
-        <p:spPr>
-          <a:xfrm>
-            <a:off x="640080" y="3867912"/>
-            <a:ext cx="109728" cy="841248"/>
+            <a:off x="0" y="6565392"/>
+            <a:ext cx="12191695" cy="38100"/>
           </a:xfrm>
           <a:prstGeom prst="rect">
             <a:avLst/>
@@ -4922,219 +5312,7 @@
       </p:sp>
       <p:sp>
         <p:nvSpPr>
-          <p:cNvPr id="12" name="TextBox 11"/>
-          <p:cNvSpPr txBox="1"/>
-          <p:nvPr/>
-        </p:nvSpPr>
-        <p:spPr>
-          <a:xfrm>
-            <a:off x="960120" y="3867912"/>
-            <a:ext cx="10424160" cy="841248"/>
-          </a:xfrm>
-          <a:prstGeom prst="rect">
-            <a:avLst/>
-          </a:prstGeom>
-          <a:noFill/>
-        </p:spPr>
-        <p:txBody>
-          <a:bodyPr wrap="square" anchor="ctr" lIns="0" rIns="0" tIns="0" bIns="0">
-            <a:spAutoFit/>
-          </a:bodyPr>
-          <a:lstStyle/>
-          <a:p>
-            <a:pPr>
-              <a:lnSpc>
-                <a:spcPct val="100000"/>
-              </a:lnSpc>
-            </a:pPr>
-            <a:r>
-              <a:rPr sz="1700" b="0" i="0">
-                <a:solidFill>
-                  <a:srgbClr val="2A2929"/>
-                </a:solidFill>
-                <a:latin typeface="Roboto"/>
-              </a:rPr>
-              <a:t>Set an alarm to the design spec: a threshold that triggers plus a notification.</a:t>
-            </a:r>
-          </a:p>
-        </p:txBody>
-      </p:sp>
-      <p:sp>
-        <p:nvSpPr>
-          <p:cNvPr id="13" name="Rectangle 12"/>
-          <p:cNvSpPr/>
-          <p:nvPr/>
-        </p:nvSpPr>
-        <p:spPr>
-          <a:xfrm>
-            <a:off x="640080" y="4818888"/>
-            <a:ext cx="10927080" cy="841248"/>
-          </a:xfrm>
-          <a:prstGeom prst="rect">
-            <a:avLst/>
-          </a:prstGeom>
-          <a:solidFill>
-            <a:srgbClr val="FFFFFF"/>
-          </a:solidFill>
-          <a:ln w="12700">
-            <a:solidFill>
-              <a:srgbClr val="CCCCCC"/>
-            </a:solidFill>
-          </a:ln>
-          <a:effectLst/>
-        </p:spPr>
-        <p:style>
-          <a:lnRef idx="1">
-            <a:schemeClr val="accent1"/>
-          </a:lnRef>
-          <a:fillRef idx="3">
-            <a:schemeClr val="accent1"/>
-          </a:fillRef>
-          <a:effectRef idx="2">
-            <a:schemeClr val="accent1"/>
-          </a:effectRef>
-          <a:fontRef idx="minor">
-            <a:schemeClr val="lt1"/>
-          </a:fontRef>
-        </p:style>
-        <p:txBody>
-          <a:bodyPr rtlCol="0" anchor="ctr"/>
-          <a:lstStyle/>
-          <a:p>
-            <a:pPr algn="ctr"/>
-          </a:p>
-        </p:txBody>
-      </p:sp>
-      <p:sp>
-        <p:nvSpPr>
-          <p:cNvPr id="14" name="Rectangle 13"/>
-          <p:cNvSpPr/>
-          <p:nvPr/>
-        </p:nvSpPr>
-        <p:spPr>
-          <a:xfrm>
-            <a:off x="640080" y="4818888"/>
-            <a:ext cx="109728" cy="841248"/>
-          </a:xfrm>
-          <a:prstGeom prst="rect">
-            <a:avLst/>
-          </a:prstGeom>
-          <a:solidFill>
-            <a:srgbClr val="27B5CE"/>
-          </a:solidFill>
-          <a:ln>
-            <a:noFill/>
-          </a:ln>
-          <a:effectLst/>
-        </p:spPr>
-        <p:style>
-          <a:lnRef idx="1">
-            <a:schemeClr val="accent1"/>
-          </a:lnRef>
-          <a:fillRef idx="3">
-            <a:schemeClr val="accent1"/>
-          </a:fillRef>
-          <a:effectRef idx="2">
-            <a:schemeClr val="accent1"/>
-          </a:effectRef>
-          <a:fontRef idx="minor">
-            <a:schemeClr val="lt1"/>
-          </a:fontRef>
-        </p:style>
-        <p:txBody>
-          <a:bodyPr rtlCol="0" anchor="ctr"/>
-          <a:lstStyle/>
-          <a:p>
-            <a:pPr algn="ctr"/>
-          </a:p>
-        </p:txBody>
-      </p:sp>
-      <p:sp>
-        <p:nvSpPr>
-          <p:cNvPr id="15" name="TextBox 14"/>
-          <p:cNvSpPr txBox="1"/>
-          <p:nvPr/>
-        </p:nvSpPr>
-        <p:spPr>
-          <a:xfrm>
-            <a:off x="960120" y="4818888"/>
-            <a:ext cx="10424160" cy="841248"/>
-          </a:xfrm>
-          <a:prstGeom prst="rect">
-            <a:avLst/>
-          </a:prstGeom>
-          <a:noFill/>
-        </p:spPr>
-        <p:txBody>
-          <a:bodyPr wrap="square" anchor="ctr" lIns="0" rIns="0" tIns="0" bIns="0">
-            <a:spAutoFit/>
-          </a:bodyPr>
-          <a:lstStyle/>
-          <a:p>
-            <a:pPr>
-              <a:lnSpc>
-                <a:spcPct val="100000"/>
-              </a:lnSpc>
-            </a:pPr>
-            <a:r>
-              <a:rPr sz="1700" b="0" i="0">
-                <a:solidFill>
-                  <a:srgbClr val="2A2929"/>
-                </a:solidFill>
-                <a:latin typeface="Roboto"/>
-              </a:rPr>
-              <a:t>Test it — drive the metric past the threshold and confirm the alarm and alert fire.</a:t>
-            </a:r>
-          </a:p>
-        </p:txBody>
-      </p:sp>
-      <p:sp>
-        <p:nvSpPr>
-          <p:cNvPr id="16" name="Rectangle 15"/>
-          <p:cNvSpPr/>
-          <p:nvPr/>
-        </p:nvSpPr>
-        <p:spPr>
-          <a:xfrm>
-            <a:off x="0" y="6565392"/>
-            <a:ext cx="12191695" cy="38100"/>
-          </a:xfrm>
-          <a:prstGeom prst="rect">
-            <a:avLst/>
-          </a:prstGeom>
-          <a:solidFill>
-            <a:srgbClr val="27B5CE"/>
-          </a:solidFill>
-          <a:ln>
-            <a:noFill/>
-          </a:ln>
-          <a:effectLst/>
-        </p:spPr>
-        <p:style>
-          <a:lnRef idx="1">
-            <a:schemeClr val="accent1"/>
-          </a:lnRef>
-          <a:fillRef idx="3">
-            <a:schemeClr val="accent1"/>
-          </a:fillRef>
-          <a:effectRef idx="2">
-            <a:schemeClr val="accent1"/>
-          </a:effectRef>
-          <a:fontRef idx="minor">
-            <a:schemeClr val="lt1"/>
-          </a:fontRef>
-        </p:style>
-        <p:txBody>
-          <a:bodyPr rtlCol="0" anchor="ctr"/>
-          <a:lstStyle/>
-          <a:p>
-            <a:pPr algn="ctr"/>
-          </a:p>
-        </p:txBody>
-      </p:sp>
-      <p:sp>
-        <p:nvSpPr>
-          <p:cNvPr id="17" name="TextBox 16"/>
+          <p:cNvPr id="11" name="TextBox 10"/>
           <p:cNvSpPr txBox="1"/>
           <p:nvPr/>
         </p:nvSpPr>
@@ -5177,7 +5355,7 @@
       </p:sp>
       <p:sp>
         <p:nvSpPr>
-          <p:cNvPr id="18" name="TextBox 17"/>
+          <p:cNvPr id="12" name="TextBox 11"/>
           <p:cNvSpPr txBox="1"/>
           <p:nvPr/>
         </p:nvSpPr>
@@ -5205,7 +5383,7 @@
                 </a:solidFill>
                 <a:latin typeface="Roboto"/>
               </a:rPr>
-              <a:t>7</a:t>
+              <a:t>8</a:t>
             </a:r>
           </a:p>
         </p:txBody>
@@ -5218,13 +5396,13 @@
 </p:sld>
 </file>
 
-<file path=ppt/slides/slide11.xml><?xml version="1.0" encoding="utf-8"?>
+<file path=ppt/slides/slide12.xml><?xml version="1.0" encoding="utf-8"?>
 <p:sld xmlns:a="http://schemas.openxmlformats.org/drawingml/2006/main" xmlns:p="http://schemas.openxmlformats.org/presentationml/2006/main" xmlns:r="http://schemas.openxmlformats.org/officeDocument/2006/relationships">
   <p:cSld>
     <p:bg>
       <p:bgPr>
         <a:solidFill>
-          <a:srgbClr val="2A2929"/>
+          <a:srgbClr val="FFFFFF"/>
         </a:solidFill>
         <a:effectLst/>
       </p:bgPr>
@@ -5245,13 +5423,13 @@
         <p:spPr>
           <a:xfrm>
             <a:off x="0" y="0"/>
-            <a:ext cx="411480" cy="6858000"/>
+            <a:ext cx="3931920" cy="6858000"/>
           </a:xfrm>
           <a:prstGeom prst="rect">
             <a:avLst/>
           </a:prstGeom>
           <a:solidFill>
-            <a:srgbClr val="EDAB0C"/>
+            <a:srgbClr val="205F61"/>
           </a:solidFill>
           <a:ln>
             <a:noFill/>
@@ -5288,8 +5466,8 @@
         </p:nvSpPr>
         <p:spPr>
           <a:xfrm>
-            <a:off x="914400" y="1463040"/>
-            <a:ext cx="10515600" cy="4023360"/>
+            <a:off x="365760" y="2103120"/>
+            <a:ext cx="3291840" cy="2194560"/>
           </a:xfrm>
           <a:prstGeom prst="rect">
             <a:avLst/>
@@ -5303,51 +5481,2907 @@
           <a:lstStyle/>
           <a:p>
             <a:r>
-              <a:rPr sz="4000" b="1" i="0">
+              <a:rPr sz="13000" b="1" i="0">
                 <a:solidFill>
                   <a:srgbClr val="FFFFFF"/>
                 </a:solidFill>
                 <a:latin typeface="Roboto"/>
               </a:rPr>
-              <a:t>Next: Topic 10 — document &amp; close out</a:t>
+              <a:t>03</a:t>
+            </a:r>
+          </a:p>
+        </p:txBody>
+      </p:sp>
+      <p:sp>
+        <p:nvSpPr>
+          <p:cNvPr id="4" name="TextBox 3"/>
+          <p:cNvSpPr txBox="1"/>
+          <p:nvPr/>
+        </p:nvSpPr>
+        <p:spPr>
+          <a:xfrm>
+            <a:off x="4480560" y="2468880"/>
+            <a:ext cx="7132320" cy="2194560"/>
+          </a:xfrm>
+          <a:prstGeom prst="rect">
+            <a:avLst/>
+          </a:prstGeom>
+          <a:noFill/>
+        </p:spPr>
+        <p:txBody>
+          <a:bodyPr wrap="square" anchor="t" lIns="0" rIns="0" tIns="0" bIns="0">
+            <a:spAutoFit/>
+          </a:bodyPr>
+          <a:lstStyle/>
+          <a:p>
+            <a:r>
+              <a:rPr sz="1600" b="1" i="0">
+                <a:solidFill>
+                  <a:srgbClr val="205F61"/>
+                </a:solidFill>
+                <a:latin typeface="Roboto"/>
+              </a:rPr>
+              <a:t>SECTION</a:t>
             </a:r>
           </a:p>
           <a:p>
             <a:pPr>
+              <a:spcBef>
+                <a:spcPts val="600"/>
+              </a:spcBef>
+            </a:pPr>
+            <a:r>
+              <a:rPr sz="3800" b="1" i="0">
+                <a:solidFill>
+                  <a:srgbClr val="2A2929"/>
+                </a:solidFill>
+                <a:latin typeface="Roboto"/>
+              </a:rPr>
+              <a:t>Confirming the build, and sign-off</a:t>
+            </a:r>
+          </a:p>
+          <a:p>
+            <a:pPr>
+              <a:spcBef>
+                <a:spcPts val="1000"/>
+              </a:spcBef>
+            </a:pPr>
+            <a:r>
+              <a:rPr sz="2000" b="0" i="1">
+                <a:solidFill>
+                  <a:srgbClr val="484848"/>
+                </a:solidFill>
+                <a:latin typeface="Roboto Light"/>
+              </a:rPr>
+              <a:t>walk them through it, get it accepted</a:t>
+            </a:r>
+          </a:p>
+        </p:txBody>
+      </p:sp>
+      <p:sp>
+        <p:nvSpPr>
+          <p:cNvPr id="5" name="Rectangle 4"/>
+          <p:cNvSpPr/>
+          <p:nvPr/>
+        </p:nvSpPr>
+        <p:spPr>
+          <a:xfrm>
+            <a:off x="0" y="6565392"/>
+            <a:ext cx="12191695" cy="38100"/>
+          </a:xfrm>
+          <a:prstGeom prst="rect">
+            <a:avLst/>
+          </a:prstGeom>
+          <a:solidFill>
+            <a:srgbClr val="205F61"/>
+          </a:solidFill>
+          <a:ln>
+            <a:noFill/>
+          </a:ln>
+          <a:effectLst/>
+        </p:spPr>
+        <p:style>
+          <a:lnRef idx="1">
+            <a:schemeClr val="accent1"/>
+          </a:lnRef>
+          <a:fillRef idx="3">
+            <a:schemeClr val="accent1"/>
+          </a:fillRef>
+          <a:effectRef idx="2">
+            <a:schemeClr val="accent1"/>
+          </a:effectRef>
+          <a:fontRef idx="minor">
+            <a:schemeClr val="lt1"/>
+          </a:fontRef>
+        </p:style>
+        <p:txBody>
+          <a:bodyPr rtlCol="0" anchor="ctr"/>
+          <a:lstStyle/>
+          <a:p>
+            <a:pPr algn="ctr"/>
+          </a:p>
+        </p:txBody>
+      </p:sp>
+      <p:sp>
+        <p:nvSpPr>
+          <p:cNvPr id="6" name="TextBox 5"/>
+          <p:cNvSpPr txBox="1"/>
+          <p:nvPr/>
+        </p:nvSpPr>
+        <p:spPr>
+          <a:xfrm>
+            <a:off x="502920" y="6400800"/>
+            <a:ext cx="5486400" cy="320040"/>
+          </a:xfrm>
+          <a:prstGeom prst="rect">
+            <a:avLst/>
+          </a:prstGeom>
+          <a:noFill/>
+        </p:spPr>
+        <p:txBody>
+          <a:bodyPr wrap="square" anchor="t" lIns="0" rIns="0" tIns="0" bIns="0">
+            <a:spAutoFit/>
+          </a:bodyPr>
+          <a:lstStyle/>
+          <a:p>
+            <a:r>
+              <a:rPr sz="1100" b="1" i="0">
+                <a:solidFill>
+                  <a:srgbClr val="2A2929"/>
+                </a:solidFill>
+                <a:latin typeface="Roboto"/>
+              </a:rPr>
+              <a:t>Kangan </a:t>
+            </a:r>
+            <a:r>
+              <a:rPr sz="1100" b="1" i="0">
+                <a:solidFill>
+                  <a:srgbClr val="D68E10"/>
+                </a:solidFill>
+                <a:latin typeface="Roboto"/>
+              </a:rPr>
+              <a:t>Institute</a:t>
+            </a:r>
+          </a:p>
+        </p:txBody>
+      </p:sp>
+      <p:sp>
+        <p:nvSpPr>
+          <p:cNvPr id="7" name="TextBox 6"/>
+          <p:cNvSpPr txBox="1"/>
+          <p:nvPr/>
+        </p:nvSpPr>
+        <p:spPr>
+          <a:xfrm>
+            <a:off x="10515600" y="6400800"/>
+            <a:ext cx="1188720" cy="320040"/>
+          </a:xfrm>
+          <a:prstGeom prst="rect">
+            <a:avLst/>
+          </a:prstGeom>
+          <a:noFill/>
+        </p:spPr>
+        <p:txBody>
+          <a:bodyPr wrap="square" anchor="t" lIns="0" rIns="0" tIns="0" bIns="0">
+            <a:spAutoFit/>
+          </a:bodyPr>
+          <a:lstStyle/>
+          <a:p>
+            <a:pPr algn="r"/>
+            <a:r>
+              <a:rPr sz="1100" b="0" i="0">
+                <a:solidFill>
+                  <a:srgbClr val="7A7A7A"/>
+                </a:solidFill>
+                <a:latin typeface="Roboto"/>
+              </a:rPr>
+              <a:t/>
+            </a:r>
+          </a:p>
+        </p:txBody>
+      </p:sp>
+    </p:spTree>
+  </p:cSld>
+  <p:clrMapOvr>
+    <a:masterClrMapping/>
+  </p:clrMapOvr>
+</p:sld>
+</file>
+
+<file path=ppt/slides/slide13.xml><?xml version="1.0" encoding="utf-8"?>
+<p:sld xmlns:a="http://schemas.openxmlformats.org/drawingml/2006/main" xmlns:p="http://schemas.openxmlformats.org/presentationml/2006/main" xmlns:r="http://schemas.openxmlformats.org/officeDocument/2006/relationships">
+  <p:cSld>
+    <p:bg>
+      <p:bgPr>
+        <a:solidFill>
+          <a:srgbClr val="FFFFFF"/>
+        </a:solidFill>
+        <a:effectLst/>
+      </p:bgPr>
+    </p:bg>
+    <p:spTree>
+      <p:nvGrpSpPr>
+        <p:cNvPr id="1" name=""/>
+        <p:cNvGrpSpPr/>
+        <p:nvPr/>
+      </p:nvGrpSpPr>
+      <p:grpSpPr/>
+      <p:sp>
+        <p:nvSpPr>
+          <p:cNvPr id="2" name="TextBox 1"/>
+          <p:cNvSpPr txBox="1"/>
+          <p:nvPr/>
+        </p:nvSpPr>
+        <p:spPr>
+          <a:xfrm>
+            <a:off x="640080" y="457200"/>
+            <a:ext cx="10881360" cy="960120"/>
+          </a:xfrm>
+          <a:prstGeom prst="rect">
+            <a:avLst/>
+          </a:prstGeom>
+          <a:noFill/>
+        </p:spPr>
+        <p:txBody>
+          <a:bodyPr wrap="square" anchor="t" lIns="0" rIns="0" tIns="0" bIns="0">
+            <a:spAutoFit/>
+          </a:bodyPr>
+          <a:lstStyle/>
+          <a:p>
+            <a:r>
+              <a:rPr sz="2800" b="1" i="0">
+                <a:solidFill>
+                  <a:srgbClr val="2A2929"/>
+                </a:solidFill>
+                <a:latin typeface="Roboto"/>
+              </a:rPr>
+              <a:t>Walk the client through the build</a:t>
+            </a:r>
+          </a:p>
+        </p:txBody>
+      </p:sp>
+      <p:sp>
+        <p:nvSpPr>
+          <p:cNvPr id="3" name="Rectangle 2"/>
+          <p:cNvSpPr/>
+          <p:nvPr/>
+        </p:nvSpPr>
+        <p:spPr>
+          <a:xfrm>
+            <a:off x="658368" y="1371600"/>
+            <a:ext cx="1463040" cy="50800"/>
+          </a:xfrm>
+          <a:prstGeom prst="rect">
+            <a:avLst/>
+          </a:prstGeom>
+          <a:solidFill>
+            <a:srgbClr val="205F61"/>
+          </a:solidFill>
+          <a:ln>
+            <a:noFill/>
+          </a:ln>
+          <a:effectLst/>
+        </p:spPr>
+        <p:style>
+          <a:lnRef idx="1">
+            <a:schemeClr val="accent1"/>
+          </a:lnRef>
+          <a:fillRef idx="3">
+            <a:schemeClr val="accent1"/>
+          </a:fillRef>
+          <a:effectRef idx="2">
+            <a:schemeClr val="accent1"/>
+          </a:effectRef>
+          <a:fontRef idx="minor">
+            <a:schemeClr val="lt1"/>
+          </a:fontRef>
+        </p:style>
+        <p:txBody>
+          <a:bodyPr rtlCol="0" anchor="ctr"/>
+          <a:lstStyle/>
+          <a:p>
+            <a:pPr algn="ctr"/>
+          </a:p>
+        </p:txBody>
+      </p:sp>
+      <p:sp>
+        <p:nvSpPr>
+          <p:cNvPr id="4" name="TextBox 3"/>
+          <p:cNvSpPr txBox="1"/>
+          <p:nvPr/>
+        </p:nvSpPr>
+        <p:spPr>
+          <a:xfrm>
+            <a:off x="658368" y="1691640"/>
+            <a:ext cx="10881360" cy="4480560"/>
+          </a:xfrm>
+          <a:prstGeom prst="rect">
+            <a:avLst/>
+          </a:prstGeom>
+          <a:noFill/>
+        </p:spPr>
+        <p:txBody>
+          <a:bodyPr wrap="square" anchor="ctr" lIns="0" rIns="0" tIns="0" bIns="0">
+            <a:spAutoFit/>
+          </a:bodyPr>
+          <a:lstStyle/>
+          <a:p>
+            <a:pPr marL="0" indent="0">
               <a:lnSpc>
                 <a:spcPct val="105000"/>
               </a:lnSpc>
               <a:spcBef>
-                <a:spcPts val="1200"/>
+                <a:spcPts val="0"/>
               </a:spcBef>
+              <a:spcAft>
+                <a:spcPts val="1000"/>
+              </a:spcAft>
             </a:pPr>
             <a:r>
-              <a:rPr sz="1900" b="0" i="0">
-                <a:solidFill>
-                  <a:srgbClr val="E8E8E8"/>
-                </a:solidFill>
-                <a:latin typeface="Roboto Light"/>
-              </a:rPr>
-              <a:t>The build is complete and observable; next you document it, hand it over and get sign-off.</a:t>
-            </a:r>
-          </a:p>
-          <a:p>
-            <a:pPr>
+              <a:rPr sz="2400" b="1" i="0">
+                <a:solidFill>
+                  <a:srgbClr val="EDAB0C"/>
+                </a:solidFill>
+                <a:latin typeface="Roboto"/>
+              </a:rPr>
+              <a:t>■  </a:t>
+            </a:r>
+            <a:r>
+              <a:rPr sz="2400" b="0" i="0">
+                <a:solidFill>
+                  <a:srgbClr val="2A2929"/>
+                </a:solidFill>
+                <a:latin typeface="Roboto"/>
+              </a:rPr>
+              <a:t>Walk the client through what you built, how you know it works, and what you're handing over.</a:t>
+            </a:r>
+          </a:p>
+          <a:p>
+            <a:pPr marL="0" indent="0">
               <a:lnSpc>
                 <a:spcPct val="105000"/>
               </a:lnSpc>
               <a:spcBef>
-                <a:spcPts val="1200"/>
+                <a:spcPts val="0"/>
+              </a:spcBef>
+              <a:spcAft>
+                <a:spcPts val="1000"/>
+              </a:spcAft>
+            </a:pPr>
+            <a:r>
+              <a:rPr sz="2400" b="1" i="0">
+                <a:solidFill>
+                  <a:srgbClr val="EDAB0C"/>
+                </a:solidFill>
+                <a:latin typeface="Roboto"/>
+              </a:rPr>
+              <a:t>■  </a:t>
+            </a:r>
+            <a:r>
+              <a:rPr sz="2400" b="0" i="0">
+                <a:solidFill>
+                  <a:srgbClr val="2A2929"/>
+                </a:solidFill>
+                <a:latin typeface="Roboto"/>
+              </a:rPr>
+              <a:t>Plain language for the audience — the person signing may not be technical.</a:t>
+            </a:r>
+          </a:p>
+          <a:p>
+            <a:pPr marL="0" indent="0">
+              <a:lnSpc>
+                <a:spcPct val="105000"/>
+              </a:lnSpc>
+              <a:spcBef>
+                <a:spcPts val="0"/>
+              </a:spcBef>
+              <a:spcAft>
+                <a:spcPts val="1000"/>
+              </a:spcAft>
+            </a:pPr>
+            <a:r>
+              <a:rPr sz="2400" b="1" i="0">
+                <a:solidFill>
+                  <a:srgbClr val="EDAB0C"/>
+                </a:solidFill>
+                <a:latin typeface="Roboto"/>
+              </a:rPr>
+              <a:t>■  </a:t>
+            </a:r>
+            <a:r>
+              <a:rPr sz="2400" b="0" i="0">
+                <a:solidFill>
+                  <a:srgbClr val="2A2929"/>
+                </a:solidFill>
+                <a:latin typeface="Roboto"/>
+              </a:rPr>
+              <a:t>Seek feedback and respond: adjust, or defend with reasons. Both are professional.</a:t>
+            </a:r>
+          </a:p>
+        </p:txBody>
+      </p:sp>
+      <p:sp>
+        <p:nvSpPr>
+          <p:cNvPr id="5" name="Rectangle 4"/>
+          <p:cNvSpPr/>
+          <p:nvPr/>
+        </p:nvSpPr>
+        <p:spPr>
+          <a:xfrm>
+            <a:off x="0" y="6565392"/>
+            <a:ext cx="12191695" cy="38100"/>
+          </a:xfrm>
+          <a:prstGeom prst="rect">
+            <a:avLst/>
+          </a:prstGeom>
+          <a:solidFill>
+            <a:srgbClr val="205F61"/>
+          </a:solidFill>
+          <a:ln>
+            <a:noFill/>
+          </a:ln>
+          <a:effectLst/>
+        </p:spPr>
+        <p:style>
+          <a:lnRef idx="1">
+            <a:schemeClr val="accent1"/>
+          </a:lnRef>
+          <a:fillRef idx="3">
+            <a:schemeClr val="accent1"/>
+          </a:fillRef>
+          <a:effectRef idx="2">
+            <a:schemeClr val="accent1"/>
+          </a:effectRef>
+          <a:fontRef idx="minor">
+            <a:schemeClr val="lt1"/>
+          </a:fontRef>
+        </p:style>
+        <p:txBody>
+          <a:bodyPr rtlCol="0" anchor="ctr"/>
+          <a:lstStyle/>
+          <a:p>
+            <a:pPr algn="ctr"/>
+          </a:p>
+        </p:txBody>
+      </p:sp>
+      <p:sp>
+        <p:nvSpPr>
+          <p:cNvPr id="6" name="TextBox 5"/>
+          <p:cNvSpPr txBox="1"/>
+          <p:nvPr/>
+        </p:nvSpPr>
+        <p:spPr>
+          <a:xfrm>
+            <a:off x="502920" y="6400800"/>
+            <a:ext cx="5486400" cy="320040"/>
+          </a:xfrm>
+          <a:prstGeom prst="rect">
+            <a:avLst/>
+          </a:prstGeom>
+          <a:noFill/>
+        </p:spPr>
+        <p:txBody>
+          <a:bodyPr wrap="square" anchor="t" lIns="0" rIns="0" tIns="0" bIns="0">
+            <a:spAutoFit/>
+          </a:bodyPr>
+          <a:lstStyle/>
+          <a:p>
+            <a:r>
+              <a:rPr sz="1100" b="1" i="0">
+                <a:solidFill>
+                  <a:srgbClr val="2A2929"/>
+                </a:solidFill>
+                <a:latin typeface="Roboto"/>
+              </a:rPr>
+              <a:t>Kangan </a:t>
+            </a:r>
+            <a:r>
+              <a:rPr sz="1100" b="1" i="0">
+                <a:solidFill>
+                  <a:srgbClr val="D68E10"/>
+                </a:solidFill>
+                <a:latin typeface="Roboto"/>
+              </a:rPr>
+              <a:t>Institute</a:t>
+            </a:r>
+          </a:p>
+        </p:txBody>
+      </p:sp>
+      <p:sp>
+        <p:nvSpPr>
+          <p:cNvPr id="7" name="TextBox 6"/>
+          <p:cNvSpPr txBox="1"/>
+          <p:nvPr/>
+        </p:nvSpPr>
+        <p:spPr>
+          <a:xfrm>
+            <a:off x="10515600" y="6400800"/>
+            <a:ext cx="1188720" cy="320040"/>
+          </a:xfrm>
+          <a:prstGeom prst="rect">
+            <a:avLst/>
+          </a:prstGeom>
+          <a:noFill/>
+        </p:spPr>
+        <p:txBody>
+          <a:bodyPr wrap="square" anchor="t" lIns="0" rIns="0" tIns="0" bIns="0">
+            <a:spAutoFit/>
+          </a:bodyPr>
+          <a:lstStyle/>
+          <a:p>
+            <a:pPr algn="r"/>
+            <a:r>
+              <a:rPr sz="1100" b="0" i="0">
+                <a:solidFill>
+                  <a:srgbClr val="7A7A7A"/>
+                </a:solidFill>
+                <a:latin typeface="Roboto"/>
+              </a:rPr>
+              <a:t>9</a:t>
+            </a:r>
+          </a:p>
+        </p:txBody>
+      </p:sp>
+    </p:spTree>
+  </p:cSld>
+  <p:clrMapOvr>
+    <a:masterClrMapping/>
+  </p:clrMapOvr>
+</p:sld>
+</file>
+
+<file path=ppt/slides/slide14.xml><?xml version="1.0" encoding="utf-8"?>
+<p:sld xmlns:a="http://schemas.openxmlformats.org/drawingml/2006/main" xmlns:p="http://schemas.openxmlformats.org/presentationml/2006/main" xmlns:r="http://schemas.openxmlformats.org/officeDocument/2006/relationships">
+  <p:cSld>
+    <p:bg>
+      <p:bgPr>
+        <a:solidFill>
+          <a:srgbClr val="FFFFFF"/>
+        </a:solidFill>
+        <a:effectLst/>
+      </p:bgPr>
+    </p:bg>
+    <p:spTree>
+      <p:nvGrpSpPr>
+        <p:cNvPr id="1" name=""/>
+        <p:cNvGrpSpPr/>
+        <p:nvPr/>
+      </p:nvGrpSpPr>
+      <p:grpSpPr/>
+      <p:sp>
+        <p:nvSpPr>
+          <p:cNvPr id="2" name="TextBox 1"/>
+          <p:cNvSpPr txBox="1"/>
+          <p:nvPr/>
+        </p:nvSpPr>
+        <p:spPr>
+          <a:xfrm>
+            <a:off x="640080" y="457200"/>
+            <a:ext cx="10881360" cy="960120"/>
+          </a:xfrm>
+          <a:prstGeom prst="rect">
+            <a:avLst/>
+          </a:prstGeom>
+          <a:noFill/>
+        </p:spPr>
+        <p:txBody>
+          <a:bodyPr wrap="square" anchor="t" lIns="0" rIns="0" tIns="0" bIns="0">
+            <a:spAutoFit/>
+          </a:bodyPr>
+          <a:lstStyle/>
+          <a:p>
+            <a:r>
+              <a:rPr sz="2800" b="1" i="0">
+                <a:solidFill>
+                  <a:srgbClr val="2A2929"/>
+                </a:solidFill>
+                <a:latin typeface="Roboto"/>
+              </a:rPr>
+              <a:t>Obtain the sign-off</a:t>
+            </a:r>
+          </a:p>
+        </p:txBody>
+      </p:sp>
+      <p:sp>
+        <p:nvSpPr>
+          <p:cNvPr id="3" name="Rectangle 2"/>
+          <p:cNvSpPr/>
+          <p:nvPr/>
+        </p:nvSpPr>
+        <p:spPr>
+          <a:xfrm>
+            <a:off x="658368" y="1371600"/>
+            <a:ext cx="1463040" cy="50800"/>
+          </a:xfrm>
+          <a:prstGeom prst="rect">
+            <a:avLst/>
+          </a:prstGeom>
+          <a:solidFill>
+            <a:srgbClr val="205F61"/>
+          </a:solidFill>
+          <a:ln>
+            <a:noFill/>
+          </a:ln>
+          <a:effectLst/>
+        </p:spPr>
+        <p:style>
+          <a:lnRef idx="1">
+            <a:schemeClr val="accent1"/>
+          </a:lnRef>
+          <a:fillRef idx="3">
+            <a:schemeClr val="accent1"/>
+          </a:fillRef>
+          <a:effectRef idx="2">
+            <a:schemeClr val="accent1"/>
+          </a:effectRef>
+          <a:fontRef idx="minor">
+            <a:schemeClr val="lt1"/>
+          </a:fontRef>
+        </p:style>
+        <p:txBody>
+          <a:bodyPr rtlCol="0" anchor="ctr"/>
+          <a:lstStyle/>
+          <a:p>
+            <a:pPr algn="ctr"/>
+          </a:p>
+        </p:txBody>
+      </p:sp>
+      <p:sp>
+        <p:nvSpPr>
+          <p:cNvPr id="4" name="TextBox 3"/>
+          <p:cNvSpPr txBox="1"/>
+          <p:nvPr/>
+        </p:nvSpPr>
+        <p:spPr>
+          <a:xfrm>
+            <a:off x="658368" y="1691640"/>
+            <a:ext cx="10881360" cy="4480560"/>
+          </a:xfrm>
+          <a:prstGeom prst="rect">
+            <a:avLst/>
+          </a:prstGeom>
+          <a:noFill/>
+        </p:spPr>
+        <p:txBody>
+          <a:bodyPr wrap="square" anchor="ctr" lIns="0" rIns="0" tIns="0" bIns="0">
+            <a:spAutoFit/>
+          </a:bodyPr>
+          <a:lstStyle/>
+          <a:p>
+            <a:pPr marL="0" indent="0">
+              <a:lnSpc>
+                <a:spcPct val="105000"/>
+              </a:lnSpc>
+              <a:spcBef>
+                <a:spcPts val="0"/>
+              </a:spcBef>
+              <a:spcAft>
+                <a:spcPts val="1000"/>
+              </a:spcAft>
+            </a:pPr>
+            <a:r>
+              <a:rPr sz="2400" b="1" i="0">
+                <a:solidFill>
+                  <a:srgbClr val="EDAB0C"/>
+                </a:solidFill>
+                <a:latin typeface="Roboto"/>
+              </a:rPr>
+              <a:t>■  </a:t>
+            </a:r>
+            <a:r>
+              <a:rPr sz="2400" b="0" i="0">
+                <a:solidFill>
+                  <a:srgbClr val="2A2929"/>
+                </a:solidFill>
+                <a:latin typeface="Roboto"/>
+              </a:rPr>
+              <a:t>Ask for the decision and record it — the build accepted against the approved design.</a:t>
+            </a:r>
+          </a:p>
+          <a:p>
+            <a:pPr marL="0" indent="0">
+              <a:lnSpc>
+                <a:spcPct val="105000"/>
+              </a:lnSpc>
+              <a:spcBef>
+                <a:spcPts val="0"/>
+              </a:spcBef>
+              <a:spcAft>
+                <a:spcPts val="1000"/>
+              </a:spcAft>
+            </a:pPr>
+            <a:r>
+              <a:rPr sz="2400" b="1" i="0">
+                <a:solidFill>
+                  <a:srgbClr val="EDAB0C"/>
+                </a:solidFill>
+                <a:latin typeface="Roboto"/>
+              </a:rPr>
+              <a:t>■  </a:t>
+            </a:r>
+            <a:r>
+              <a:rPr sz="2400" b="0" i="0">
+                <a:solidFill>
+                  <a:srgbClr val="2A2929"/>
+                </a:solidFill>
+                <a:latin typeface="Roboto"/>
+              </a:rPr>
+              <a:t>Sign-off closes the loop that opened in AT1: designed, approved, built, accepted.</a:t>
+            </a:r>
+          </a:p>
+          <a:p>
+            <a:pPr marL="0" indent="0">
+              <a:lnSpc>
+                <a:spcPct val="105000"/>
+              </a:lnSpc>
+              <a:spcBef>
+                <a:spcPts val="0"/>
+              </a:spcBef>
+              <a:spcAft>
+                <a:spcPts val="1000"/>
+              </a:spcAft>
+            </a:pPr>
+            <a:r>
+              <a:rPr sz="2400" b="1" i="0">
+                <a:solidFill>
+                  <a:srgbClr val="EDAB0C"/>
+                </a:solidFill>
+                <a:latin typeface="Roboto"/>
+              </a:rPr>
+              <a:t>■  </a:t>
+            </a:r>
+            <a:r>
+              <a:rPr sz="2400" b="0" i="0">
+                <a:solidFill>
+                  <a:srgbClr val="2A2929"/>
+                </a:solidFill>
+                <a:latin typeface="Roboto"/>
+              </a:rPr>
+              <a:t>The recorded decision is the evidence, conditions and all.</a:t>
+            </a:r>
+          </a:p>
+        </p:txBody>
+      </p:sp>
+      <p:sp>
+        <p:nvSpPr>
+          <p:cNvPr id="5" name="Rectangle 4"/>
+          <p:cNvSpPr/>
+          <p:nvPr/>
+        </p:nvSpPr>
+        <p:spPr>
+          <a:xfrm>
+            <a:off x="0" y="6565392"/>
+            <a:ext cx="12191695" cy="38100"/>
+          </a:xfrm>
+          <a:prstGeom prst="rect">
+            <a:avLst/>
+          </a:prstGeom>
+          <a:solidFill>
+            <a:srgbClr val="205F61"/>
+          </a:solidFill>
+          <a:ln>
+            <a:noFill/>
+          </a:ln>
+          <a:effectLst/>
+        </p:spPr>
+        <p:style>
+          <a:lnRef idx="1">
+            <a:schemeClr val="accent1"/>
+          </a:lnRef>
+          <a:fillRef idx="3">
+            <a:schemeClr val="accent1"/>
+          </a:fillRef>
+          <a:effectRef idx="2">
+            <a:schemeClr val="accent1"/>
+          </a:effectRef>
+          <a:fontRef idx="minor">
+            <a:schemeClr val="lt1"/>
+          </a:fontRef>
+        </p:style>
+        <p:txBody>
+          <a:bodyPr rtlCol="0" anchor="ctr"/>
+          <a:lstStyle/>
+          <a:p>
+            <a:pPr algn="ctr"/>
+          </a:p>
+        </p:txBody>
+      </p:sp>
+      <p:sp>
+        <p:nvSpPr>
+          <p:cNvPr id="6" name="TextBox 5"/>
+          <p:cNvSpPr txBox="1"/>
+          <p:nvPr/>
+        </p:nvSpPr>
+        <p:spPr>
+          <a:xfrm>
+            <a:off x="502920" y="6400800"/>
+            <a:ext cx="5486400" cy="320040"/>
+          </a:xfrm>
+          <a:prstGeom prst="rect">
+            <a:avLst/>
+          </a:prstGeom>
+          <a:noFill/>
+        </p:spPr>
+        <p:txBody>
+          <a:bodyPr wrap="square" anchor="t" lIns="0" rIns="0" tIns="0" bIns="0">
+            <a:spAutoFit/>
+          </a:bodyPr>
+          <a:lstStyle/>
+          <a:p>
+            <a:r>
+              <a:rPr sz="1100" b="1" i="0">
+                <a:solidFill>
+                  <a:srgbClr val="2A2929"/>
+                </a:solidFill>
+                <a:latin typeface="Roboto"/>
+              </a:rPr>
+              <a:t>Kangan </a:t>
+            </a:r>
+            <a:r>
+              <a:rPr sz="1100" b="1" i="0">
+                <a:solidFill>
+                  <a:srgbClr val="D68E10"/>
+                </a:solidFill>
+                <a:latin typeface="Roboto"/>
+              </a:rPr>
+              <a:t>Institute</a:t>
+            </a:r>
+          </a:p>
+        </p:txBody>
+      </p:sp>
+      <p:sp>
+        <p:nvSpPr>
+          <p:cNvPr id="7" name="TextBox 6"/>
+          <p:cNvSpPr txBox="1"/>
+          <p:nvPr/>
+        </p:nvSpPr>
+        <p:spPr>
+          <a:xfrm>
+            <a:off x="10515600" y="6400800"/>
+            <a:ext cx="1188720" cy="320040"/>
+          </a:xfrm>
+          <a:prstGeom prst="rect">
+            <a:avLst/>
+          </a:prstGeom>
+          <a:noFill/>
+        </p:spPr>
+        <p:txBody>
+          <a:bodyPr wrap="square" anchor="t" lIns="0" rIns="0" tIns="0" bIns="0">
+            <a:spAutoFit/>
+          </a:bodyPr>
+          <a:lstStyle/>
+          <a:p>
+            <a:pPr algn="r"/>
+            <a:r>
+              <a:rPr sz="1100" b="0" i="0">
+                <a:solidFill>
+                  <a:srgbClr val="7A7A7A"/>
+                </a:solidFill>
+                <a:latin typeface="Roboto"/>
+              </a:rPr>
+              <a:t>10</a:t>
+            </a:r>
+          </a:p>
+        </p:txBody>
+      </p:sp>
+    </p:spTree>
+  </p:cSld>
+  <p:clrMapOvr>
+    <a:masterClrMapping/>
+  </p:clrMapOvr>
+</p:sld>
+</file>
+
+<file path=ppt/slides/slide15.xml><?xml version="1.0" encoding="utf-8"?>
+<p:sld xmlns:a="http://schemas.openxmlformats.org/drawingml/2006/main" xmlns:p="http://schemas.openxmlformats.org/presentationml/2006/main" xmlns:r="http://schemas.openxmlformats.org/officeDocument/2006/relationships">
+  <p:cSld>
+    <p:bg>
+      <p:bgPr>
+        <a:solidFill>
+          <a:srgbClr val="FFFFFF"/>
+        </a:solidFill>
+        <a:effectLst/>
+      </p:bgPr>
+    </p:bg>
+    <p:spTree>
+      <p:nvGrpSpPr>
+        <p:cNvPr id="1" name=""/>
+        <p:cNvGrpSpPr/>
+        <p:nvPr/>
+      </p:nvGrpSpPr>
+      <p:grpSpPr/>
+      <p:sp>
+        <p:nvSpPr>
+          <p:cNvPr id="2" name="Rectangle 1"/>
+          <p:cNvSpPr/>
+          <p:nvPr/>
+        </p:nvSpPr>
+        <p:spPr>
+          <a:xfrm>
+            <a:off x="0" y="0"/>
+            <a:ext cx="12191695" cy="1234440"/>
+          </a:xfrm>
+          <a:prstGeom prst="rect">
+            <a:avLst/>
+          </a:prstGeom>
+          <a:solidFill>
+            <a:srgbClr val="205F61"/>
+          </a:solidFill>
+          <a:ln>
+            <a:noFill/>
+          </a:ln>
+          <a:effectLst/>
+        </p:spPr>
+        <p:style>
+          <a:lnRef idx="1">
+            <a:schemeClr val="accent1"/>
+          </a:lnRef>
+          <a:fillRef idx="3">
+            <a:schemeClr val="accent1"/>
+          </a:fillRef>
+          <a:effectRef idx="2">
+            <a:schemeClr val="accent1"/>
+          </a:effectRef>
+          <a:fontRef idx="minor">
+            <a:schemeClr val="lt1"/>
+          </a:fontRef>
+        </p:style>
+        <p:txBody>
+          <a:bodyPr rtlCol="0" anchor="ctr"/>
+          <a:lstStyle/>
+          <a:p>
+            <a:pPr algn="ctr"/>
+          </a:p>
+        </p:txBody>
+      </p:sp>
+      <p:sp>
+        <p:nvSpPr>
+          <p:cNvPr id="3" name="Rounded Rectangle 2"/>
+          <p:cNvSpPr/>
+          <p:nvPr/>
+        </p:nvSpPr>
+        <p:spPr>
+          <a:xfrm>
+            <a:off x="640080" y="384048"/>
+            <a:ext cx="1691640" cy="457200"/>
+          </a:xfrm>
+          <a:prstGeom prst="roundRect">
+            <a:avLst/>
+          </a:prstGeom>
+          <a:solidFill>
+            <a:srgbClr val="2A2929"/>
+          </a:solidFill>
+          <a:ln>
+            <a:noFill/>
+          </a:ln>
+          <a:effectLst/>
+        </p:spPr>
+        <p:style>
+          <a:lnRef idx="1">
+            <a:schemeClr val="accent1"/>
+          </a:lnRef>
+          <a:fillRef idx="3">
+            <a:schemeClr val="accent1"/>
+          </a:fillRef>
+          <a:effectRef idx="2">
+            <a:schemeClr val="accent1"/>
+          </a:effectRef>
+          <a:fontRef idx="minor">
+            <a:schemeClr val="lt1"/>
+          </a:fontRef>
+        </p:style>
+        <p:txBody>
+          <a:bodyPr rtlCol="0" anchor="ctr"/>
+          <a:lstStyle/>
+          <a:p>
+            <a:pPr algn="ctr"/>
+            <a:r>
+              <a:rPr sz="1400" b="1" i="0">
+                <a:solidFill>
+                  <a:srgbClr val="FBB900"/>
+                </a:solidFill>
+                <a:latin typeface="Roboto"/>
+              </a:rPr>
+              <a:t>ACTIVITY</a:t>
+            </a:r>
+          </a:p>
+        </p:txBody>
+      </p:sp>
+      <p:sp>
+        <p:nvSpPr>
+          <p:cNvPr id="4" name="TextBox 3"/>
+          <p:cNvSpPr txBox="1"/>
+          <p:nvPr/>
+        </p:nvSpPr>
+        <p:spPr>
+          <a:xfrm>
+            <a:off x="2560320" y="310896"/>
+            <a:ext cx="8961120" cy="685800"/>
+          </a:xfrm>
+          <a:prstGeom prst="rect">
+            <a:avLst/>
+          </a:prstGeom>
+          <a:noFill/>
+        </p:spPr>
+        <p:txBody>
+          <a:bodyPr wrap="square" anchor="ctr" lIns="0" rIns="0" tIns="0" bIns="0">
+            <a:spAutoFit/>
+          </a:bodyPr>
+          <a:lstStyle/>
+          <a:p>
+            <a:r>
+              <a:rPr sz="2600" b="1" i="0">
+                <a:solidFill>
+                  <a:srgbClr val="FFFFFF"/>
+                </a:solidFill>
+                <a:latin typeface="Roboto"/>
+              </a:rPr>
+              <a:t>Confirm the build and get sign-off</a:t>
+            </a:r>
+          </a:p>
+        </p:txBody>
+      </p:sp>
+      <p:sp>
+        <p:nvSpPr>
+          <p:cNvPr id="5" name="TextBox 4"/>
+          <p:cNvSpPr txBox="1"/>
+          <p:nvPr/>
+        </p:nvSpPr>
+        <p:spPr>
+          <a:xfrm>
+            <a:off x="658368" y="1554480"/>
+            <a:ext cx="10881360" cy="4297680"/>
+          </a:xfrm>
+          <a:prstGeom prst="rect">
+            <a:avLst/>
+          </a:prstGeom>
+          <a:noFill/>
+        </p:spPr>
+        <p:txBody>
+          <a:bodyPr wrap="square" anchor="t" lIns="0" rIns="0" tIns="0" bIns="0">
+            <a:spAutoFit/>
+          </a:bodyPr>
+          <a:lstStyle/>
+          <a:p>
+            <a:pPr marL="0" indent="0">
+              <a:lnSpc>
+                <a:spcPct val="105000"/>
+              </a:lnSpc>
+              <a:spcBef>
+                <a:spcPts val="0"/>
+              </a:spcBef>
+              <a:spcAft>
+                <a:spcPts val="1000"/>
+              </a:spcAft>
+            </a:pPr>
+            <a:r>
+              <a:rPr sz="1700" b="1" i="0">
+                <a:solidFill>
+                  <a:srgbClr val="EDAB0C"/>
+                </a:solidFill>
+                <a:latin typeface="Roboto"/>
+              </a:rPr>
+              <a:t>■  </a:t>
+            </a:r>
+            <a:r>
+              <a:rPr sz="1700" b="0" i="0">
+                <a:solidFill>
+                  <a:srgbClr val="2A2929"/>
+                </a:solidFill>
+                <a:latin typeface="Roboto"/>
+              </a:rPr>
+              <a:t>Workbook — task 22.</a:t>
+            </a:r>
+          </a:p>
+          <a:p>
+            <a:pPr marL="0" indent="0">
+              <a:lnSpc>
+                <a:spcPct val="105000"/>
+              </a:lnSpc>
+              <a:spcBef>
+                <a:spcPts val="0"/>
+              </a:spcBef>
+              <a:spcAft>
+                <a:spcPts val="1000"/>
+              </a:spcAft>
+            </a:pPr>
+            <a:r>
+              <a:rPr sz="1700" b="1" i="0">
+                <a:solidFill>
+                  <a:srgbClr val="EDAB0C"/>
+                </a:solidFill>
+                <a:latin typeface="Roboto"/>
+              </a:rPr>
+              <a:t>■  </a:t>
+            </a:r>
+            <a:r>
+              <a:rPr sz="1700" b="0" i="0">
+                <a:solidFill>
+                  <a:srgbClr val="2A2929"/>
+                </a:solidFill>
+                <a:latin typeface="Roboto"/>
+              </a:rPr>
+              <a:t>Walk your client through the build in pairs, respond to their feedback, and record the sign-off decision.</a:t>
+            </a:r>
+          </a:p>
+        </p:txBody>
+      </p:sp>
+      <p:sp>
+        <p:nvSpPr>
+          <p:cNvPr id="6" name="Rounded Rectangle 5"/>
+          <p:cNvSpPr/>
+          <p:nvPr/>
+        </p:nvSpPr>
+        <p:spPr>
+          <a:xfrm>
+            <a:off x="640080" y="5897880"/>
+            <a:ext cx="4023360" cy="457200"/>
+          </a:xfrm>
+          <a:prstGeom prst="roundRect">
+            <a:avLst/>
+          </a:prstGeom>
+          <a:solidFill>
+            <a:srgbClr val="F9F9F9"/>
+          </a:solidFill>
+          <a:ln w="12700">
+            <a:solidFill>
+              <a:srgbClr val="CCCCCC"/>
+            </a:solidFill>
+          </a:ln>
+          <a:effectLst/>
+        </p:spPr>
+        <p:style>
+          <a:lnRef idx="1">
+            <a:schemeClr val="accent1"/>
+          </a:lnRef>
+          <a:fillRef idx="3">
+            <a:schemeClr val="accent1"/>
+          </a:fillRef>
+          <a:effectRef idx="2">
+            <a:schemeClr val="accent1"/>
+          </a:effectRef>
+          <a:fontRef idx="minor">
+            <a:schemeClr val="lt1"/>
+          </a:fontRef>
+        </p:style>
+        <p:txBody>
+          <a:bodyPr rtlCol="0" anchor="ctr"/>
+          <a:lstStyle/>
+          <a:p>
+            <a:pPr algn="ctr"/>
+          </a:p>
+        </p:txBody>
+      </p:sp>
+      <p:sp>
+        <p:nvSpPr>
+          <p:cNvPr id="7" name="TextBox 6"/>
+          <p:cNvSpPr txBox="1"/>
+          <p:nvPr/>
+        </p:nvSpPr>
+        <p:spPr>
+          <a:xfrm>
+            <a:off x="822960" y="5943600"/>
+            <a:ext cx="3657600" cy="365760"/>
+          </a:xfrm>
+          <a:prstGeom prst="rect">
+            <a:avLst/>
+          </a:prstGeom>
+          <a:noFill/>
+        </p:spPr>
+        <p:txBody>
+          <a:bodyPr wrap="square" anchor="ctr" lIns="0" rIns="0" tIns="0" bIns="0">
+            <a:spAutoFit/>
+          </a:bodyPr>
+          <a:lstStyle/>
+          <a:p>
+            <a:r>
+              <a:rPr sz="1500" b="1" i="0">
+                <a:solidFill>
+                  <a:srgbClr val="2A2929"/>
+                </a:solidFill>
+                <a:latin typeface="Roboto"/>
+              </a:rPr>
+              <a:t>⏱  ~25 min</a:t>
+            </a:r>
+          </a:p>
+        </p:txBody>
+      </p:sp>
+      <p:sp>
+        <p:nvSpPr>
+          <p:cNvPr id="8" name="Rectangle 7"/>
+          <p:cNvSpPr/>
+          <p:nvPr/>
+        </p:nvSpPr>
+        <p:spPr>
+          <a:xfrm>
+            <a:off x="0" y="6565392"/>
+            <a:ext cx="12191695" cy="38100"/>
+          </a:xfrm>
+          <a:prstGeom prst="rect">
+            <a:avLst/>
+          </a:prstGeom>
+          <a:solidFill>
+            <a:srgbClr val="205F61"/>
+          </a:solidFill>
+          <a:ln>
+            <a:noFill/>
+          </a:ln>
+          <a:effectLst/>
+        </p:spPr>
+        <p:style>
+          <a:lnRef idx="1">
+            <a:schemeClr val="accent1"/>
+          </a:lnRef>
+          <a:fillRef idx="3">
+            <a:schemeClr val="accent1"/>
+          </a:fillRef>
+          <a:effectRef idx="2">
+            <a:schemeClr val="accent1"/>
+          </a:effectRef>
+          <a:fontRef idx="minor">
+            <a:schemeClr val="lt1"/>
+          </a:fontRef>
+        </p:style>
+        <p:txBody>
+          <a:bodyPr rtlCol="0" anchor="ctr"/>
+          <a:lstStyle/>
+          <a:p>
+            <a:pPr algn="ctr"/>
+          </a:p>
+        </p:txBody>
+      </p:sp>
+      <p:sp>
+        <p:nvSpPr>
+          <p:cNvPr id="9" name="TextBox 8"/>
+          <p:cNvSpPr txBox="1"/>
+          <p:nvPr/>
+        </p:nvSpPr>
+        <p:spPr>
+          <a:xfrm>
+            <a:off x="502920" y="6400800"/>
+            <a:ext cx="5486400" cy="320040"/>
+          </a:xfrm>
+          <a:prstGeom prst="rect">
+            <a:avLst/>
+          </a:prstGeom>
+          <a:noFill/>
+        </p:spPr>
+        <p:txBody>
+          <a:bodyPr wrap="square" anchor="t" lIns="0" rIns="0" tIns="0" bIns="0">
+            <a:spAutoFit/>
+          </a:bodyPr>
+          <a:lstStyle/>
+          <a:p>
+            <a:r>
+              <a:rPr sz="1100" b="1" i="0">
+                <a:solidFill>
+                  <a:srgbClr val="2A2929"/>
+                </a:solidFill>
+                <a:latin typeface="Roboto"/>
+              </a:rPr>
+              <a:t>Kangan </a:t>
+            </a:r>
+            <a:r>
+              <a:rPr sz="1100" b="1" i="0">
+                <a:solidFill>
+                  <a:srgbClr val="D68E10"/>
+                </a:solidFill>
+                <a:latin typeface="Roboto"/>
+              </a:rPr>
+              <a:t>Institute</a:t>
+            </a:r>
+          </a:p>
+        </p:txBody>
+      </p:sp>
+      <p:sp>
+        <p:nvSpPr>
+          <p:cNvPr id="10" name="TextBox 9"/>
+          <p:cNvSpPr txBox="1"/>
+          <p:nvPr/>
+        </p:nvSpPr>
+        <p:spPr>
+          <a:xfrm>
+            <a:off x="10515600" y="6400800"/>
+            <a:ext cx="1188720" cy="320040"/>
+          </a:xfrm>
+          <a:prstGeom prst="rect">
+            <a:avLst/>
+          </a:prstGeom>
+          <a:noFill/>
+        </p:spPr>
+        <p:txBody>
+          <a:bodyPr wrap="square" anchor="t" lIns="0" rIns="0" tIns="0" bIns="0">
+            <a:spAutoFit/>
+          </a:bodyPr>
+          <a:lstStyle/>
+          <a:p>
+            <a:pPr algn="r"/>
+            <a:r>
+              <a:rPr sz="1100" b="0" i="0">
+                <a:solidFill>
+                  <a:srgbClr val="7A7A7A"/>
+                </a:solidFill>
+                <a:latin typeface="Roboto"/>
+              </a:rPr>
+              <a:t>11</a:t>
+            </a:r>
+          </a:p>
+        </p:txBody>
+      </p:sp>
+    </p:spTree>
+  </p:cSld>
+  <p:clrMapOvr>
+    <a:masterClrMapping/>
+  </p:clrMapOvr>
+</p:sld>
+</file>
+
+<file path=ppt/slides/slide16.xml><?xml version="1.0" encoding="utf-8"?>
+<p:sld xmlns:a="http://schemas.openxmlformats.org/drawingml/2006/main" xmlns:p="http://schemas.openxmlformats.org/presentationml/2006/main" xmlns:r="http://schemas.openxmlformats.org/officeDocument/2006/relationships">
+  <p:cSld>
+    <p:bg>
+      <p:bgPr>
+        <a:solidFill>
+          <a:srgbClr val="F9F9F9"/>
+        </a:solidFill>
+        <a:effectLst/>
+      </p:bgPr>
+    </p:bg>
+    <p:spTree>
+      <p:nvGrpSpPr>
+        <p:cNvPr id="1" name=""/>
+        <p:cNvGrpSpPr/>
+        <p:nvPr/>
+      </p:nvGrpSpPr>
+      <p:grpSpPr/>
+      <p:sp>
+        <p:nvSpPr>
+          <p:cNvPr id="2" name="TextBox 1"/>
+          <p:cNvSpPr txBox="1"/>
+          <p:nvPr/>
+        </p:nvSpPr>
+        <p:spPr>
+          <a:xfrm>
+            <a:off x="640080" y="548640"/>
+            <a:ext cx="10881360" cy="1097280"/>
+          </a:xfrm>
+          <a:prstGeom prst="rect">
+            <a:avLst/>
+          </a:prstGeom>
+          <a:noFill/>
+        </p:spPr>
+        <p:txBody>
+          <a:bodyPr wrap="square" anchor="t" lIns="0" rIns="0" tIns="0" bIns="0">
+            <a:spAutoFit/>
+          </a:bodyPr>
+          <a:lstStyle/>
+          <a:p>
+            <a:r>
+              <a:rPr sz="3200" b="1" i="0">
+                <a:solidFill>
+                  <a:srgbClr val="2A2929"/>
+                </a:solidFill>
+                <a:latin typeface="Roboto"/>
+              </a:rPr>
+              <a:t>Key takeaways</a:t>
+            </a:r>
+          </a:p>
+          <a:p>
+            <a:pPr>
+              <a:spcBef>
+                <a:spcPts val="200"/>
               </a:spcBef>
             </a:pPr>
             <a:r>
-              <a:rPr sz="1900" b="0" i="0">
-                <a:solidFill>
-                  <a:srgbClr val="E8E8E8"/>
+              <a:rPr sz="1800" b="1" i="0">
+                <a:solidFill>
+                  <a:srgbClr val="205F61"/>
+                </a:solidFill>
+                <a:latin typeface="Roboto"/>
+              </a:rPr>
+              <a:t>Section 3 · The close</a:t>
+            </a:r>
+          </a:p>
+        </p:txBody>
+      </p:sp>
+      <p:sp>
+        <p:nvSpPr>
+          <p:cNvPr id="3" name="Rectangle 2"/>
+          <p:cNvSpPr/>
+          <p:nvPr/>
+        </p:nvSpPr>
+        <p:spPr>
+          <a:xfrm>
+            <a:off x="658368" y="1600200"/>
+            <a:ext cx="1463040" cy="50800"/>
+          </a:xfrm>
+          <a:prstGeom prst="rect">
+            <a:avLst/>
+          </a:prstGeom>
+          <a:solidFill>
+            <a:srgbClr val="205F61"/>
+          </a:solidFill>
+          <a:ln>
+            <a:noFill/>
+          </a:ln>
+          <a:effectLst/>
+        </p:spPr>
+        <p:style>
+          <a:lnRef idx="1">
+            <a:schemeClr val="accent1"/>
+          </a:lnRef>
+          <a:fillRef idx="3">
+            <a:schemeClr val="accent1"/>
+          </a:fillRef>
+          <a:effectRef idx="2">
+            <a:schemeClr val="accent1"/>
+          </a:effectRef>
+          <a:fontRef idx="minor">
+            <a:schemeClr val="lt1"/>
+          </a:fontRef>
+        </p:style>
+        <p:txBody>
+          <a:bodyPr rtlCol="0" anchor="ctr"/>
+          <a:lstStyle/>
+          <a:p>
+            <a:pPr algn="ctr"/>
+          </a:p>
+        </p:txBody>
+      </p:sp>
+      <p:sp>
+        <p:nvSpPr>
+          <p:cNvPr id="4" name="Rectangle 3"/>
+          <p:cNvSpPr/>
+          <p:nvPr/>
+        </p:nvSpPr>
+        <p:spPr>
+          <a:xfrm>
+            <a:off x="640080" y="1965960"/>
+            <a:ext cx="10927080" cy="841248"/>
+          </a:xfrm>
+          <a:prstGeom prst="rect">
+            <a:avLst/>
+          </a:prstGeom>
+          <a:solidFill>
+            <a:srgbClr val="FFFFFF"/>
+          </a:solidFill>
+          <a:ln w="12700">
+            <a:solidFill>
+              <a:srgbClr val="CCCCCC"/>
+            </a:solidFill>
+          </a:ln>
+          <a:effectLst/>
+        </p:spPr>
+        <p:style>
+          <a:lnRef idx="1">
+            <a:schemeClr val="accent1"/>
+          </a:lnRef>
+          <a:fillRef idx="3">
+            <a:schemeClr val="accent1"/>
+          </a:fillRef>
+          <a:effectRef idx="2">
+            <a:schemeClr val="accent1"/>
+          </a:effectRef>
+          <a:fontRef idx="minor">
+            <a:schemeClr val="lt1"/>
+          </a:fontRef>
+        </p:style>
+        <p:txBody>
+          <a:bodyPr rtlCol="0" anchor="ctr"/>
+          <a:lstStyle/>
+          <a:p>
+            <a:pPr algn="ctr"/>
+          </a:p>
+        </p:txBody>
+      </p:sp>
+      <p:sp>
+        <p:nvSpPr>
+          <p:cNvPr id="5" name="Rectangle 4"/>
+          <p:cNvSpPr/>
+          <p:nvPr/>
+        </p:nvSpPr>
+        <p:spPr>
+          <a:xfrm>
+            <a:off x="640080" y="1965960"/>
+            <a:ext cx="109728" cy="841248"/>
+          </a:xfrm>
+          <a:prstGeom prst="rect">
+            <a:avLst/>
+          </a:prstGeom>
+          <a:solidFill>
+            <a:srgbClr val="205F61"/>
+          </a:solidFill>
+          <a:ln>
+            <a:noFill/>
+          </a:ln>
+          <a:effectLst/>
+        </p:spPr>
+        <p:style>
+          <a:lnRef idx="1">
+            <a:schemeClr val="accent1"/>
+          </a:lnRef>
+          <a:fillRef idx="3">
+            <a:schemeClr val="accent1"/>
+          </a:fillRef>
+          <a:effectRef idx="2">
+            <a:schemeClr val="accent1"/>
+          </a:effectRef>
+          <a:fontRef idx="minor">
+            <a:schemeClr val="lt1"/>
+          </a:fontRef>
+        </p:style>
+        <p:txBody>
+          <a:bodyPr rtlCol="0" anchor="ctr"/>
+          <a:lstStyle/>
+          <a:p>
+            <a:pPr algn="ctr"/>
+          </a:p>
+        </p:txBody>
+      </p:sp>
+      <p:sp>
+        <p:nvSpPr>
+          <p:cNvPr id="6" name="TextBox 5"/>
+          <p:cNvSpPr txBox="1"/>
+          <p:nvPr/>
+        </p:nvSpPr>
+        <p:spPr>
+          <a:xfrm>
+            <a:off x="960120" y="1965960"/>
+            <a:ext cx="10424160" cy="841248"/>
+          </a:xfrm>
+          <a:prstGeom prst="rect">
+            <a:avLst/>
+          </a:prstGeom>
+          <a:noFill/>
+        </p:spPr>
+        <p:txBody>
+          <a:bodyPr wrap="square" anchor="ctr" lIns="0" rIns="0" tIns="0" bIns="0">
+            <a:spAutoFit/>
+          </a:bodyPr>
+          <a:lstStyle/>
+          <a:p>
+            <a:pPr>
+              <a:lnSpc>
+                <a:spcPct val="100000"/>
+              </a:lnSpc>
+            </a:pPr>
+            <a:r>
+              <a:rPr sz="1700" b="0" i="0">
+                <a:solidFill>
+                  <a:srgbClr val="2A2929"/>
+                </a:solidFill>
+                <a:latin typeface="Roboto"/>
+              </a:rPr>
+              <a:t>Plain language, evidence in hand.</a:t>
+            </a:r>
+          </a:p>
+        </p:txBody>
+      </p:sp>
+      <p:sp>
+        <p:nvSpPr>
+          <p:cNvPr id="7" name="Rectangle 6"/>
+          <p:cNvSpPr/>
+          <p:nvPr/>
+        </p:nvSpPr>
+        <p:spPr>
+          <a:xfrm>
+            <a:off x="640080" y="2916936"/>
+            <a:ext cx="10927080" cy="841248"/>
+          </a:xfrm>
+          <a:prstGeom prst="rect">
+            <a:avLst/>
+          </a:prstGeom>
+          <a:solidFill>
+            <a:srgbClr val="FFFFFF"/>
+          </a:solidFill>
+          <a:ln w="12700">
+            <a:solidFill>
+              <a:srgbClr val="CCCCCC"/>
+            </a:solidFill>
+          </a:ln>
+          <a:effectLst/>
+        </p:spPr>
+        <p:style>
+          <a:lnRef idx="1">
+            <a:schemeClr val="accent1"/>
+          </a:lnRef>
+          <a:fillRef idx="3">
+            <a:schemeClr val="accent1"/>
+          </a:fillRef>
+          <a:effectRef idx="2">
+            <a:schemeClr val="accent1"/>
+          </a:effectRef>
+          <a:fontRef idx="minor">
+            <a:schemeClr val="lt1"/>
+          </a:fontRef>
+        </p:style>
+        <p:txBody>
+          <a:bodyPr rtlCol="0" anchor="ctr"/>
+          <a:lstStyle/>
+          <a:p>
+            <a:pPr algn="ctr"/>
+          </a:p>
+        </p:txBody>
+      </p:sp>
+      <p:sp>
+        <p:nvSpPr>
+          <p:cNvPr id="8" name="Rectangle 7"/>
+          <p:cNvSpPr/>
+          <p:nvPr/>
+        </p:nvSpPr>
+        <p:spPr>
+          <a:xfrm>
+            <a:off x="640080" y="2916936"/>
+            <a:ext cx="109728" cy="841248"/>
+          </a:xfrm>
+          <a:prstGeom prst="rect">
+            <a:avLst/>
+          </a:prstGeom>
+          <a:solidFill>
+            <a:srgbClr val="205F61"/>
+          </a:solidFill>
+          <a:ln>
+            <a:noFill/>
+          </a:ln>
+          <a:effectLst/>
+        </p:spPr>
+        <p:style>
+          <a:lnRef idx="1">
+            <a:schemeClr val="accent1"/>
+          </a:lnRef>
+          <a:fillRef idx="3">
+            <a:schemeClr val="accent1"/>
+          </a:fillRef>
+          <a:effectRef idx="2">
+            <a:schemeClr val="accent1"/>
+          </a:effectRef>
+          <a:fontRef idx="minor">
+            <a:schemeClr val="lt1"/>
+          </a:fontRef>
+        </p:style>
+        <p:txBody>
+          <a:bodyPr rtlCol="0" anchor="ctr"/>
+          <a:lstStyle/>
+          <a:p>
+            <a:pPr algn="ctr"/>
+          </a:p>
+        </p:txBody>
+      </p:sp>
+      <p:sp>
+        <p:nvSpPr>
+          <p:cNvPr id="9" name="TextBox 8"/>
+          <p:cNvSpPr txBox="1"/>
+          <p:nvPr/>
+        </p:nvSpPr>
+        <p:spPr>
+          <a:xfrm>
+            <a:off x="960120" y="2916936"/>
+            <a:ext cx="10424160" cy="841248"/>
+          </a:xfrm>
+          <a:prstGeom prst="rect">
+            <a:avLst/>
+          </a:prstGeom>
+          <a:noFill/>
+        </p:spPr>
+        <p:txBody>
+          <a:bodyPr wrap="square" anchor="ctr" lIns="0" rIns="0" tIns="0" bIns="0">
+            <a:spAutoFit/>
+          </a:bodyPr>
+          <a:lstStyle/>
+          <a:p>
+            <a:pPr>
+              <a:lnSpc>
+                <a:spcPct val="100000"/>
+              </a:lnSpc>
+            </a:pPr>
+            <a:r>
+              <a:rPr sz="1700" b="0" i="0">
+                <a:solidFill>
+                  <a:srgbClr val="2A2929"/>
+                </a:solidFill>
+                <a:latin typeface="Roboto"/>
+              </a:rPr>
+              <a:t>Feedback answered with reasons; the decision recorded.</a:t>
+            </a:r>
+          </a:p>
+        </p:txBody>
+      </p:sp>
+      <p:sp>
+        <p:nvSpPr>
+          <p:cNvPr id="10" name="Rectangle 9"/>
+          <p:cNvSpPr/>
+          <p:nvPr/>
+        </p:nvSpPr>
+        <p:spPr>
+          <a:xfrm>
+            <a:off x="0" y="6565392"/>
+            <a:ext cx="12191695" cy="38100"/>
+          </a:xfrm>
+          <a:prstGeom prst="rect">
+            <a:avLst/>
+          </a:prstGeom>
+          <a:solidFill>
+            <a:srgbClr val="205F61"/>
+          </a:solidFill>
+          <a:ln>
+            <a:noFill/>
+          </a:ln>
+          <a:effectLst/>
+        </p:spPr>
+        <p:style>
+          <a:lnRef idx="1">
+            <a:schemeClr val="accent1"/>
+          </a:lnRef>
+          <a:fillRef idx="3">
+            <a:schemeClr val="accent1"/>
+          </a:fillRef>
+          <a:effectRef idx="2">
+            <a:schemeClr val="accent1"/>
+          </a:effectRef>
+          <a:fontRef idx="minor">
+            <a:schemeClr val="lt1"/>
+          </a:fontRef>
+        </p:style>
+        <p:txBody>
+          <a:bodyPr rtlCol="0" anchor="ctr"/>
+          <a:lstStyle/>
+          <a:p>
+            <a:pPr algn="ctr"/>
+          </a:p>
+        </p:txBody>
+      </p:sp>
+      <p:sp>
+        <p:nvSpPr>
+          <p:cNvPr id="11" name="TextBox 10"/>
+          <p:cNvSpPr txBox="1"/>
+          <p:nvPr/>
+        </p:nvSpPr>
+        <p:spPr>
+          <a:xfrm>
+            <a:off x="502920" y="6400800"/>
+            <a:ext cx="5486400" cy="320040"/>
+          </a:xfrm>
+          <a:prstGeom prst="rect">
+            <a:avLst/>
+          </a:prstGeom>
+          <a:noFill/>
+        </p:spPr>
+        <p:txBody>
+          <a:bodyPr wrap="square" anchor="t" lIns="0" rIns="0" tIns="0" bIns="0">
+            <a:spAutoFit/>
+          </a:bodyPr>
+          <a:lstStyle/>
+          <a:p>
+            <a:r>
+              <a:rPr sz="1100" b="1" i="0">
+                <a:solidFill>
+                  <a:srgbClr val="2A2929"/>
+                </a:solidFill>
+                <a:latin typeface="Roboto"/>
+              </a:rPr>
+              <a:t>Kangan </a:t>
+            </a:r>
+            <a:r>
+              <a:rPr sz="1100" b="1" i="0">
+                <a:solidFill>
+                  <a:srgbClr val="D68E10"/>
+                </a:solidFill>
+                <a:latin typeface="Roboto"/>
+              </a:rPr>
+              <a:t>Institute</a:t>
+            </a:r>
+          </a:p>
+        </p:txBody>
+      </p:sp>
+      <p:sp>
+        <p:nvSpPr>
+          <p:cNvPr id="12" name="TextBox 11"/>
+          <p:cNvSpPr txBox="1"/>
+          <p:nvPr/>
+        </p:nvSpPr>
+        <p:spPr>
+          <a:xfrm>
+            <a:off x="10515600" y="6400800"/>
+            <a:ext cx="1188720" cy="320040"/>
+          </a:xfrm>
+          <a:prstGeom prst="rect">
+            <a:avLst/>
+          </a:prstGeom>
+          <a:noFill/>
+        </p:spPr>
+        <p:txBody>
+          <a:bodyPr wrap="square" anchor="t" lIns="0" rIns="0" tIns="0" bIns="0">
+            <a:spAutoFit/>
+          </a:bodyPr>
+          <a:lstStyle/>
+          <a:p>
+            <a:pPr algn="r"/>
+            <a:r>
+              <a:rPr sz="1100" b="0" i="0">
+                <a:solidFill>
+                  <a:srgbClr val="7A7A7A"/>
+                </a:solidFill>
+                <a:latin typeface="Roboto"/>
+              </a:rPr>
+              <a:t>12</a:t>
+            </a:r>
+          </a:p>
+        </p:txBody>
+      </p:sp>
+    </p:spTree>
+  </p:cSld>
+  <p:clrMapOvr>
+    <a:masterClrMapping/>
+  </p:clrMapOvr>
+</p:sld>
+</file>
+
+<file path=ppt/slides/slide17.xml><?xml version="1.0" encoding="utf-8"?>
+<p:sld xmlns:a="http://schemas.openxmlformats.org/drawingml/2006/main" xmlns:p="http://schemas.openxmlformats.org/presentationml/2006/main" xmlns:r="http://schemas.openxmlformats.org/officeDocument/2006/relationships">
+  <p:cSld>
+    <p:bg>
+      <p:bgPr>
+        <a:solidFill>
+          <a:srgbClr val="FFFFFF"/>
+        </a:solidFill>
+        <a:effectLst/>
+      </p:bgPr>
+    </p:bg>
+    <p:spTree>
+      <p:nvGrpSpPr>
+        <p:cNvPr id="1" name=""/>
+        <p:cNvGrpSpPr/>
+        <p:nvPr/>
+      </p:nvGrpSpPr>
+      <p:grpSpPr/>
+      <p:sp>
+        <p:nvSpPr>
+          <p:cNvPr id="2" name="Rectangle 1"/>
+          <p:cNvSpPr/>
+          <p:nvPr/>
+        </p:nvSpPr>
+        <p:spPr>
+          <a:xfrm>
+            <a:off x="0" y="0"/>
+            <a:ext cx="3931920" cy="6858000"/>
+          </a:xfrm>
+          <a:prstGeom prst="rect">
+            <a:avLst/>
+          </a:prstGeom>
+          <a:solidFill>
+            <a:srgbClr val="004488"/>
+          </a:solidFill>
+          <a:ln>
+            <a:noFill/>
+          </a:ln>
+          <a:effectLst/>
+        </p:spPr>
+        <p:style>
+          <a:lnRef idx="1">
+            <a:schemeClr val="accent1"/>
+          </a:lnRef>
+          <a:fillRef idx="3">
+            <a:schemeClr val="accent1"/>
+          </a:fillRef>
+          <a:effectRef idx="2">
+            <a:schemeClr val="accent1"/>
+          </a:effectRef>
+          <a:fontRef idx="minor">
+            <a:schemeClr val="lt1"/>
+          </a:fontRef>
+        </p:style>
+        <p:txBody>
+          <a:bodyPr rtlCol="0" anchor="ctr"/>
+          <a:lstStyle/>
+          <a:p>
+            <a:pPr algn="ctr"/>
+          </a:p>
+        </p:txBody>
+      </p:sp>
+      <p:sp>
+        <p:nvSpPr>
+          <p:cNvPr id="3" name="TextBox 2"/>
+          <p:cNvSpPr txBox="1"/>
+          <p:nvPr/>
+        </p:nvSpPr>
+        <p:spPr>
+          <a:xfrm>
+            <a:off x="365760" y="2103120"/>
+            <a:ext cx="3291840" cy="2194560"/>
+          </a:xfrm>
+          <a:prstGeom prst="rect">
+            <a:avLst/>
+          </a:prstGeom>
+          <a:noFill/>
+        </p:spPr>
+        <p:txBody>
+          <a:bodyPr wrap="square" anchor="t" lIns="0" rIns="0" tIns="0" bIns="0">
+            <a:spAutoFit/>
+          </a:bodyPr>
+          <a:lstStyle/>
+          <a:p>
+            <a:r>
+              <a:rPr sz="13000" b="1" i="0">
+                <a:solidFill>
+                  <a:srgbClr val="FFFFFF"/>
+                </a:solidFill>
+                <a:latin typeface="Roboto"/>
+              </a:rPr>
+              <a:t>04</a:t>
+            </a:r>
+          </a:p>
+        </p:txBody>
+      </p:sp>
+      <p:sp>
+        <p:nvSpPr>
+          <p:cNvPr id="4" name="TextBox 3"/>
+          <p:cNvSpPr txBox="1"/>
+          <p:nvPr/>
+        </p:nvSpPr>
+        <p:spPr>
+          <a:xfrm>
+            <a:off x="4480560" y="2468880"/>
+            <a:ext cx="7132320" cy="2194560"/>
+          </a:xfrm>
+          <a:prstGeom prst="rect">
+            <a:avLst/>
+          </a:prstGeom>
+          <a:noFill/>
+        </p:spPr>
+        <p:txBody>
+          <a:bodyPr wrap="square" anchor="t" lIns="0" rIns="0" tIns="0" bIns="0">
+            <a:spAutoFit/>
+          </a:bodyPr>
+          <a:lstStyle/>
+          <a:p>
+            <a:r>
+              <a:rPr sz="1600" b="1" i="0">
+                <a:solidFill>
+                  <a:srgbClr val="004488"/>
+                </a:solidFill>
+                <a:latin typeface="Roboto"/>
+              </a:rPr>
+              <a:t>SECTION</a:t>
+            </a:r>
+          </a:p>
+          <a:p>
+            <a:pPr>
+              <a:spcBef>
+                <a:spcPts val="600"/>
+              </a:spcBef>
+            </a:pPr>
+            <a:r>
+              <a:rPr sz="3800" b="1" i="0">
+                <a:solidFill>
+                  <a:srgbClr val="2A2929"/>
+                </a:solidFill>
+                <a:latin typeface="Roboto"/>
+              </a:rPr>
+              <a:t>The written questions</a:t>
+            </a:r>
+          </a:p>
+          <a:p>
+            <a:pPr>
+              <a:spcBef>
+                <a:spcPts val="1000"/>
+              </a:spcBef>
+            </a:pPr>
+            <a:r>
+              <a:rPr sz="2000" b="0" i="1">
+                <a:solidFill>
+                  <a:srgbClr val="484848"/>
                 </a:solidFill>
                 <a:latin typeface="Roboto Light"/>
               </a:rPr>
-              <a:t>You package Topics 6–9 into the Deployment Report and its KE appendix.</a:t>
+              <a:t>your build, in your words</a:t>
+            </a:r>
+          </a:p>
+        </p:txBody>
+      </p:sp>
+      <p:sp>
+        <p:nvSpPr>
+          <p:cNvPr id="5" name="Rectangle 4"/>
+          <p:cNvSpPr/>
+          <p:nvPr/>
+        </p:nvSpPr>
+        <p:spPr>
+          <a:xfrm>
+            <a:off x="0" y="6565392"/>
+            <a:ext cx="12191695" cy="38100"/>
+          </a:xfrm>
+          <a:prstGeom prst="rect">
+            <a:avLst/>
+          </a:prstGeom>
+          <a:solidFill>
+            <a:srgbClr val="004488"/>
+          </a:solidFill>
+          <a:ln>
+            <a:noFill/>
+          </a:ln>
+          <a:effectLst/>
+        </p:spPr>
+        <p:style>
+          <a:lnRef idx="1">
+            <a:schemeClr val="accent1"/>
+          </a:lnRef>
+          <a:fillRef idx="3">
+            <a:schemeClr val="accent1"/>
+          </a:fillRef>
+          <a:effectRef idx="2">
+            <a:schemeClr val="accent1"/>
+          </a:effectRef>
+          <a:fontRef idx="minor">
+            <a:schemeClr val="lt1"/>
+          </a:fontRef>
+        </p:style>
+        <p:txBody>
+          <a:bodyPr rtlCol="0" anchor="ctr"/>
+          <a:lstStyle/>
+          <a:p>
+            <a:pPr algn="ctr"/>
+          </a:p>
+        </p:txBody>
+      </p:sp>
+      <p:sp>
+        <p:nvSpPr>
+          <p:cNvPr id="6" name="TextBox 5"/>
+          <p:cNvSpPr txBox="1"/>
+          <p:nvPr/>
+        </p:nvSpPr>
+        <p:spPr>
+          <a:xfrm>
+            <a:off x="502920" y="6400800"/>
+            <a:ext cx="5486400" cy="320040"/>
+          </a:xfrm>
+          <a:prstGeom prst="rect">
+            <a:avLst/>
+          </a:prstGeom>
+          <a:noFill/>
+        </p:spPr>
+        <p:txBody>
+          <a:bodyPr wrap="square" anchor="t" lIns="0" rIns="0" tIns="0" bIns="0">
+            <a:spAutoFit/>
+          </a:bodyPr>
+          <a:lstStyle/>
+          <a:p>
+            <a:r>
+              <a:rPr sz="1100" b="1" i="0">
+                <a:solidFill>
+                  <a:srgbClr val="2A2929"/>
+                </a:solidFill>
+                <a:latin typeface="Roboto"/>
+              </a:rPr>
+              <a:t>Kangan </a:t>
+            </a:r>
+            <a:r>
+              <a:rPr sz="1100" b="1" i="0">
+                <a:solidFill>
+                  <a:srgbClr val="D68E10"/>
+                </a:solidFill>
+                <a:latin typeface="Roboto"/>
+              </a:rPr>
+              <a:t>Institute</a:t>
+            </a:r>
+          </a:p>
+        </p:txBody>
+      </p:sp>
+      <p:sp>
+        <p:nvSpPr>
+          <p:cNvPr id="7" name="TextBox 6"/>
+          <p:cNvSpPr txBox="1"/>
+          <p:nvPr/>
+        </p:nvSpPr>
+        <p:spPr>
+          <a:xfrm>
+            <a:off x="10515600" y="6400800"/>
+            <a:ext cx="1188720" cy="320040"/>
+          </a:xfrm>
+          <a:prstGeom prst="rect">
+            <a:avLst/>
+          </a:prstGeom>
+          <a:noFill/>
+        </p:spPr>
+        <p:txBody>
+          <a:bodyPr wrap="square" anchor="t" lIns="0" rIns="0" tIns="0" bIns="0">
+            <a:spAutoFit/>
+          </a:bodyPr>
+          <a:lstStyle/>
+          <a:p>
+            <a:pPr algn="r"/>
+            <a:r>
+              <a:rPr sz="1100" b="0" i="0">
+                <a:solidFill>
+                  <a:srgbClr val="7A7A7A"/>
+                </a:solidFill>
+                <a:latin typeface="Roboto"/>
+              </a:rPr>
+              <a:t/>
+            </a:r>
+          </a:p>
+        </p:txBody>
+      </p:sp>
+    </p:spTree>
+  </p:cSld>
+  <p:clrMapOvr>
+    <a:masterClrMapping/>
+  </p:clrMapOvr>
+</p:sld>
+</file>
+
+<file path=ppt/slides/slide18.xml><?xml version="1.0" encoding="utf-8"?>
+<p:sld xmlns:a="http://schemas.openxmlformats.org/drawingml/2006/main" xmlns:p="http://schemas.openxmlformats.org/presentationml/2006/main" xmlns:r="http://schemas.openxmlformats.org/officeDocument/2006/relationships">
+  <p:cSld>
+    <p:bg>
+      <p:bgPr>
+        <a:solidFill>
+          <a:srgbClr val="FFFFFF"/>
+        </a:solidFill>
+        <a:effectLst/>
+      </p:bgPr>
+    </p:bg>
+    <p:spTree>
+      <p:nvGrpSpPr>
+        <p:cNvPr id="1" name=""/>
+        <p:cNvGrpSpPr/>
+        <p:nvPr/>
+      </p:nvGrpSpPr>
+      <p:grpSpPr/>
+      <p:sp>
+        <p:nvSpPr>
+          <p:cNvPr id="2" name="TextBox 1"/>
+          <p:cNvSpPr txBox="1"/>
+          <p:nvPr/>
+        </p:nvSpPr>
+        <p:spPr>
+          <a:xfrm>
+            <a:off x="640080" y="457200"/>
+            <a:ext cx="10881360" cy="960120"/>
+          </a:xfrm>
+          <a:prstGeom prst="rect">
+            <a:avLst/>
+          </a:prstGeom>
+          <a:noFill/>
+        </p:spPr>
+        <p:txBody>
+          <a:bodyPr wrap="square" anchor="t" lIns="0" rIns="0" tIns="0" bIns="0">
+            <a:spAutoFit/>
+          </a:bodyPr>
+          <a:lstStyle/>
+          <a:p>
+            <a:r>
+              <a:rPr sz="2800" b="1" i="0">
+                <a:solidFill>
+                  <a:srgbClr val="2A2929"/>
+                </a:solidFill>
+                <a:latin typeface="Roboto"/>
+              </a:rPr>
+              <a:t>The questions ask about your own build</a:t>
+            </a:r>
+          </a:p>
+        </p:txBody>
+      </p:sp>
+      <p:sp>
+        <p:nvSpPr>
+          <p:cNvPr id="3" name="Rectangle 2"/>
+          <p:cNvSpPr/>
+          <p:nvPr/>
+        </p:nvSpPr>
+        <p:spPr>
+          <a:xfrm>
+            <a:off x="658368" y="1371600"/>
+            <a:ext cx="1463040" cy="50800"/>
+          </a:xfrm>
+          <a:prstGeom prst="rect">
+            <a:avLst/>
+          </a:prstGeom>
+          <a:solidFill>
+            <a:srgbClr val="004488"/>
+          </a:solidFill>
+          <a:ln>
+            <a:noFill/>
+          </a:ln>
+          <a:effectLst/>
+        </p:spPr>
+        <p:style>
+          <a:lnRef idx="1">
+            <a:schemeClr val="accent1"/>
+          </a:lnRef>
+          <a:fillRef idx="3">
+            <a:schemeClr val="accent1"/>
+          </a:fillRef>
+          <a:effectRef idx="2">
+            <a:schemeClr val="accent1"/>
+          </a:effectRef>
+          <a:fontRef idx="minor">
+            <a:schemeClr val="lt1"/>
+          </a:fontRef>
+        </p:style>
+        <p:txBody>
+          <a:bodyPr rtlCol="0" anchor="ctr"/>
+          <a:lstStyle/>
+          <a:p>
+            <a:pPr algn="ctr"/>
+          </a:p>
+        </p:txBody>
+      </p:sp>
+      <p:sp>
+        <p:nvSpPr>
+          <p:cNvPr id="4" name="TextBox 3"/>
+          <p:cNvSpPr txBox="1"/>
+          <p:nvPr/>
+        </p:nvSpPr>
+        <p:spPr>
+          <a:xfrm>
+            <a:off x="658368" y="1691640"/>
+            <a:ext cx="10881360" cy="4480560"/>
+          </a:xfrm>
+          <a:prstGeom prst="rect">
+            <a:avLst/>
+          </a:prstGeom>
+          <a:noFill/>
+        </p:spPr>
+        <p:txBody>
+          <a:bodyPr wrap="square" anchor="ctr" lIns="0" rIns="0" tIns="0" bIns="0">
+            <a:spAutoFit/>
+          </a:bodyPr>
+          <a:lstStyle/>
+          <a:p>
+            <a:pPr marL="0" indent="0">
+              <a:lnSpc>
+                <a:spcPct val="105000"/>
+              </a:lnSpc>
+              <a:spcBef>
+                <a:spcPts val="0"/>
+              </a:spcBef>
+              <a:spcAft>
+                <a:spcPts val="1000"/>
+              </a:spcAft>
+            </a:pPr>
+            <a:r>
+              <a:rPr sz="2400" b="1" i="0">
+                <a:solidFill>
+                  <a:srgbClr val="EDAB0C"/>
+                </a:solidFill>
+                <a:latin typeface="Roboto"/>
+              </a:rPr>
+              <a:t>■  </a:t>
+            </a:r>
+            <a:r>
+              <a:rPr sz="2400" b="0" i="0">
+                <a:solidFill>
+                  <a:srgbClr val="2A2929"/>
+                </a:solidFill>
+                <a:latin typeface="Roboto"/>
+              </a:rPr>
+              <a:t>Three questions: the standards and standard products your build relies on, how you tested and debugged, and how you'd manage the templates over time.</a:t>
+            </a:r>
+          </a:p>
+          <a:p>
+            <a:pPr marL="0" indent="0">
+              <a:lnSpc>
+                <a:spcPct val="105000"/>
+              </a:lnSpc>
+              <a:spcBef>
+                <a:spcPts val="0"/>
+              </a:spcBef>
+              <a:spcAft>
+                <a:spcPts val="1000"/>
+              </a:spcAft>
+            </a:pPr>
+            <a:r>
+              <a:rPr sz="2400" b="1" i="0">
+                <a:solidFill>
+                  <a:srgbClr val="EDAB0C"/>
+                </a:solidFill>
+                <a:latin typeface="Roboto"/>
+              </a:rPr>
+              <a:t>■  </a:t>
+            </a:r>
+            <a:r>
+              <a:rPr sz="2400" b="0" i="0">
+                <a:solidFill>
+                  <a:srgbClr val="2A2929"/>
+                </a:solidFill>
+                <a:latin typeface="Roboto"/>
+              </a:rPr>
+              <a:t>Every answer cites your own work — your template, your tests, your fixes, your change sets.</a:t>
+            </a:r>
+          </a:p>
+          <a:p>
+            <a:pPr marL="0" indent="0">
+              <a:lnSpc>
+                <a:spcPct val="105000"/>
+              </a:lnSpc>
+              <a:spcBef>
+                <a:spcPts val="0"/>
+              </a:spcBef>
+              <a:spcAft>
+                <a:spcPts val="1000"/>
+              </a:spcAft>
+            </a:pPr>
+            <a:r>
+              <a:rPr sz="2400" b="1" i="0">
+                <a:solidFill>
+                  <a:srgbClr val="EDAB0C"/>
+                </a:solidFill>
+                <a:latin typeface="Roboto"/>
+              </a:rPr>
+              <a:t>■  </a:t>
+            </a:r>
+            <a:r>
+              <a:rPr sz="2400" b="0" i="0">
+                <a:solidFill>
+                  <a:srgbClr val="2A2929"/>
+                </a:solidFill>
+                <a:latin typeface="Roboto"/>
+              </a:rPr>
+              <a:t>A definition with nothing of your build in it answers nothing.</a:t>
+            </a:r>
+          </a:p>
+        </p:txBody>
+      </p:sp>
+      <p:sp>
+        <p:nvSpPr>
+          <p:cNvPr id="5" name="Rectangle 4"/>
+          <p:cNvSpPr/>
+          <p:nvPr/>
+        </p:nvSpPr>
+        <p:spPr>
+          <a:xfrm>
+            <a:off x="0" y="6565392"/>
+            <a:ext cx="12191695" cy="38100"/>
+          </a:xfrm>
+          <a:prstGeom prst="rect">
+            <a:avLst/>
+          </a:prstGeom>
+          <a:solidFill>
+            <a:srgbClr val="004488"/>
+          </a:solidFill>
+          <a:ln>
+            <a:noFill/>
+          </a:ln>
+          <a:effectLst/>
+        </p:spPr>
+        <p:style>
+          <a:lnRef idx="1">
+            <a:schemeClr val="accent1"/>
+          </a:lnRef>
+          <a:fillRef idx="3">
+            <a:schemeClr val="accent1"/>
+          </a:fillRef>
+          <a:effectRef idx="2">
+            <a:schemeClr val="accent1"/>
+          </a:effectRef>
+          <a:fontRef idx="minor">
+            <a:schemeClr val="lt1"/>
+          </a:fontRef>
+        </p:style>
+        <p:txBody>
+          <a:bodyPr rtlCol="0" anchor="ctr"/>
+          <a:lstStyle/>
+          <a:p>
+            <a:pPr algn="ctr"/>
+          </a:p>
+        </p:txBody>
+      </p:sp>
+      <p:sp>
+        <p:nvSpPr>
+          <p:cNvPr id="6" name="TextBox 5"/>
+          <p:cNvSpPr txBox="1"/>
+          <p:nvPr/>
+        </p:nvSpPr>
+        <p:spPr>
+          <a:xfrm>
+            <a:off x="502920" y="6400800"/>
+            <a:ext cx="5486400" cy="320040"/>
+          </a:xfrm>
+          <a:prstGeom prst="rect">
+            <a:avLst/>
+          </a:prstGeom>
+          <a:noFill/>
+        </p:spPr>
+        <p:txBody>
+          <a:bodyPr wrap="square" anchor="t" lIns="0" rIns="0" tIns="0" bIns="0">
+            <a:spAutoFit/>
+          </a:bodyPr>
+          <a:lstStyle/>
+          <a:p>
+            <a:r>
+              <a:rPr sz="1100" b="1" i="0">
+                <a:solidFill>
+                  <a:srgbClr val="2A2929"/>
+                </a:solidFill>
+                <a:latin typeface="Roboto"/>
+              </a:rPr>
+              <a:t>Kangan </a:t>
+            </a:r>
+            <a:r>
+              <a:rPr sz="1100" b="1" i="0">
+                <a:solidFill>
+                  <a:srgbClr val="D68E10"/>
+                </a:solidFill>
+                <a:latin typeface="Roboto"/>
+              </a:rPr>
+              <a:t>Institute</a:t>
+            </a:r>
+          </a:p>
+        </p:txBody>
+      </p:sp>
+      <p:sp>
+        <p:nvSpPr>
+          <p:cNvPr id="7" name="TextBox 6"/>
+          <p:cNvSpPr txBox="1"/>
+          <p:nvPr/>
+        </p:nvSpPr>
+        <p:spPr>
+          <a:xfrm>
+            <a:off x="10515600" y="6400800"/>
+            <a:ext cx="1188720" cy="320040"/>
+          </a:xfrm>
+          <a:prstGeom prst="rect">
+            <a:avLst/>
+          </a:prstGeom>
+          <a:noFill/>
+        </p:spPr>
+        <p:txBody>
+          <a:bodyPr wrap="square" anchor="t" lIns="0" rIns="0" tIns="0" bIns="0">
+            <a:spAutoFit/>
+          </a:bodyPr>
+          <a:lstStyle/>
+          <a:p>
+            <a:pPr algn="r"/>
+            <a:r>
+              <a:rPr sz="1100" b="0" i="0">
+                <a:solidFill>
+                  <a:srgbClr val="7A7A7A"/>
+                </a:solidFill>
+                <a:latin typeface="Roboto"/>
+              </a:rPr>
+              <a:t>13</a:t>
+            </a:r>
+          </a:p>
+        </p:txBody>
+      </p:sp>
+    </p:spTree>
+  </p:cSld>
+  <p:clrMapOvr>
+    <a:masterClrMapping/>
+  </p:clrMapOvr>
+</p:sld>
+</file>
+
+<file path=ppt/slides/slide19.xml><?xml version="1.0" encoding="utf-8"?>
+<p:sld xmlns:a="http://schemas.openxmlformats.org/drawingml/2006/main" xmlns:p="http://schemas.openxmlformats.org/presentationml/2006/main" xmlns:r="http://schemas.openxmlformats.org/officeDocument/2006/relationships">
+  <p:cSld>
+    <p:bg>
+      <p:bgPr>
+        <a:solidFill>
+          <a:srgbClr val="FFFFFF"/>
+        </a:solidFill>
+        <a:effectLst/>
+      </p:bgPr>
+    </p:bg>
+    <p:spTree>
+      <p:nvGrpSpPr>
+        <p:cNvPr id="1" name=""/>
+        <p:cNvGrpSpPr/>
+        <p:nvPr/>
+      </p:nvGrpSpPr>
+      <p:grpSpPr/>
+      <p:sp>
+        <p:nvSpPr>
+          <p:cNvPr id="2" name="Rectangle 1"/>
+          <p:cNvSpPr/>
+          <p:nvPr/>
+        </p:nvSpPr>
+        <p:spPr>
+          <a:xfrm>
+            <a:off x="0" y="0"/>
+            <a:ext cx="12191695" cy="1234440"/>
+          </a:xfrm>
+          <a:prstGeom prst="rect">
+            <a:avLst/>
+          </a:prstGeom>
+          <a:solidFill>
+            <a:srgbClr val="004488"/>
+          </a:solidFill>
+          <a:ln>
+            <a:noFill/>
+          </a:ln>
+          <a:effectLst/>
+        </p:spPr>
+        <p:style>
+          <a:lnRef idx="1">
+            <a:schemeClr val="accent1"/>
+          </a:lnRef>
+          <a:fillRef idx="3">
+            <a:schemeClr val="accent1"/>
+          </a:fillRef>
+          <a:effectRef idx="2">
+            <a:schemeClr val="accent1"/>
+          </a:effectRef>
+          <a:fontRef idx="minor">
+            <a:schemeClr val="lt1"/>
+          </a:fontRef>
+        </p:style>
+        <p:txBody>
+          <a:bodyPr rtlCol="0" anchor="ctr"/>
+          <a:lstStyle/>
+          <a:p>
+            <a:pPr algn="ctr"/>
+          </a:p>
+        </p:txBody>
+      </p:sp>
+      <p:sp>
+        <p:nvSpPr>
+          <p:cNvPr id="3" name="Rounded Rectangle 2"/>
+          <p:cNvSpPr/>
+          <p:nvPr/>
+        </p:nvSpPr>
+        <p:spPr>
+          <a:xfrm>
+            <a:off x="640080" y="384048"/>
+            <a:ext cx="1691640" cy="457200"/>
+          </a:xfrm>
+          <a:prstGeom prst="roundRect">
+            <a:avLst/>
+          </a:prstGeom>
+          <a:solidFill>
+            <a:srgbClr val="2A2929"/>
+          </a:solidFill>
+          <a:ln>
+            <a:noFill/>
+          </a:ln>
+          <a:effectLst/>
+        </p:spPr>
+        <p:style>
+          <a:lnRef idx="1">
+            <a:schemeClr val="accent1"/>
+          </a:lnRef>
+          <a:fillRef idx="3">
+            <a:schemeClr val="accent1"/>
+          </a:fillRef>
+          <a:effectRef idx="2">
+            <a:schemeClr val="accent1"/>
+          </a:effectRef>
+          <a:fontRef idx="minor">
+            <a:schemeClr val="lt1"/>
+          </a:fontRef>
+        </p:style>
+        <p:txBody>
+          <a:bodyPr rtlCol="0" anchor="ctr"/>
+          <a:lstStyle/>
+          <a:p>
+            <a:pPr algn="ctr"/>
+            <a:r>
+              <a:rPr sz="1400" b="1" i="0">
+                <a:solidFill>
+                  <a:srgbClr val="FBB900"/>
+                </a:solidFill>
+                <a:latin typeface="Roboto"/>
+              </a:rPr>
+              <a:t>ACTIVITY</a:t>
+            </a:r>
+          </a:p>
+        </p:txBody>
+      </p:sp>
+      <p:sp>
+        <p:nvSpPr>
+          <p:cNvPr id="4" name="TextBox 3"/>
+          <p:cNvSpPr txBox="1"/>
+          <p:nvPr/>
+        </p:nvSpPr>
+        <p:spPr>
+          <a:xfrm>
+            <a:off x="2560320" y="310896"/>
+            <a:ext cx="8961120" cy="685800"/>
+          </a:xfrm>
+          <a:prstGeom prst="rect">
+            <a:avLst/>
+          </a:prstGeom>
+          <a:noFill/>
+        </p:spPr>
+        <p:txBody>
+          <a:bodyPr wrap="square" anchor="ctr" lIns="0" rIns="0" tIns="0" bIns="0">
+            <a:spAutoFit/>
+          </a:bodyPr>
+          <a:lstStyle/>
+          <a:p>
+            <a:r>
+              <a:rPr sz="2600" b="1" i="0">
+                <a:solidFill>
+                  <a:srgbClr val="FFFFFF"/>
+                </a:solidFill>
+                <a:latin typeface="Roboto"/>
+              </a:rPr>
+              <a:t>Answer the questions</a:t>
+            </a:r>
+          </a:p>
+        </p:txBody>
+      </p:sp>
+      <p:sp>
+        <p:nvSpPr>
+          <p:cNvPr id="5" name="TextBox 4"/>
+          <p:cNvSpPr txBox="1"/>
+          <p:nvPr/>
+        </p:nvSpPr>
+        <p:spPr>
+          <a:xfrm>
+            <a:off x="658368" y="1554480"/>
+            <a:ext cx="10881360" cy="4297680"/>
+          </a:xfrm>
+          <a:prstGeom prst="rect">
+            <a:avLst/>
+          </a:prstGeom>
+          <a:noFill/>
+        </p:spPr>
+        <p:txBody>
+          <a:bodyPr wrap="square" anchor="t" lIns="0" rIns="0" tIns="0" bIns="0">
+            <a:spAutoFit/>
+          </a:bodyPr>
+          <a:lstStyle/>
+          <a:p>
+            <a:pPr marL="0" indent="0">
+              <a:lnSpc>
+                <a:spcPct val="105000"/>
+              </a:lnSpc>
+              <a:spcBef>
+                <a:spcPts val="0"/>
+              </a:spcBef>
+              <a:spcAft>
+                <a:spcPts val="1000"/>
+              </a:spcAft>
+            </a:pPr>
+            <a:r>
+              <a:rPr sz="1700" b="1" i="0">
+                <a:solidFill>
+                  <a:srgbClr val="EDAB0C"/>
+                </a:solidFill>
+                <a:latin typeface="Roboto"/>
+              </a:rPr>
+              <a:t>■  </a:t>
+            </a:r>
+            <a:r>
+              <a:rPr sz="1700" b="0" i="0">
+                <a:solidFill>
+                  <a:srgbClr val="2A2929"/>
+                </a:solidFill>
+                <a:latin typeface="Roboto"/>
+              </a:rPr>
+              <a:t>The assessment's questions Q1 to Q3, rehearsed from your practice build.</a:t>
+            </a:r>
+          </a:p>
+          <a:p>
+            <a:pPr marL="0" indent="0">
+              <a:lnSpc>
+                <a:spcPct val="105000"/>
+              </a:lnSpc>
+              <a:spcBef>
+                <a:spcPts val="0"/>
+              </a:spcBef>
+              <a:spcAft>
+                <a:spcPts val="1000"/>
+              </a:spcAft>
+            </a:pPr>
+            <a:r>
+              <a:rPr sz="1700" b="1" i="0">
+                <a:solidFill>
+                  <a:srgbClr val="EDAB0C"/>
+                </a:solidFill>
+                <a:latin typeface="Roboto"/>
+              </a:rPr>
+              <a:t>■  </a:t>
+            </a:r>
+            <a:r>
+              <a:rPr sz="1700" b="0" i="0">
+                <a:solidFill>
+                  <a:srgbClr val="2A2929"/>
+                </a:solidFill>
+                <a:latin typeface="Roboto"/>
+              </a:rPr>
+              <a:t>Answer each from what you actually did — the standards you relied on, the testing you ran, the way your templates would be managed.</a:t>
+            </a:r>
+          </a:p>
+        </p:txBody>
+      </p:sp>
+      <p:sp>
+        <p:nvSpPr>
+          <p:cNvPr id="6" name="Rounded Rectangle 5"/>
+          <p:cNvSpPr/>
+          <p:nvPr/>
+        </p:nvSpPr>
+        <p:spPr>
+          <a:xfrm>
+            <a:off x="640080" y="5897880"/>
+            <a:ext cx="4023360" cy="457200"/>
+          </a:xfrm>
+          <a:prstGeom prst="roundRect">
+            <a:avLst/>
+          </a:prstGeom>
+          <a:solidFill>
+            <a:srgbClr val="F9F9F9"/>
+          </a:solidFill>
+          <a:ln w="12700">
+            <a:solidFill>
+              <a:srgbClr val="CCCCCC"/>
+            </a:solidFill>
+          </a:ln>
+          <a:effectLst/>
+        </p:spPr>
+        <p:style>
+          <a:lnRef idx="1">
+            <a:schemeClr val="accent1"/>
+          </a:lnRef>
+          <a:fillRef idx="3">
+            <a:schemeClr val="accent1"/>
+          </a:fillRef>
+          <a:effectRef idx="2">
+            <a:schemeClr val="accent1"/>
+          </a:effectRef>
+          <a:fontRef idx="minor">
+            <a:schemeClr val="lt1"/>
+          </a:fontRef>
+        </p:style>
+        <p:txBody>
+          <a:bodyPr rtlCol="0" anchor="ctr"/>
+          <a:lstStyle/>
+          <a:p>
+            <a:pPr algn="ctr"/>
+          </a:p>
+        </p:txBody>
+      </p:sp>
+      <p:sp>
+        <p:nvSpPr>
+          <p:cNvPr id="7" name="TextBox 6"/>
+          <p:cNvSpPr txBox="1"/>
+          <p:nvPr/>
+        </p:nvSpPr>
+        <p:spPr>
+          <a:xfrm>
+            <a:off x="822960" y="5943600"/>
+            <a:ext cx="3657600" cy="365760"/>
+          </a:xfrm>
+          <a:prstGeom prst="rect">
+            <a:avLst/>
+          </a:prstGeom>
+          <a:noFill/>
+        </p:spPr>
+        <p:txBody>
+          <a:bodyPr wrap="square" anchor="ctr" lIns="0" rIns="0" tIns="0" bIns="0">
+            <a:spAutoFit/>
+          </a:bodyPr>
+          <a:lstStyle/>
+          <a:p>
+            <a:r>
+              <a:rPr sz="1500" b="1" i="0">
+                <a:solidFill>
+                  <a:srgbClr val="2A2929"/>
+                </a:solidFill>
+                <a:latin typeface="Roboto"/>
+              </a:rPr>
+              <a:t>⏱  ~25 min</a:t>
+            </a:r>
+          </a:p>
+        </p:txBody>
+      </p:sp>
+      <p:sp>
+        <p:nvSpPr>
+          <p:cNvPr id="8" name="Rectangle 7"/>
+          <p:cNvSpPr/>
+          <p:nvPr/>
+        </p:nvSpPr>
+        <p:spPr>
+          <a:xfrm>
+            <a:off x="0" y="6565392"/>
+            <a:ext cx="12191695" cy="38100"/>
+          </a:xfrm>
+          <a:prstGeom prst="rect">
+            <a:avLst/>
+          </a:prstGeom>
+          <a:solidFill>
+            <a:srgbClr val="004488"/>
+          </a:solidFill>
+          <a:ln>
+            <a:noFill/>
+          </a:ln>
+          <a:effectLst/>
+        </p:spPr>
+        <p:style>
+          <a:lnRef idx="1">
+            <a:schemeClr val="accent1"/>
+          </a:lnRef>
+          <a:fillRef idx="3">
+            <a:schemeClr val="accent1"/>
+          </a:fillRef>
+          <a:effectRef idx="2">
+            <a:schemeClr val="accent1"/>
+          </a:effectRef>
+          <a:fontRef idx="minor">
+            <a:schemeClr val="lt1"/>
+          </a:fontRef>
+        </p:style>
+        <p:txBody>
+          <a:bodyPr rtlCol="0" anchor="ctr"/>
+          <a:lstStyle/>
+          <a:p>
+            <a:pPr algn="ctr"/>
+          </a:p>
+        </p:txBody>
+      </p:sp>
+      <p:sp>
+        <p:nvSpPr>
+          <p:cNvPr id="9" name="TextBox 8"/>
+          <p:cNvSpPr txBox="1"/>
+          <p:nvPr/>
+        </p:nvSpPr>
+        <p:spPr>
+          <a:xfrm>
+            <a:off x="502920" y="6400800"/>
+            <a:ext cx="5486400" cy="320040"/>
+          </a:xfrm>
+          <a:prstGeom prst="rect">
+            <a:avLst/>
+          </a:prstGeom>
+          <a:noFill/>
+        </p:spPr>
+        <p:txBody>
+          <a:bodyPr wrap="square" anchor="t" lIns="0" rIns="0" tIns="0" bIns="0">
+            <a:spAutoFit/>
+          </a:bodyPr>
+          <a:lstStyle/>
+          <a:p>
+            <a:r>
+              <a:rPr sz="1100" b="1" i="0">
+                <a:solidFill>
+                  <a:srgbClr val="2A2929"/>
+                </a:solidFill>
+                <a:latin typeface="Roboto"/>
+              </a:rPr>
+              <a:t>Kangan </a:t>
+            </a:r>
+            <a:r>
+              <a:rPr sz="1100" b="1" i="0">
+                <a:solidFill>
+                  <a:srgbClr val="D68E10"/>
+                </a:solidFill>
+                <a:latin typeface="Roboto"/>
+              </a:rPr>
+              <a:t>Institute</a:t>
+            </a:r>
+          </a:p>
+        </p:txBody>
+      </p:sp>
+      <p:sp>
+        <p:nvSpPr>
+          <p:cNvPr id="10" name="TextBox 9"/>
+          <p:cNvSpPr txBox="1"/>
+          <p:nvPr/>
+        </p:nvSpPr>
+        <p:spPr>
+          <a:xfrm>
+            <a:off x="10515600" y="6400800"/>
+            <a:ext cx="1188720" cy="320040"/>
+          </a:xfrm>
+          <a:prstGeom prst="rect">
+            <a:avLst/>
+          </a:prstGeom>
+          <a:noFill/>
+        </p:spPr>
+        <p:txBody>
+          <a:bodyPr wrap="square" anchor="t" lIns="0" rIns="0" tIns="0" bIns="0">
+            <a:spAutoFit/>
+          </a:bodyPr>
+          <a:lstStyle/>
+          <a:p>
+            <a:pPr algn="r"/>
+            <a:r>
+              <a:rPr sz="1100" b="0" i="0">
+                <a:solidFill>
+                  <a:srgbClr val="7A7A7A"/>
+                </a:solidFill>
+                <a:latin typeface="Roboto"/>
+              </a:rPr>
+              <a:t>14</a:t>
             </a:r>
           </a:p>
         </p:txBody>
@@ -5407,7 +8441,7 @@
                 </a:solidFill>
                 <a:latin typeface="Roboto"/>
               </a:rPr>
-              <a:t>Make it observable</a:t>
+              <a:t>Closing out the build</a:t>
             </a:r>
           </a:p>
         </p:txBody>
@@ -5505,7 +8539,7 @@
                 </a:solidFill>
                 <a:latin typeface="Roboto"/>
               </a:rPr>
-              <a:t>The microservice runs (Topic 8); now you make it observable so you can see trouble coming.</a:t>
+              <a:t>The system is built, tested and observable; now it gets documented, taken down, and signed off.</a:t>
             </a:r>
           </a:p>
           <a:p>
@@ -5536,7 +8570,7 @@
                 </a:solidFill>
                 <a:latin typeface="Roboto"/>
               </a:rPr>
-              <a:t>This is the practical form of the DR plan's detection step (AT1 Topic 4) — the real CloudWatch config.</a:t>
+              <a:t>Three tasks and three questions today — the professional wrap on the whole build.</a:t>
             </a:r>
           </a:p>
           <a:p>
@@ -5567,45 +8601,14 @@
                 </a:solidFill>
                 <a:latin typeface="Roboto"/>
               </a:rPr>
-              <a:t>teach → demo → practice: watch a metric + alarm configured and fired, then do it yourself.</a:t>
-            </a:r>
-          </a:p>
-          <a:p>
-            <a:pPr marL="0" indent="0">
-              <a:lnSpc>
-                <a:spcPct val="105000"/>
-              </a:lnSpc>
-              <a:spcBef>
-                <a:spcPts val="0"/>
-              </a:spcBef>
-              <a:spcAft>
-                <a:spcPts val="1000"/>
-              </a:spcAft>
-            </a:pPr>
-            <a:r>
-              <a:rPr sz="1700" b="1" i="0">
-                <a:solidFill>
-                  <a:srgbClr val="EDAB0C"/>
-                </a:solidFill>
-                <a:latin typeface="Roboto"/>
-              </a:rPr>
-              <a:t>■  </a:t>
-            </a:r>
-            <a:r>
-              <a:rPr sz="1700" b="0" i="0">
-                <a:solidFill>
-                  <a:srgbClr val="2A2929"/>
-                </a:solidFill>
-                <a:latin typeface="Roboto"/>
-              </a:rPr>
-              <a:t>Configured in the lab (us-east-1); the metrics and alarms are the same anywhere.</a:t>
+              <a:t>Everything you captured during the build is the material — a closeout can't be reconstructed from memory.</a:t>
             </a:r>
           </a:p>
         </p:txBody>
       </p:sp>
       <p:pic>
         <p:nvPicPr>
-          <p:cNvPr id="5" name="Picture 4" descr="gen-eba8bb9e.png"/>
+          <p:cNvPr id="5" name="Picture 4" descr="gen-b030274d.png"/>
           <p:cNvPicPr>
             <a:picLocks noChangeAspect="1"/>
           </p:cNvPicPr>
@@ -5745,6 +8748,648 @@
                 <a:latin typeface="Roboto"/>
               </a:rPr>
               <a:t>1</a:t>
+            </a:r>
+          </a:p>
+        </p:txBody>
+      </p:sp>
+    </p:spTree>
+  </p:cSld>
+  <p:clrMapOvr>
+    <a:masterClrMapping/>
+  </p:clrMapOvr>
+</p:sld>
+</file>
+
+<file path=ppt/slides/slide20.xml><?xml version="1.0" encoding="utf-8"?>
+<p:sld xmlns:a="http://schemas.openxmlformats.org/drawingml/2006/main" xmlns:p="http://schemas.openxmlformats.org/presentationml/2006/main" xmlns:r="http://schemas.openxmlformats.org/officeDocument/2006/relationships">
+  <p:cSld>
+    <p:bg>
+      <p:bgPr>
+        <a:solidFill>
+          <a:srgbClr val="F9F9F9"/>
+        </a:solidFill>
+        <a:effectLst/>
+      </p:bgPr>
+    </p:bg>
+    <p:spTree>
+      <p:nvGrpSpPr>
+        <p:cNvPr id="1" name=""/>
+        <p:cNvGrpSpPr/>
+        <p:nvPr/>
+      </p:nvGrpSpPr>
+      <p:grpSpPr/>
+      <p:sp>
+        <p:nvSpPr>
+          <p:cNvPr id="2" name="TextBox 1"/>
+          <p:cNvSpPr txBox="1"/>
+          <p:nvPr/>
+        </p:nvSpPr>
+        <p:spPr>
+          <a:xfrm>
+            <a:off x="640080" y="548640"/>
+            <a:ext cx="10881360" cy="1097280"/>
+          </a:xfrm>
+          <a:prstGeom prst="rect">
+            <a:avLst/>
+          </a:prstGeom>
+          <a:noFill/>
+        </p:spPr>
+        <p:txBody>
+          <a:bodyPr wrap="square" anchor="t" lIns="0" rIns="0" tIns="0" bIns="0">
+            <a:spAutoFit/>
+          </a:bodyPr>
+          <a:lstStyle/>
+          <a:p>
+            <a:r>
+              <a:rPr sz="3200" b="1" i="0">
+                <a:solidFill>
+                  <a:srgbClr val="2A2929"/>
+                </a:solidFill>
+                <a:latin typeface="Roboto"/>
+              </a:rPr>
+              <a:t>Key takeaways</a:t>
+            </a:r>
+          </a:p>
+          <a:p>
+            <a:pPr>
+              <a:spcBef>
+                <a:spcPts val="200"/>
+              </a:spcBef>
+            </a:pPr>
+            <a:r>
+              <a:rPr sz="1800" b="1" i="0">
+                <a:solidFill>
+                  <a:srgbClr val="004488"/>
+                </a:solidFill>
+                <a:latin typeface="Roboto"/>
+              </a:rPr>
+              <a:t>Topic 9 · Key takeaways</a:t>
+            </a:r>
+          </a:p>
+        </p:txBody>
+      </p:sp>
+      <p:sp>
+        <p:nvSpPr>
+          <p:cNvPr id="3" name="Rectangle 2"/>
+          <p:cNvSpPr/>
+          <p:nvPr/>
+        </p:nvSpPr>
+        <p:spPr>
+          <a:xfrm>
+            <a:off x="658368" y="1600200"/>
+            <a:ext cx="1463040" cy="50800"/>
+          </a:xfrm>
+          <a:prstGeom prst="rect">
+            <a:avLst/>
+          </a:prstGeom>
+          <a:solidFill>
+            <a:srgbClr val="004488"/>
+          </a:solidFill>
+          <a:ln>
+            <a:noFill/>
+          </a:ln>
+          <a:effectLst/>
+        </p:spPr>
+        <p:style>
+          <a:lnRef idx="1">
+            <a:schemeClr val="accent1"/>
+          </a:lnRef>
+          <a:fillRef idx="3">
+            <a:schemeClr val="accent1"/>
+          </a:fillRef>
+          <a:effectRef idx="2">
+            <a:schemeClr val="accent1"/>
+          </a:effectRef>
+          <a:fontRef idx="minor">
+            <a:schemeClr val="lt1"/>
+          </a:fontRef>
+        </p:style>
+        <p:txBody>
+          <a:bodyPr rtlCol="0" anchor="ctr"/>
+          <a:lstStyle/>
+          <a:p>
+            <a:pPr algn="ctr"/>
+          </a:p>
+        </p:txBody>
+      </p:sp>
+      <p:sp>
+        <p:nvSpPr>
+          <p:cNvPr id="4" name="Rectangle 3"/>
+          <p:cNvSpPr/>
+          <p:nvPr/>
+        </p:nvSpPr>
+        <p:spPr>
+          <a:xfrm>
+            <a:off x="640080" y="1965960"/>
+            <a:ext cx="10927080" cy="841248"/>
+          </a:xfrm>
+          <a:prstGeom prst="rect">
+            <a:avLst/>
+          </a:prstGeom>
+          <a:solidFill>
+            <a:srgbClr val="FFFFFF"/>
+          </a:solidFill>
+          <a:ln w="12700">
+            <a:solidFill>
+              <a:srgbClr val="CCCCCC"/>
+            </a:solidFill>
+          </a:ln>
+          <a:effectLst/>
+        </p:spPr>
+        <p:style>
+          <a:lnRef idx="1">
+            <a:schemeClr val="accent1"/>
+          </a:lnRef>
+          <a:fillRef idx="3">
+            <a:schemeClr val="accent1"/>
+          </a:fillRef>
+          <a:effectRef idx="2">
+            <a:schemeClr val="accent1"/>
+          </a:effectRef>
+          <a:fontRef idx="minor">
+            <a:schemeClr val="lt1"/>
+          </a:fontRef>
+        </p:style>
+        <p:txBody>
+          <a:bodyPr rtlCol="0" anchor="ctr"/>
+          <a:lstStyle/>
+          <a:p>
+            <a:pPr algn="ctr"/>
+          </a:p>
+        </p:txBody>
+      </p:sp>
+      <p:sp>
+        <p:nvSpPr>
+          <p:cNvPr id="5" name="Rectangle 4"/>
+          <p:cNvSpPr/>
+          <p:nvPr/>
+        </p:nvSpPr>
+        <p:spPr>
+          <a:xfrm>
+            <a:off x="640080" y="1965960"/>
+            <a:ext cx="109728" cy="841248"/>
+          </a:xfrm>
+          <a:prstGeom prst="rect">
+            <a:avLst/>
+          </a:prstGeom>
+          <a:solidFill>
+            <a:srgbClr val="004488"/>
+          </a:solidFill>
+          <a:ln>
+            <a:noFill/>
+          </a:ln>
+          <a:effectLst/>
+        </p:spPr>
+        <p:style>
+          <a:lnRef idx="1">
+            <a:schemeClr val="accent1"/>
+          </a:lnRef>
+          <a:fillRef idx="3">
+            <a:schemeClr val="accent1"/>
+          </a:fillRef>
+          <a:effectRef idx="2">
+            <a:schemeClr val="accent1"/>
+          </a:effectRef>
+          <a:fontRef idx="minor">
+            <a:schemeClr val="lt1"/>
+          </a:fontRef>
+        </p:style>
+        <p:txBody>
+          <a:bodyPr rtlCol="0" anchor="ctr"/>
+          <a:lstStyle/>
+          <a:p>
+            <a:pPr algn="ctr"/>
+          </a:p>
+        </p:txBody>
+      </p:sp>
+      <p:sp>
+        <p:nvSpPr>
+          <p:cNvPr id="6" name="TextBox 5"/>
+          <p:cNvSpPr txBox="1"/>
+          <p:nvPr/>
+        </p:nvSpPr>
+        <p:spPr>
+          <a:xfrm>
+            <a:off x="960120" y="1965960"/>
+            <a:ext cx="10424160" cy="841248"/>
+          </a:xfrm>
+          <a:prstGeom prst="rect">
+            <a:avLst/>
+          </a:prstGeom>
+          <a:noFill/>
+        </p:spPr>
+        <p:txBody>
+          <a:bodyPr wrap="square" anchor="ctr" lIns="0" rIns="0" tIns="0" bIns="0">
+            <a:spAutoFit/>
+          </a:bodyPr>
+          <a:lstStyle/>
+          <a:p>
+            <a:pPr>
+              <a:lnSpc>
+                <a:spcPct val="100000"/>
+              </a:lnSpc>
+            </a:pPr>
+            <a:r>
+              <a:rPr sz="1700" b="0" i="0">
+                <a:solidFill>
+                  <a:srgbClr val="2A2929"/>
+                </a:solidFill>
+                <a:latin typeface="Roboto"/>
+              </a:rPr>
+              <a:t>Docs for the inheritor; teardown confirmed; sign-off recorded.</a:t>
+            </a:r>
+          </a:p>
+        </p:txBody>
+      </p:sp>
+      <p:sp>
+        <p:nvSpPr>
+          <p:cNvPr id="7" name="Rectangle 6"/>
+          <p:cNvSpPr/>
+          <p:nvPr/>
+        </p:nvSpPr>
+        <p:spPr>
+          <a:xfrm>
+            <a:off x="640080" y="2916936"/>
+            <a:ext cx="10927080" cy="841248"/>
+          </a:xfrm>
+          <a:prstGeom prst="rect">
+            <a:avLst/>
+          </a:prstGeom>
+          <a:solidFill>
+            <a:srgbClr val="FFFFFF"/>
+          </a:solidFill>
+          <a:ln w="12700">
+            <a:solidFill>
+              <a:srgbClr val="CCCCCC"/>
+            </a:solidFill>
+          </a:ln>
+          <a:effectLst/>
+        </p:spPr>
+        <p:style>
+          <a:lnRef idx="1">
+            <a:schemeClr val="accent1"/>
+          </a:lnRef>
+          <a:fillRef idx="3">
+            <a:schemeClr val="accent1"/>
+          </a:fillRef>
+          <a:effectRef idx="2">
+            <a:schemeClr val="accent1"/>
+          </a:effectRef>
+          <a:fontRef idx="minor">
+            <a:schemeClr val="lt1"/>
+          </a:fontRef>
+        </p:style>
+        <p:txBody>
+          <a:bodyPr rtlCol="0" anchor="ctr"/>
+          <a:lstStyle/>
+          <a:p>
+            <a:pPr algn="ctr"/>
+          </a:p>
+        </p:txBody>
+      </p:sp>
+      <p:sp>
+        <p:nvSpPr>
+          <p:cNvPr id="8" name="Rectangle 7"/>
+          <p:cNvSpPr/>
+          <p:nvPr/>
+        </p:nvSpPr>
+        <p:spPr>
+          <a:xfrm>
+            <a:off x="640080" y="2916936"/>
+            <a:ext cx="109728" cy="841248"/>
+          </a:xfrm>
+          <a:prstGeom prst="rect">
+            <a:avLst/>
+          </a:prstGeom>
+          <a:solidFill>
+            <a:srgbClr val="004488"/>
+          </a:solidFill>
+          <a:ln>
+            <a:noFill/>
+          </a:ln>
+          <a:effectLst/>
+        </p:spPr>
+        <p:style>
+          <a:lnRef idx="1">
+            <a:schemeClr val="accent1"/>
+          </a:lnRef>
+          <a:fillRef idx="3">
+            <a:schemeClr val="accent1"/>
+          </a:fillRef>
+          <a:effectRef idx="2">
+            <a:schemeClr val="accent1"/>
+          </a:effectRef>
+          <a:fontRef idx="minor">
+            <a:schemeClr val="lt1"/>
+          </a:fontRef>
+        </p:style>
+        <p:txBody>
+          <a:bodyPr rtlCol="0" anchor="ctr"/>
+          <a:lstStyle/>
+          <a:p>
+            <a:pPr algn="ctr"/>
+          </a:p>
+        </p:txBody>
+      </p:sp>
+      <p:sp>
+        <p:nvSpPr>
+          <p:cNvPr id="9" name="TextBox 8"/>
+          <p:cNvSpPr txBox="1"/>
+          <p:nvPr/>
+        </p:nvSpPr>
+        <p:spPr>
+          <a:xfrm>
+            <a:off x="960120" y="2916936"/>
+            <a:ext cx="10424160" cy="841248"/>
+          </a:xfrm>
+          <a:prstGeom prst="rect">
+            <a:avLst/>
+          </a:prstGeom>
+          <a:noFill/>
+        </p:spPr>
+        <p:txBody>
+          <a:bodyPr wrap="square" anchor="ctr" lIns="0" rIns="0" tIns="0" bIns="0">
+            <a:spAutoFit/>
+          </a:bodyPr>
+          <a:lstStyle/>
+          <a:p>
+            <a:pPr>
+              <a:lnSpc>
+                <a:spcPct val="100000"/>
+              </a:lnSpc>
+            </a:pPr>
+            <a:r>
+              <a:rPr sz="1700" b="0" i="0">
+                <a:solidFill>
+                  <a:srgbClr val="2A2929"/>
+                </a:solidFill>
+                <a:latin typeface="Roboto"/>
+              </a:rPr>
+              <a:t>The written answers cite your own build, every time.</a:t>
+            </a:r>
+          </a:p>
+        </p:txBody>
+      </p:sp>
+      <p:sp>
+        <p:nvSpPr>
+          <p:cNvPr id="10" name="Rectangle 9"/>
+          <p:cNvSpPr/>
+          <p:nvPr/>
+        </p:nvSpPr>
+        <p:spPr>
+          <a:xfrm>
+            <a:off x="0" y="6565392"/>
+            <a:ext cx="12191695" cy="38100"/>
+          </a:xfrm>
+          <a:prstGeom prst="rect">
+            <a:avLst/>
+          </a:prstGeom>
+          <a:solidFill>
+            <a:srgbClr val="004488"/>
+          </a:solidFill>
+          <a:ln>
+            <a:noFill/>
+          </a:ln>
+          <a:effectLst/>
+        </p:spPr>
+        <p:style>
+          <a:lnRef idx="1">
+            <a:schemeClr val="accent1"/>
+          </a:lnRef>
+          <a:fillRef idx="3">
+            <a:schemeClr val="accent1"/>
+          </a:fillRef>
+          <a:effectRef idx="2">
+            <a:schemeClr val="accent1"/>
+          </a:effectRef>
+          <a:fontRef idx="minor">
+            <a:schemeClr val="lt1"/>
+          </a:fontRef>
+        </p:style>
+        <p:txBody>
+          <a:bodyPr rtlCol="0" anchor="ctr"/>
+          <a:lstStyle/>
+          <a:p>
+            <a:pPr algn="ctr"/>
+          </a:p>
+        </p:txBody>
+      </p:sp>
+      <p:sp>
+        <p:nvSpPr>
+          <p:cNvPr id="11" name="TextBox 10"/>
+          <p:cNvSpPr txBox="1"/>
+          <p:nvPr/>
+        </p:nvSpPr>
+        <p:spPr>
+          <a:xfrm>
+            <a:off x="502920" y="6400800"/>
+            <a:ext cx="5486400" cy="320040"/>
+          </a:xfrm>
+          <a:prstGeom prst="rect">
+            <a:avLst/>
+          </a:prstGeom>
+          <a:noFill/>
+        </p:spPr>
+        <p:txBody>
+          <a:bodyPr wrap="square" anchor="t" lIns="0" rIns="0" tIns="0" bIns="0">
+            <a:spAutoFit/>
+          </a:bodyPr>
+          <a:lstStyle/>
+          <a:p>
+            <a:r>
+              <a:rPr sz="1100" b="1" i="0">
+                <a:solidFill>
+                  <a:srgbClr val="2A2929"/>
+                </a:solidFill>
+                <a:latin typeface="Roboto"/>
+              </a:rPr>
+              <a:t>Kangan </a:t>
+            </a:r>
+            <a:r>
+              <a:rPr sz="1100" b="1" i="0">
+                <a:solidFill>
+                  <a:srgbClr val="D68E10"/>
+                </a:solidFill>
+                <a:latin typeface="Roboto"/>
+              </a:rPr>
+              <a:t>Institute</a:t>
+            </a:r>
+          </a:p>
+        </p:txBody>
+      </p:sp>
+      <p:sp>
+        <p:nvSpPr>
+          <p:cNvPr id="12" name="TextBox 11"/>
+          <p:cNvSpPr txBox="1"/>
+          <p:nvPr/>
+        </p:nvSpPr>
+        <p:spPr>
+          <a:xfrm>
+            <a:off x="10515600" y="6400800"/>
+            <a:ext cx="1188720" cy="320040"/>
+          </a:xfrm>
+          <a:prstGeom prst="rect">
+            <a:avLst/>
+          </a:prstGeom>
+          <a:noFill/>
+        </p:spPr>
+        <p:txBody>
+          <a:bodyPr wrap="square" anchor="t" lIns="0" rIns="0" tIns="0" bIns="0">
+            <a:spAutoFit/>
+          </a:bodyPr>
+          <a:lstStyle/>
+          <a:p>
+            <a:pPr algn="r"/>
+            <a:r>
+              <a:rPr sz="1100" b="0" i="0">
+                <a:solidFill>
+                  <a:srgbClr val="7A7A7A"/>
+                </a:solidFill>
+                <a:latin typeface="Roboto"/>
+              </a:rPr>
+              <a:t>15</a:t>
+            </a:r>
+          </a:p>
+        </p:txBody>
+      </p:sp>
+    </p:spTree>
+  </p:cSld>
+  <p:clrMapOvr>
+    <a:masterClrMapping/>
+  </p:clrMapOvr>
+</p:sld>
+</file>
+
+<file path=ppt/slides/slide21.xml><?xml version="1.0" encoding="utf-8"?>
+<p:sld xmlns:a="http://schemas.openxmlformats.org/drawingml/2006/main" xmlns:p="http://schemas.openxmlformats.org/presentationml/2006/main" xmlns:r="http://schemas.openxmlformats.org/officeDocument/2006/relationships">
+  <p:cSld>
+    <p:bg>
+      <p:bgPr>
+        <a:solidFill>
+          <a:srgbClr val="2A2929"/>
+        </a:solidFill>
+        <a:effectLst/>
+      </p:bgPr>
+    </p:bg>
+    <p:spTree>
+      <p:nvGrpSpPr>
+        <p:cNvPr id="1" name=""/>
+        <p:cNvGrpSpPr/>
+        <p:nvPr/>
+      </p:nvGrpSpPr>
+      <p:grpSpPr/>
+      <p:sp>
+        <p:nvSpPr>
+          <p:cNvPr id="2" name="Rectangle 1"/>
+          <p:cNvSpPr/>
+          <p:nvPr/>
+        </p:nvSpPr>
+        <p:spPr>
+          <a:xfrm>
+            <a:off x="0" y="0"/>
+            <a:ext cx="411480" cy="6858000"/>
+          </a:xfrm>
+          <a:prstGeom prst="rect">
+            <a:avLst/>
+          </a:prstGeom>
+          <a:solidFill>
+            <a:srgbClr val="EDAB0C"/>
+          </a:solidFill>
+          <a:ln>
+            <a:noFill/>
+          </a:ln>
+          <a:effectLst/>
+        </p:spPr>
+        <p:style>
+          <a:lnRef idx="1">
+            <a:schemeClr val="accent1"/>
+          </a:lnRef>
+          <a:fillRef idx="3">
+            <a:schemeClr val="accent1"/>
+          </a:fillRef>
+          <a:effectRef idx="2">
+            <a:schemeClr val="accent1"/>
+          </a:effectRef>
+          <a:fontRef idx="minor">
+            <a:schemeClr val="lt1"/>
+          </a:fontRef>
+        </p:style>
+        <p:txBody>
+          <a:bodyPr rtlCol="0" anchor="ctr"/>
+          <a:lstStyle/>
+          <a:p>
+            <a:pPr algn="ctr"/>
+          </a:p>
+        </p:txBody>
+      </p:sp>
+      <p:sp>
+        <p:nvSpPr>
+          <p:cNvPr id="3" name="TextBox 2"/>
+          <p:cNvSpPr txBox="1"/>
+          <p:nvPr/>
+        </p:nvSpPr>
+        <p:spPr>
+          <a:xfrm>
+            <a:off x="914400" y="1463040"/>
+            <a:ext cx="10515600" cy="4023360"/>
+          </a:xfrm>
+          <a:prstGeom prst="rect">
+            <a:avLst/>
+          </a:prstGeom>
+          <a:noFill/>
+        </p:spPr>
+        <p:txBody>
+          <a:bodyPr wrap="square" anchor="t" lIns="0" rIns="0" tIns="0" bIns="0">
+            <a:spAutoFit/>
+          </a:bodyPr>
+          <a:lstStyle/>
+          <a:p>
+            <a:r>
+              <a:rPr sz="4000" b="1" i="0">
+                <a:solidFill>
+                  <a:srgbClr val="FFFFFF"/>
+                </a:solidFill>
+                <a:latin typeface="Roboto"/>
+              </a:rPr>
+              <a:t>Cluster complete</a:t>
+            </a:r>
+          </a:p>
+          <a:p>
+            <a:pPr>
+              <a:lnSpc>
+                <a:spcPct val="105000"/>
+              </a:lnSpc>
+              <a:spcBef>
+                <a:spcPts val="1200"/>
+              </a:spcBef>
+            </a:pPr>
+            <a:r>
+              <a:rPr sz="1900" b="0" i="0">
+                <a:solidFill>
+                  <a:srgbClr val="E8E8E8"/>
+                </a:solidFill>
+                <a:latin typeface="Roboto Light"/>
+              </a:rPr>
+              <a:t>Designed, planned, presented and approved; then built, proven, documented and signed off.</a:t>
+            </a:r>
+          </a:p>
+          <a:p>
+            <a:pPr>
+              <a:lnSpc>
+                <a:spcPct val="105000"/>
+              </a:lnSpc>
+              <a:spcBef>
+                <a:spcPts val="1200"/>
+              </a:spcBef>
+            </a:pPr>
+            <a:r>
+              <a:rPr sz="1900" b="0" i="0">
+                <a:solidFill>
+                  <a:srgbClr val="E8E8E8"/>
+                </a:solidFill>
+                <a:latin typeface="Roboto Light"/>
+              </a:rPr>
+              <a:t>The whole engagement, both sides of the table — that is the cluster.</a:t>
             </a:r>
           </a:p>
         </p:txBody>
@@ -5898,7 +9543,7 @@
                 </a:solidFill>
                 <a:latin typeface="Roboto"/>
               </a:rPr>
-              <a:t>Metrics &amp; monitoring</a:t>
+              <a:t>User documentation</a:t>
             </a:r>
           </a:p>
           <a:p>
@@ -5914,7 +9559,7 @@
                 </a:solidFill>
                 <a:latin typeface="Roboto Light"/>
               </a:rPr>
-              <a:t>watch the right signals</a:t>
+              <a:t>someone else can run your stacks</a:t>
             </a:r>
           </a:p>
         </p:txBody>
@@ -6096,7 +9741,7 @@
                 </a:solidFill>
                 <a:latin typeface="Roboto"/>
               </a:rPr>
-              <a:t>Cloud metrics</a:t>
+              <a:t>What IaC user documentation is for</a:t>
             </a:r>
           </a:p>
         </p:txBody>
@@ -6194,7 +9839,7 @@
                 </a:solidFill>
                 <a:latin typeface="Roboto"/>
               </a:rPr>
-              <a:t>A metric is a time-series number the platform emits about a resource.</a:t>
+              <a:t>User docs let someone who didn't write the template deploy, update and delete it safely.</a:t>
             </a:r>
           </a:p>
           <a:p>
@@ -6225,7 +9870,7 @@
                 </a:solidFill>
                 <a:latin typeface="Roboto"/>
               </a:rPr>
-              <a:t>Monitoring watches the metrics that predict trouble, before users feel it (KE 6).</a:t>
+              <a:t>Include the templates and their parameters — what each does and its allowed values.</a:t>
             </a:r>
           </a:p>
           <a:p>
@@ -6256,7 +9901,7 @@
                 </a:solidFill>
                 <a:latin typeface="Roboto"/>
               </a:rPr>
-              <a:t>You cannot manage what you do not measure.</a:t>
+              <a:t>Clear, logical structure — a reader follows it without you in the room.</a:t>
             </a:r>
           </a:p>
         </p:txBody>
@@ -6438,7 +10083,7 @@
                 </a:solidFill>
                 <a:latin typeface="Roboto"/>
               </a:rPr>
-              <a:t>What to watch on the microservice</a:t>
+              <a:t>Document operating the stacks</a:t>
             </a:r>
           </a:p>
         </p:txBody>
@@ -6536,7 +10181,7 @@
                 </a:solidFill>
                 <a:latin typeface="Roboto"/>
               </a:rPr>
-              <a:t>Queue depth: the scaling signal for a queue-driven function — a rising backlog means the consumer can't keep up.</a:t>
+              <a:t>How to deploy, update through a change set, and delete each stack, with its parameters.</a:t>
             </a:r>
           </a:p>
           <a:p>
@@ -6567,7 +10212,7 @@
                 </a:solidFill>
                 <a:latin typeface="Roboto"/>
               </a:rPr>
-              <a:t>Function errors and throttles: the code failing, or the platform limiting concurrency.</a:t>
+              <a:t>Note where the region is a parameter and what the lab substitution meant.</a:t>
             </a:r>
           </a:p>
           <a:p>
@@ -6598,38 +10243,7 @@
                 </a:solidFill>
                 <a:latin typeface="Roboto"/>
               </a:rPr>
-              <a:t>Store throttles: the datastore rejecting writes under load.</a:t>
-            </a:r>
-          </a:p>
-          <a:p>
-            <a:pPr marL="0" indent="0">
-              <a:lnSpc>
-                <a:spcPct val="105000"/>
-              </a:lnSpc>
-              <a:spcBef>
-                <a:spcPts val="0"/>
-              </a:spcBef>
-              <a:spcAft>
-                <a:spcPts val="1000"/>
-              </a:spcAft>
-            </a:pPr>
-            <a:r>
-              <a:rPr sz="2400" b="1" i="0">
-                <a:solidFill>
-                  <a:srgbClr val="EDAB0C"/>
-                </a:solidFill>
-                <a:latin typeface="Roboto"/>
-              </a:rPr>
-              <a:t>■  </a:t>
-            </a:r>
-            <a:r>
-              <a:rPr sz="2400" b="0" i="0">
-                <a:solidFill>
-                  <a:srgbClr val="2A2929"/>
-                </a:solidFill>
-                <a:latin typeface="Roboto"/>
-              </a:rPr>
-              <a:t>These are the techniques to monitor a serverless service in the cloud.</a:t>
+              <a:t>Procedures, not descriptions — numbered steps a stranger can follow under pressure.</a:t>
             </a:r>
           </a:p>
         </p:txBody>
@@ -6791,13 +10405,13 @@
         <p:spPr>
           <a:xfrm>
             <a:off x="0" y="0"/>
-            <a:ext cx="3931920" cy="6858000"/>
+            <a:ext cx="12191695" cy="1234440"/>
           </a:xfrm>
           <a:prstGeom prst="rect">
             <a:avLst/>
           </a:prstGeom>
           <a:solidFill>
-            <a:srgbClr val="27B5CE"/>
+            <a:srgbClr val="92268F"/>
           </a:solidFill>
           <a:ln>
             <a:noFill/>
@@ -6828,120 +10442,20 @@
       </p:sp>
       <p:sp>
         <p:nvSpPr>
-          <p:cNvPr id="3" name="TextBox 2"/>
-          <p:cNvSpPr txBox="1"/>
-          <p:nvPr/>
-        </p:nvSpPr>
-        <p:spPr>
-          <a:xfrm>
-            <a:off x="365760" y="2103120"/>
-            <a:ext cx="3291840" cy="2194560"/>
-          </a:xfrm>
-          <a:prstGeom prst="rect">
-            <a:avLst/>
-          </a:prstGeom>
-          <a:noFill/>
-        </p:spPr>
-        <p:txBody>
-          <a:bodyPr wrap="square" anchor="t" lIns="0" rIns="0" tIns="0" bIns="0">
-            <a:spAutoFit/>
-          </a:bodyPr>
-          <a:lstStyle/>
-          <a:p>
-            <a:r>
-              <a:rPr sz="13000" b="1" i="0">
-                <a:solidFill>
-                  <a:srgbClr val="FFFFFF"/>
-                </a:solidFill>
-                <a:latin typeface="Roboto"/>
-              </a:rPr>
-              <a:t>02</a:t>
-            </a:r>
-          </a:p>
-        </p:txBody>
-      </p:sp>
-      <p:sp>
-        <p:nvSpPr>
-          <p:cNvPr id="4" name="TextBox 3"/>
-          <p:cNvSpPr txBox="1"/>
-          <p:nvPr/>
-        </p:nvSpPr>
-        <p:spPr>
-          <a:xfrm>
-            <a:off x="4480560" y="2468880"/>
-            <a:ext cx="7132320" cy="2194560"/>
-          </a:xfrm>
-          <a:prstGeom prst="rect">
-            <a:avLst/>
-          </a:prstGeom>
-          <a:noFill/>
-        </p:spPr>
-        <p:txBody>
-          <a:bodyPr wrap="square" anchor="t" lIns="0" rIns="0" tIns="0" bIns="0">
-            <a:spAutoFit/>
-          </a:bodyPr>
-          <a:lstStyle/>
-          <a:p>
-            <a:r>
-              <a:rPr sz="1600" b="1" i="0">
-                <a:solidFill>
-                  <a:srgbClr val="27B5CE"/>
-                </a:solidFill>
-                <a:latin typeface="Roboto"/>
-              </a:rPr>
-              <a:t>SECTION</a:t>
-            </a:r>
-          </a:p>
-          <a:p>
-            <a:pPr>
-              <a:spcBef>
-                <a:spcPts val="600"/>
-              </a:spcBef>
-            </a:pPr>
-            <a:r>
-              <a:rPr sz="3800" b="1" i="0">
-                <a:solidFill>
-                  <a:srgbClr val="2A2929"/>
-                </a:solidFill>
-                <a:latin typeface="Roboto"/>
-              </a:rPr>
-              <a:t>Scaling alarms &amp; alerts</a:t>
-            </a:r>
-          </a:p>
-          <a:p>
-            <a:pPr>
-              <a:spcBef>
-                <a:spcPts val="1000"/>
-              </a:spcBef>
-            </a:pPr>
-            <a:r>
-              <a:rPr sz="2000" b="0" i="1">
-                <a:solidFill>
-                  <a:srgbClr val="484848"/>
-                </a:solidFill>
-                <a:latin typeface="Roboto Light"/>
-              </a:rPr>
-              <a:t>a threshold that tells someone</a:t>
-            </a:r>
-          </a:p>
-        </p:txBody>
-      </p:sp>
-      <p:sp>
-        <p:nvSpPr>
-          <p:cNvPr id="5" name="Rectangle 4"/>
+          <p:cNvPr id="3" name="Rounded Rectangle 2"/>
           <p:cNvSpPr/>
           <p:nvPr/>
         </p:nvSpPr>
         <p:spPr>
           <a:xfrm>
-            <a:off x="0" y="6565392"/>
-            <a:ext cx="12191695" cy="38100"/>
-          </a:xfrm>
-          <a:prstGeom prst="rect">
+            <a:off x="640080" y="384048"/>
+            <a:ext cx="1691640" cy="457200"/>
+          </a:xfrm>
+          <a:prstGeom prst="roundRect">
             <a:avLst/>
           </a:prstGeom>
           <a:solidFill>
-            <a:srgbClr val="27B5CE"/>
+            <a:srgbClr val="2A2929"/>
           </a:solidFill>
           <a:ln>
             <a:noFill/>
@@ -6967,19 +10481,62 @@
           <a:lstStyle/>
           <a:p>
             <a:pPr algn="ctr"/>
-          </a:p>
-        </p:txBody>
-      </p:sp>
-      <p:sp>
-        <p:nvSpPr>
-          <p:cNvPr id="6" name="TextBox 5"/>
+            <a:r>
+              <a:rPr sz="1400" b="1" i="0">
+                <a:solidFill>
+                  <a:srgbClr val="FBB900"/>
+                </a:solidFill>
+                <a:latin typeface="Roboto"/>
+              </a:rPr>
+              <a:t>ACTIVITY</a:t>
+            </a:r>
+          </a:p>
+        </p:txBody>
+      </p:sp>
+      <p:sp>
+        <p:nvSpPr>
+          <p:cNvPr id="4" name="TextBox 3"/>
           <p:cNvSpPr txBox="1"/>
           <p:nvPr/>
         </p:nvSpPr>
         <p:spPr>
           <a:xfrm>
-            <a:off x="502920" y="6400800"/>
-            <a:ext cx="5486400" cy="320040"/>
+            <a:off x="2560320" y="310896"/>
+            <a:ext cx="8961120" cy="685800"/>
+          </a:xfrm>
+          <a:prstGeom prst="rect">
+            <a:avLst/>
+          </a:prstGeom>
+          <a:noFill/>
+        </p:spPr>
+        <p:txBody>
+          <a:bodyPr wrap="square" anchor="ctr" lIns="0" rIns="0" tIns="0" bIns="0">
+            <a:spAutoFit/>
+          </a:bodyPr>
+          <a:lstStyle/>
+          <a:p>
+            <a:r>
+              <a:rPr sz="2600" b="1" i="0">
+                <a:solidFill>
+                  <a:srgbClr val="FFFFFF"/>
+                </a:solidFill>
+                <a:latin typeface="Roboto"/>
+              </a:rPr>
+              <a:t>Write the user documentation</a:t>
+            </a:r>
+          </a:p>
+        </p:txBody>
+      </p:sp>
+      <p:sp>
+        <p:nvSpPr>
+          <p:cNvPr id="5" name="TextBox 4"/>
+          <p:cNvSpPr txBox="1"/>
+          <p:nvPr/>
+        </p:nvSpPr>
+        <p:spPr>
+          <a:xfrm>
+            <a:off x="658368" y="1554480"/>
+            <a:ext cx="10881360" cy="4297680"/>
           </a:xfrm>
           <a:prstGeom prst="rect">
             <a:avLst/>
@@ -6992,24 +10549,112 @@
           </a:bodyPr>
           <a:lstStyle/>
           <a:p>
-            <a:r>
-              <a:rPr sz="1100" b="1" i="0">
+            <a:pPr marL="0" indent="0">
+              <a:lnSpc>
+                <a:spcPct val="105000"/>
+              </a:lnSpc>
+              <a:spcBef>
+                <a:spcPts val="0"/>
+              </a:spcBef>
+              <a:spcAft>
+                <a:spcPts val="1000"/>
+              </a:spcAft>
+            </a:pPr>
+            <a:r>
+              <a:rPr sz="1700" b="1" i="0">
+                <a:solidFill>
+                  <a:srgbClr val="EDAB0C"/>
+                </a:solidFill>
+                <a:latin typeface="Roboto"/>
+              </a:rPr>
+              <a:t>■  </a:t>
+            </a:r>
+            <a:r>
+              <a:rPr sz="1700" b="0" i="0">
                 <a:solidFill>
                   <a:srgbClr val="2A2929"/>
                 </a:solidFill>
                 <a:latin typeface="Roboto"/>
               </a:rPr>
-              <a:t>Kangan </a:t>
-            </a:r>
-            <a:r>
-              <a:rPr sz="1100" b="1" i="0">
-                <a:solidFill>
-                  <a:srgbClr val="D68E10"/>
-                </a:solidFill>
-                <a:latin typeface="Roboto"/>
-              </a:rPr>
-              <a:t>Institute</a:t>
-            </a:r>
+              <a:t>Workbook — task 20.</a:t>
+            </a:r>
+          </a:p>
+          <a:p>
+            <a:pPr marL="0" indent="0">
+              <a:lnSpc>
+                <a:spcPct val="105000"/>
+              </a:lnSpc>
+              <a:spcBef>
+                <a:spcPts val="0"/>
+              </a:spcBef>
+              <a:spcAft>
+                <a:spcPts val="1000"/>
+              </a:spcAft>
+            </a:pPr>
+            <a:r>
+              <a:rPr sz="1700" b="1" i="0">
+                <a:solidFill>
+                  <a:srgbClr val="EDAB0C"/>
+                </a:solidFill>
+                <a:latin typeface="Roboto"/>
+              </a:rPr>
+              <a:t>■  </a:t>
+            </a:r>
+            <a:r>
+              <a:rPr sz="1700" b="0" i="0">
+                <a:solidFill>
+                  <a:srgbClr val="2A2929"/>
+                </a:solidFill>
+                <a:latin typeface="Roboto"/>
+              </a:rPr>
+              <a:t>Write the user documentation for what you built: deploy, update and delete for each stack, parameters included.</a:t>
+            </a:r>
+          </a:p>
+        </p:txBody>
+      </p:sp>
+      <p:sp>
+        <p:nvSpPr>
+          <p:cNvPr id="6" name="Rounded Rectangle 5"/>
+          <p:cNvSpPr/>
+          <p:nvPr/>
+        </p:nvSpPr>
+        <p:spPr>
+          <a:xfrm>
+            <a:off x="640080" y="5897880"/>
+            <a:ext cx="4023360" cy="457200"/>
+          </a:xfrm>
+          <a:prstGeom prst="roundRect">
+            <a:avLst/>
+          </a:prstGeom>
+          <a:solidFill>
+            <a:srgbClr val="F9F9F9"/>
+          </a:solidFill>
+          <a:ln w="12700">
+            <a:solidFill>
+              <a:srgbClr val="CCCCCC"/>
+            </a:solidFill>
+          </a:ln>
+          <a:effectLst/>
+        </p:spPr>
+        <p:style>
+          <a:lnRef idx="1">
+            <a:schemeClr val="accent1"/>
+          </a:lnRef>
+          <a:fillRef idx="3">
+            <a:schemeClr val="accent1"/>
+          </a:fillRef>
+          <a:effectRef idx="2">
+            <a:schemeClr val="accent1"/>
+          </a:effectRef>
+          <a:fontRef idx="minor">
+            <a:schemeClr val="lt1"/>
+          </a:fontRef>
+        </p:style>
+        <p:txBody>
+          <a:bodyPr rtlCol="0" anchor="ctr"/>
+          <a:lstStyle/>
+          <a:p>
+            <a:pPr algn="ctr"/>
           </a:p>
         </p:txBody>
       </p:sp>
@@ -7021,8 +10666,86 @@
         </p:nvSpPr>
         <p:spPr>
           <a:xfrm>
-            <a:off x="10515600" y="6400800"/>
-            <a:ext cx="1188720" cy="320040"/>
+            <a:off x="822960" y="5943600"/>
+            <a:ext cx="3657600" cy="365760"/>
+          </a:xfrm>
+          <a:prstGeom prst="rect">
+            <a:avLst/>
+          </a:prstGeom>
+          <a:noFill/>
+        </p:spPr>
+        <p:txBody>
+          <a:bodyPr wrap="square" anchor="ctr" lIns="0" rIns="0" tIns="0" bIns="0">
+            <a:spAutoFit/>
+          </a:bodyPr>
+          <a:lstStyle/>
+          <a:p>
+            <a:r>
+              <a:rPr sz="1500" b="1" i="0">
+                <a:solidFill>
+                  <a:srgbClr val="2A2929"/>
+                </a:solidFill>
+                <a:latin typeface="Roboto"/>
+              </a:rPr>
+              <a:t>⏱  ~30 min</a:t>
+            </a:r>
+          </a:p>
+        </p:txBody>
+      </p:sp>
+      <p:sp>
+        <p:nvSpPr>
+          <p:cNvPr id="8" name="Rectangle 7"/>
+          <p:cNvSpPr/>
+          <p:nvPr/>
+        </p:nvSpPr>
+        <p:spPr>
+          <a:xfrm>
+            <a:off x="0" y="6565392"/>
+            <a:ext cx="12191695" cy="38100"/>
+          </a:xfrm>
+          <a:prstGeom prst="rect">
+            <a:avLst/>
+          </a:prstGeom>
+          <a:solidFill>
+            <a:srgbClr val="92268F"/>
+          </a:solidFill>
+          <a:ln>
+            <a:noFill/>
+          </a:ln>
+          <a:effectLst/>
+        </p:spPr>
+        <p:style>
+          <a:lnRef idx="1">
+            <a:schemeClr val="accent1"/>
+          </a:lnRef>
+          <a:fillRef idx="3">
+            <a:schemeClr val="accent1"/>
+          </a:fillRef>
+          <a:effectRef idx="2">
+            <a:schemeClr val="accent1"/>
+          </a:effectRef>
+          <a:fontRef idx="minor">
+            <a:schemeClr val="lt1"/>
+          </a:fontRef>
+        </p:style>
+        <p:txBody>
+          <a:bodyPr rtlCol="0" anchor="ctr"/>
+          <a:lstStyle/>
+          <a:p>
+            <a:pPr algn="ctr"/>
+          </a:p>
+        </p:txBody>
+      </p:sp>
+      <p:sp>
+        <p:nvSpPr>
+          <p:cNvPr id="9" name="TextBox 8"/>
+          <p:cNvSpPr txBox="1"/>
+          <p:nvPr/>
+        </p:nvSpPr>
+        <p:spPr>
+          <a:xfrm>
+            <a:off x="502920" y="6400800"/>
+            <a:ext cx="5486400" cy="320040"/>
           </a:xfrm>
           <a:prstGeom prst="rect">
             <a:avLst/>
@@ -7035,6 +10758,49 @@
           </a:bodyPr>
           <a:lstStyle/>
           <a:p>
+            <a:r>
+              <a:rPr sz="1100" b="1" i="0">
+                <a:solidFill>
+                  <a:srgbClr val="2A2929"/>
+                </a:solidFill>
+                <a:latin typeface="Roboto"/>
+              </a:rPr>
+              <a:t>Kangan </a:t>
+            </a:r>
+            <a:r>
+              <a:rPr sz="1100" b="1" i="0">
+                <a:solidFill>
+                  <a:srgbClr val="D68E10"/>
+                </a:solidFill>
+                <a:latin typeface="Roboto"/>
+              </a:rPr>
+              <a:t>Institute</a:t>
+            </a:r>
+          </a:p>
+        </p:txBody>
+      </p:sp>
+      <p:sp>
+        <p:nvSpPr>
+          <p:cNvPr id="10" name="TextBox 9"/>
+          <p:cNvSpPr txBox="1"/>
+          <p:nvPr/>
+        </p:nvSpPr>
+        <p:spPr>
+          <a:xfrm>
+            <a:off x="10515600" y="6400800"/>
+            <a:ext cx="1188720" cy="320040"/>
+          </a:xfrm>
+          <a:prstGeom prst="rect">
+            <a:avLst/>
+          </a:prstGeom>
+          <a:noFill/>
+        </p:spPr>
+        <p:txBody>
+          <a:bodyPr wrap="square" anchor="t" lIns="0" rIns="0" tIns="0" bIns="0">
+            <a:spAutoFit/>
+          </a:bodyPr>
+          <a:lstStyle/>
+          <a:p>
             <a:pPr algn="r"/>
             <a:r>
               <a:rPr sz="1100" b="0" i="0">
@@ -7043,7 +10809,7 @@
                 </a:solidFill>
                 <a:latin typeface="Roboto"/>
               </a:rPr>
-              <a:t/>
+              <a:t>4</a:t>
             </a:r>
           </a:p>
         </p:txBody>
@@ -7062,7 +10828,7 @@
     <p:bg>
       <p:bgPr>
         <a:solidFill>
-          <a:srgbClr val="FFFFFF"/>
+          <a:srgbClr val="F9F9F9"/>
         </a:solidFill>
         <a:effectLst/>
       </p:bgPr>
@@ -7082,8 +10848,8 @@
         </p:nvSpPr>
         <p:spPr>
           <a:xfrm>
-            <a:off x="640080" y="457200"/>
-            <a:ext cx="10881360" cy="960120"/>
+            <a:off x="640080" y="548640"/>
+            <a:ext cx="10881360" cy="1097280"/>
           </a:xfrm>
           <a:prstGeom prst="rect">
             <a:avLst/>
@@ -7097,13 +10863,29 @@
           <a:lstStyle/>
           <a:p>
             <a:r>
-              <a:rPr sz="2800" b="1" i="0">
+              <a:rPr sz="3200" b="1" i="0">
                 <a:solidFill>
                   <a:srgbClr val="2A2929"/>
                 </a:solidFill>
                 <a:latin typeface="Roboto"/>
               </a:rPr>
-              <a:t>Set an alarm to the design spec</a:t>
+              <a:t>Key takeaways</a:t>
+            </a:r>
+          </a:p>
+          <a:p>
+            <a:pPr>
+              <a:spcBef>
+                <a:spcPts val="200"/>
+              </a:spcBef>
+            </a:pPr>
+            <a:r>
+              <a:rPr sz="1800" b="1" i="0">
+                <a:solidFill>
+                  <a:srgbClr val="92268F"/>
+                </a:solidFill>
+                <a:latin typeface="Roboto"/>
+              </a:rPr>
+              <a:t>Section 1 · The docs</a:t>
             </a:r>
           </a:p>
         </p:txBody>
@@ -7116,14 +10898,14 @@
         </p:nvSpPr>
         <p:spPr>
           <a:xfrm>
-            <a:off x="658368" y="1371600"/>
+            <a:off x="658368" y="1600200"/>
             <a:ext cx="1463040" cy="50800"/>
           </a:xfrm>
           <a:prstGeom prst="rect">
             <a:avLst/>
           </a:prstGeom>
           <a:solidFill>
-            <a:srgbClr val="27B5CE"/>
+            <a:srgbClr val="92268F"/>
           </a:solidFill>
           <a:ln>
             <a:noFill/>
@@ -7154,117 +10936,47 @@
       </p:sp>
       <p:sp>
         <p:nvSpPr>
-          <p:cNvPr id="4" name="TextBox 3"/>
-          <p:cNvSpPr txBox="1"/>
-          <p:nvPr/>
-        </p:nvSpPr>
-        <p:spPr>
-          <a:xfrm>
-            <a:off x="658368" y="1691640"/>
-            <a:ext cx="10881360" cy="4480560"/>
-          </a:xfrm>
-          <a:prstGeom prst="rect">
-            <a:avLst/>
-          </a:prstGeom>
-          <a:noFill/>
-        </p:spPr>
-        <p:txBody>
-          <a:bodyPr wrap="square" anchor="ctr" lIns="0" rIns="0" tIns="0" bIns="0">
-            <a:spAutoFit/>
-          </a:bodyPr>
-          <a:lstStyle/>
-          <a:p>
-            <a:pPr marL="0" indent="0">
-              <a:lnSpc>
-                <a:spcPct val="105000"/>
-              </a:lnSpc>
-              <a:spcBef>
-                <a:spcPts val="0"/>
-              </a:spcBef>
-              <a:spcAft>
-                <a:spcPts val="1000"/>
-              </a:spcAft>
-            </a:pPr>
-            <a:r>
-              <a:rPr sz="2400" b="1" i="0">
-                <a:solidFill>
-                  <a:srgbClr val="EDAB0C"/>
-                </a:solidFill>
-                <a:latin typeface="Roboto"/>
-              </a:rPr>
-              <a:t>■  </a:t>
-            </a:r>
-            <a:r>
-              <a:rPr sz="2400" b="0" i="0">
-                <a:solidFill>
-                  <a:srgbClr val="2A2929"/>
-                </a:solidFill>
-                <a:latin typeface="Roboto"/>
-              </a:rPr>
-              <a:t>Set up a metric and a scaling-relevant alarm to the design specification — a threshold that triggers.</a:t>
-            </a:r>
-          </a:p>
-          <a:p>
-            <a:pPr marL="0" indent="0">
-              <a:lnSpc>
-                <a:spcPct val="105000"/>
-              </a:lnSpc>
-              <a:spcBef>
-                <a:spcPts val="0"/>
-              </a:spcBef>
-              <a:spcAft>
-                <a:spcPts val="1000"/>
-              </a:spcAft>
-            </a:pPr>
-            <a:r>
-              <a:rPr sz="2400" b="1" i="0">
-                <a:solidFill>
-                  <a:srgbClr val="EDAB0C"/>
-                </a:solidFill>
-                <a:latin typeface="Roboto"/>
-              </a:rPr>
-              <a:t>■  </a:t>
-            </a:r>
-            <a:r>
-              <a:rPr sz="2400" b="0" i="0">
-                <a:solidFill>
-                  <a:srgbClr val="2A2929"/>
-                </a:solidFill>
-                <a:latin typeface="Roboto"/>
-              </a:rPr>
-              <a:t>Attach a notification so a person or system is alerted when it fires (the alert method).</a:t>
-            </a:r>
-          </a:p>
-          <a:p>
-            <a:pPr marL="0" indent="0">
-              <a:lnSpc>
-                <a:spcPct val="105000"/>
-              </a:lnSpc>
-              <a:spcBef>
-                <a:spcPts val="0"/>
-              </a:spcBef>
-              <a:spcAft>
-                <a:spcPts val="1000"/>
-              </a:spcAft>
-            </a:pPr>
-            <a:r>
-              <a:rPr sz="2400" b="1" i="0">
-                <a:solidFill>
-                  <a:srgbClr val="EDAB0C"/>
-                </a:solidFill>
-                <a:latin typeface="Roboto"/>
-              </a:rPr>
-              <a:t>■  </a:t>
-            </a:r>
-            <a:r>
-              <a:rPr sz="2400" b="0" i="0">
-                <a:solidFill>
-                  <a:srgbClr val="2A2929"/>
-                </a:solidFill>
-                <a:latin typeface="Roboto"/>
-              </a:rPr>
-              <a:t>Alarm to the spec, not to a guess — the threshold traces to the design's target.</a:t>
-            </a:r>
+          <p:cNvPr id="4" name="Rectangle 3"/>
+          <p:cNvSpPr/>
+          <p:nvPr/>
+        </p:nvSpPr>
+        <p:spPr>
+          <a:xfrm>
+            <a:off x="640080" y="1965960"/>
+            <a:ext cx="10927080" cy="841248"/>
+          </a:xfrm>
+          <a:prstGeom prst="rect">
+            <a:avLst/>
+          </a:prstGeom>
+          <a:solidFill>
+            <a:srgbClr val="FFFFFF"/>
+          </a:solidFill>
+          <a:ln w="12700">
+            <a:solidFill>
+              <a:srgbClr val="CCCCCC"/>
+            </a:solidFill>
+          </a:ln>
+          <a:effectLst/>
+        </p:spPr>
+        <p:style>
+          <a:lnRef idx="1">
+            <a:schemeClr val="accent1"/>
+          </a:lnRef>
+          <a:fillRef idx="3">
+            <a:schemeClr val="accent1"/>
+          </a:fillRef>
+          <a:effectRef idx="2">
+            <a:schemeClr val="accent1"/>
+          </a:effectRef>
+          <a:fontRef idx="minor">
+            <a:schemeClr val="lt1"/>
+          </a:fontRef>
+        </p:style>
+        <p:txBody>
+          <a:bodyPr rtlCol="0" anchor="ctr"/>
+          <a:lstStyle/>
+          <a:p>
+            <a:pPr algn="ctr"/>
           </a:p>
         </p:txBody>
       </p:sp>
@@ -7276,14 +10988,14 @@
         </p:nvSpPr>
         <p:spPr>
           <a:xfrm>
-            <a:off x="0" y="6565392"/>
-            <a:ext cx="12191695" cy="38100"/>
+            <a:off x="640080" y="1965960"/>
+            <a:ext cx="109728" cy="841248"/>
           </a:xfrm>
           <a:prstGeom prst="rect">
             <a:avLst/>
           </a:prstGeom>
           <a:solidFill>
-            <a:srgbClr val="27B5CE"/>
+            <a:srgbClr val="92268F"/>
           </a:solidFill>
           <a:ln>
             <a:noFill/>
@@ -7320,6 +11032,218 @@
         </p:nvSpPr>
         <p:spPr>
           <a:xfrm>
+            <a:off x="960120" y="1965960"/>
+            <a:ext cx="10424160" cy="841248"/>
+          </a:xfrm>
+          <a:prstGeom prst="rect">
+            <a:avLst/>
+          </a:prstGeom>
+          <a:noFill/>
+        </p:spPr>
+        <p:txBody>
+          <a:bodyPr wrap="square" anchor="ctr" lIns="0" rIns="0" tIns="0" bIns="0">
+            <a:spAutoFit/>
+          </a:bodyPr>
+          <a:lstStyle/>
+          <a:p>
+            <a:pPr>
+              <a:lnSpc>
+                <a:spcPct val="100000"/>
+              </a:lnSpc>
+            </a:pPr>
+            <a:r>
+              <a:rPr sz="1700" b="0" i="0">
+                <a:solidFill>
+                  <a:srgbClr val="2A2929"/>
+                </a:solidFill>
+                <a:latin typeface="Roboto"/>
+              </a:rPr>
+              <a:t>Written for the operator who inherits it.</a:t>
+            </a:r>
+          </a:p>
+        </p:txBody>
+      </p:sp>
+      <p:sp>
+        <p:nvSpPr>
+          <p:cNvPr id="7" name="Rectangle 6"/>
+          <p:cNvSpPr/>
+          <p:nvPr/>
+        </p:nvSpPr>
+        <p:spPr>
+          <a:xfrm>
+            <a:off x="640080" y="2916936"/>
+            <a:ext cx="10927080" cy="841248"/>
+          </a:xfrm>
+          <a:prstGeom prst="rect">
+            <a:avLst/>
+          </a:prstGeom>
+          <a:solidFill>
+            <a:srgbClr val="FFFFFF"/>
+          </a:solidFill>
+          <a:ln w="12700">
+            <a:solidFill>
+              <a:srgbClr val="CCCCCC"/>
+            </a:solidFill>
+          </a:ln>
+          <a:effectLst/>
+        </p:spPr>
+        <p:style>
+          <a:lnRef idx="1">
+            <a:schemeClr val="accent1"/>
+          </a:lnRef>
+          <a:fillRef idx="3">
+            <a:schemeClr val="accent1"/>
+          </a:fillRef>
+          <a:effectRef idx="2">
+            <a:schemeClr val="accent1"/>
+          </a:effectRef>
+          <a:fontRef idx="minor">
+            <a:schemeClr val="lt1"/>
+          </a:fontRef>
+        </p:style>
+        <p:txBody>
+          <a:bodyPr rtlCol="0" anchor="ctr"/>
+          <a:lstStyle/>
+          <a:p>
+            <a:pPr algn="ctr"/>
+          </a:p>
+        </p:txBody>
+      </p:sp>
+      <p:sp>
+        <p:nvSpPr>
+          <p:cNvPr id="8" name="Rectangle 7"/>
+          <p:cNvSpPr/>
+          <p:nvPr/>
+        </p:nvSpPr>
+        <p:spPr>
+          <a:xfrm>
+            <a:off x="640080" y="2916936"/>
+            <a:ext cx="109728" cy="841248"/>
+          </a:xfrm>
+          <a:prstGeom prst="rect">
+            <a:avLst/>
+          </a:prstGeom>
+          <a:solidFill>
+            <a:srgbClr val="92268F"/>
+          </a:solidFill>
+          <a:ln>
+            <a:noFill/>
+          </a:ln>
+          <a:effectLst/>
+        </p:spPr>
+        <p:style>
+          <a:lnRef idx="1">
+            <a:schemeClr val="accent1"/>
+          </a:lnRef>
+          <a:fillRef idx="3">
+            <a:schemeClr val="accent1"/>
+          </a:fillRef>
+          <a:effectRef idx="2">
+            <a:schemeClr val="accent1"/>
+          </a:effectRef>
+          <a:fontRef idx="minor">
+            <a:schemeClr val="lt1"/>
+          </a:fontRef>
+        </p:style>
+        <p:txBody>
+          <a:bodyPr rtlCol="0" anchor="ctr"/>
+          <a:lstStyle/>
+          <a:p>
+            <a:pPr algn="ctr"/>
+          </a:p>
+        </p:txBody>
+      </p:sp>
+      <p:sp>
+        <p:nvSpPr>
+          <p:cNvPr id="9" name="TextBox 8"/>
+          <p:cNvSpPr txBox="1"/>
+          <p:nvPr/>
+        </p:nvSpPr>
+        <p:spPr>
+          <a:xfrm>
+            <a:off x="960120" y="2916936"/>
+            <a:ext cx="10424160" cy="841248"/>
+          </a:xfrm>
+          <a:prstGeom prst="rect">
+            <a:avLst/>
+          </a:prstGeom>
+          <a:noFill/>
+        </p:spPr>
+        <p:txBody>
+          <a:bodyPr wrap="square" anchor="ctr" lIns="0" rIns="0" tIns="0" bIns="0">
+            <a:spAutoFit/>
+          </a:bodyPr>
+          <a:lstStyle/>
+          <a:p>
+            <a:pPr>
+              <a:lnSpc>
+                <a:spcPct val="100000"/>
+              </a:lnSpc>
+            </a:pPr>
+            <a:r>
+              <a:rPr sz="1700" b="0" i="0">
+                <a:solidFill>
+                  <a:srgbClr val="2A2929"/>
+                </a:solidFill>
+                <a:latin typeface="Roboto"/>
+              </a:rPr>
+              <a:t>Deploy, update, delete — as procedures, with the parameters.</a:t>
+            </a:r>
+          </a:p>
+        </p:txBody>
+      </p:sp>
+      <p:sp>
+        <p:nvSpPr>
+          <p:cNvPr id="10" name="Rectangle 9"/>
+          <p:cNvSpPr/>
+          <p:nvPr/>
+        </p:nvSpPr>
+        <p:spPr>
+          <a:xfrm>
+            <a:off x="0" y="6565392"/>
+            <a:ext cx="12191695" cy="38100"/>
+          </a:xfrm>
+          <a:prstGeom prst="rect">
+            <a:avLst/>
+          </a:prstGeom>
+          <a:solidFill>
+            <a:srgbClr val="92268F"/>
+          </a:solidFill>
+          <a:ln>
+            <a:noFill/>
+          </a:ln>
+          <a:effectLst/>
+        </p:spPr>
+        <p:style>
+          <a:lnRef idx="1">
+            <a:schemeClr val="accent1"/>
+          </a:lnRef>
+          <a:fillRef idx="3">
+            <a:schemeClr val="accent1"/>
+          </a:fillRef>
+          <a:effectRef idx="2">
+            <a:schemeClr val="accent1"/>
+          </a:effectRef>
+          <a:fontRef idx="minor">
+            <a:schemeClr val="lt1"/>
+          </a:fontRef>
+        </p:style>
+        <p:txBody>
+          <a:bodyPr rtlCol="0" anchor="ctr"/>
+          <a:lstStyle/>
+          <a:p>
+            <a:pPr algn="ctr"/>
+          </a:p>
+        </p:txBody>
+      </p:sp>
+      <p:sp>
+        <p:nvSpPr>
+          <p:cNvPr id="11" name="TextBox 10"/>
+          <p:cNvSpPr txBox="1"/>
+          <p:nvPr/>
+        </p:nvSpPr>
+        <p:spPr>
+          <a:xfrm>
             <a:off x="502920" y="6400800"/>
             <a:ext cx="5486400" cy="320040"/>
           </a:xfrm>
@@ -7357,7 +11281,7 @@
       </p:sp>
       <p:sp>
         <p:nvSpPr>
-          <p:cNvPr id="7" name="TextBox 6"/>
+          <p:cNvPr id="12" name="TextBox 11"/>
           <p:cNvSpPr txBox="1"/>
           <p:nvPr/>
         </p:nvSpPr>
@@ -7385,7 +11309,7 @@
                 </a:solidFill>
                 <a:latin typeface="Roboto"/>
               </a:rPr>
-              <a:t>4</a:t>
+              <a:t>5</a:t>
             </a:r>
           </a:p>
         </p:txBody>
@@ -7425,53 +11349,9 @@
         <p:spPr>
           <a:xfrm>
             <a:off x="0" y="0"/>
-            <a:ext cx="12191695" cy="1234440"/>
-          </a:xfrm>
-          <a:prstGeom prst="rect">
-            <a:avLst/>
-          </a:prstGeom>
-          <a:solidFill>
-            <a:srgbClr val="2A2929"/>
-          </a:solidFill>
-          <a:ln>
-            <a:noFill/>
-          </a:ln>
-          <a:effectLst/>
-        </p:spPr>
-        <p:style>
-          <a:lnRef idx="1">
-            <a:schemeClr val="accent1"/>
-          </a:lnRef>
-          <a:fillRef idx="3">
-            <a:schemeClr val="accent1"/>
-          </a:fillRef>
-          <a:effectRef idx="2">
-            <a:schemeClr val="accent1"/>
-          </a:effectRef>
-          <a:fontRef idx="minor">
-            <a:schemeClr val="lt1"/>
-          </a:fontRef>
-        </p:style>
-        <p:txBody>
-          <a:bodyPr rtlCol="0" anchor="ctr"/>
-          <a:lstStyle/>
-          <a:p>
-            <a:pPr algn="ctr"/>
-          </a:p>
-        </p:txBody>
-      </p:sp>
-      <p:sp>
-        <p:nvSpPr>
-          <p:cNvPr id="3" name="Rounded Rectangle 2"/>
-          <p:cNvSpPr/>
-          <p:nvPr/>
-        </p:nvSpPr>
-        <p:spPr>
-          <a:xfrm>
-            <a:off x="640080" y="384048"/>
-            <a:ext cx="2331720" cy="457200"/>
-          </a:xfrm>
-          <a:prstGeom prst="roundRect">
+            <a:ext cx="3931920" cy="6858000"/>
+          </a:xfrm>
+          <a:prstGeom prst="rect">
             <a:avLst/>
           </a:prstGeom>
           <a:solidFill>
@@ -7501,62 +11381,19 @@
           <a:lstStyle/>
           <a:p>
             <a:pPr algn="ctr"/>
-            <a:r>
-              <a:rPr sz="1300" b="1" i="0">
-                <a:solidFill>
-                  <a:srgbClr val="2A2929"/>
-                </a:solidFill>
-                <a:latin typeface="Roboto"/>
-              </a:rPr>
-              <a:t>RECORDED DEMO</a:t>
-            </a:r>
-          </a:p>
-        </p:txBody>
-      </p:sp>
-      <p:sp>
-        <p:nvSpPr>
-          <p:cNvPr id="4" name="TextBox 3"/>
+          </a:p>
+        </p:txBody>
+      </p:sp>
+      <p:sp>
+        <p:nvSpPr>
+          <p:cNvPr id="3" name="TextBox 2"/>
           <p:cNvSpPr txBox="1"/>
           <p:nvPr/>
         </p:nvSpPr>
         <p:spPr>
           <a:xfrm>
-            <a:off x="3200400" y="310896"/>
-            <a:ext cx="8321040" cy="685800"/>
-          </a:xfrm>
-          <a:prstGeom prst="rect">
-            <a:avLst/>
-          </a:prstGeom>
-          <a:noFill/>
-        </p:spPr>
-        <p:txBody>
-          <a:bodyPr wrap="square" anchor="ctr" lIns="0" rIns="0" tIns="0" bIns="0">
-            <a:spAutoFit/>
-          </a:bodyPr>
-          <a:lstStyle/>
-          <a:p>
-            <a:r>
-              <a:rPr sz="2500" b="1" i="0">
-                <a:solidFill>
-                  <a:srgbClr val="FFFFFF"/>
-                </a:solidFill>
-                <a:latin typeface="Roboto"/>
-              </a:rPr>
-              <a:t>Configure &amp; fire an alarm</a:t>
-            </a:r>
-          </a:p>
-        </p:txBody>
-      </p:sp>
-      <p:sp>
-        <p:nvSpPr>
-          <p:cNvPr id="5" name="TextBox 4"/>
-          <p:cNvSpPr txBox="1"/>
-          <p:nvPr/>
-        </p:nvSpPr>
-        <p:spPr>
-          <a:xfrm>
-            <a:off x="658368" y="1554480"/>
-            <a:ext cx="10881360" cy="4297680"/>
+            <a:off x="365760" y="2103120"/>
+            <a:ext cx="3291840" cy="2194560"/>
           </a:xfrm>
           <a:prstGeom prst="rect">
             <a:avLst/>
@@ -7569,125 +11406,28 @@
           </a:bodyPr>
           <a:lstStyle/>
           <a:p>
-            <a:pPr marL="0" indent="0">
-              <a:lnSpc>
-                <a:spcPct val="105000"/>
-              </a:lnSpc>
-              <a:spcBef>
-                <a:spcPts val="0"/>
-              </a:spcBef>
-              <a:spcAft>
-                <a:spcPts val="1000"/>
-              </a:spcAft>
-            </a:pPr>
-            <a:r>
-              <a:rPr sz="1700" b="1" i="0">
-                <a:solidFill>
-                  <a:srgbClr val="EDAB0C"/>
-                </a:solidFill>
-                <a:latin typeface="Roboto"/>
-              </a:rPr>
-              <a:t>■  </a:t>
-            </a:r>
-            <a:r>
-              <a:rPr sz="1700" b="0" i="0">
-                <a:solidFill>
-                  <a:srgbClr val="2A2929"/>
-                </a:solidFill>
-                <a:latin typeface="Roboto"/>
-              </a:rPr>
-              <a:t>Configure a queue-depth (or function-error) alarm with a notification in the lab.</a:t>
-            </a:r>
-          </a:p>
-          <a:p>
-            <a:pPr marL="0" indent="0">
-              <a:lnSpc>
-                <a:spcPct val="105000"/>
-              </a:lnSpc>
-              <a:spcBef>
-                <a:spcPts val="0"/>
-              </a:spcBef>
-              <a:spcAft>
-                <a:spcPts val="1000"/>
-              </a:spcAft>
-            </a:pPr>
-            <a:r>
-              <a:rPr sz="1700" b="1" i="0">
-                <a:solidFill>
-                  <a:srgbClr val="EDAB0C"/>
-                </a:solidFill>
-                <a:latin typeface="Roboto"/>
-              </a:rPr>
-              <a:t>■  </a:t>
-            </a:r>
-            <a:r>
-              <a:rPr sz="1700" b="0" i="0">
-                <a:solidFill>
-                  <a:srgbClr val="2A2929"/>
-                </a:solidFill>
-                <a:latin typeface="Roboto"/>
-              </a:rPr>
-              <a:t>Drive the metric past the threshold; watch it go to ALARM and send the notification, then back to OK.</a:t>
-            </a:r>
-          </a:p>
-        </p:txBody>
-      </p:sp>
-      <p:sp>
-        <p:nvSpPr>
-          <p:cNvPr id="6" name="Rounded Rectangle 5"/>
-          <p:cNvSpPr/>
-          <p:nvPr/>
-        </p:nvSpPr>
-        <p:spPr>
-          <a:xfrm>
-            <a:off x="640080" y="5897880"/>
-            <a:ext cx="7863840" cy="457200"/>
-          </a:xfrm>
-          <a:prstGeom prst="roundRect">
-            <a:avLst/>
-          </a:prstGeom>
-          <a:solidFill>
-            <a:srgbClr val="F9F9F9"/>
-          </a:solidFill>
-          <a:ln w="12700">
-            <a:solidFill>
-              <a:srgbClr val="CCCCCC"/>
-            </a:solidFill>
-          </a:ln>
-          <a:effectLst/>
-        </p:spPr>
-        <p:style>
-          <a:lnRef idx="1">
-            <a:schemeClr val="accent1"/>
-          </a:lnRef>
-          <a:fillRef idx="3">
-            <a:schemeClr val="accent1"/>
-          </a:fillRef>
-          <a:effectRef idx="2">
-            <a:schemeClr val="accent1"/>
-          </a:effectRef>
-          <a:fontRef idx="minor">
-            <a:schemeClr val="lt1"/>
-          </a:fontRef>
-        </p:style>
-        <p:txBody>
-          <a:bodyPr rtlCol="0" anchor="ctr"/>
-          <a:lstStyle/>
-          <a:p>
-            <a:pPr algn="ctr"/>
-          </a:p>
-        </p:txBody>
-      </p:sp>
-      <p:sp>
-        <p:nvSpPr>
-          <p:cNvPr id="7" name="TextBox 6"/>
+            <a:r>
+              <a:rPr sz="13000" b="1" i="0">
+                <a:solidFill>
+                  <a:srgbClr val="FFFFFF"/>
+                </a:solidFill>
+                <a:latin typeface="Roboto"/>
+              </a:rPr>
+              <a:t>02</a:t>
+            </a:r>
+          </a:p>
+        </p:txBody>
+      </p:sp>
+      <p:sp>
+        <p:nvSpPr>
+          <p:cNvPr id="4" name="TextBox 3"/>
           <p:cNvSpPr txBox="1"/>
           <p:nvPr/>
         </p:nvSpPr>
         <p:spPr>
           <a:xfrm>
-            <a:off x="822960" y="5943600"/>
-            <a:ext cx="7498080" cy="365760"/>
+            <a:off x="4480560" y="2468880"/>
+            <a:ext cx="7132320" cy="2194560"/>
           </a:xfrm>
           <a:prstGeom prst="rect">
             <a:avLst/>
@@ -7695,26 +11435,58 @@
           <a:noFill/>
         </p:spPr>
         <p:txBody>
-          <a:bodyPr wrap="square" anchor="ctr" lIns="0" rIns="0" tIns="0" bIns="0">
+          <a:bodyPr wrap="square" anchor="t" lIns="0" rIns="0" tIns="0" bIns="0">
             <a:spAutoFit/>
           </a:bodyPr>
           <a:lstStyle/>
           <a:p>
             <a:r>
-              <a:rPr sz="1400" b="1" i="0">
+              <a:rPr sz="1600" b="1" i="0">
+                <a:solidFill>
+                  <a:srgbClr val="27B5CE"/>
+                </a:solidFill>
+                <a:latin typeface="Roboto"/>
+              </a:rPr>
+              <a:t>SECTION</a:t>
+            </a:r>
+          </a:p>
+          <a:p>
+            <a:pPr>
+              <a:spcBef>
+                <a:spcPts val="600"/>
+              </a:spcBef>
+            </a:pPr>
+            <a:r>
+              <a:rPr sz="3800" b="1" i="0">
                 <a:solidFill>
                   <a:srgbClr val="2A2929"/>
                 </a:solidFill>
                 <a:latin typeface="Roboto"/>
               </a:rPr>
-              <a:t>▶  Play the AWS recorded demo (recorded/live demo) — you do this next</a:t>
-            </a:r>
-          </a:p>
-        </p:txBody>
-      </p:sp>
-      <p:sp>
-        <p:nvSpPr>
-          <p:cNvPr id="8" name="Rectangle 7"/>
+              <a:t>Taking it down cleanly</a:t>
+            </a:r>
+          </a:p>
+          <a:p>
+            <a:pPr>
+              <a:spcBef>
+                <a:spcPts val="1000"/>
+              </a:spcBef>
+            </a:pPr>
+            <a:r>
+              <a:rPr sz="2000" b="0" i="1">
+                <a:solidFill>
+                  <a:srgbClr val="484848"/>
+                </a:solidFill>
+                <a:latin typeface="Roboto Light"/>
+              </a:rPr>
+              <a:t>nothing left behind, nothing still billing</a:t>
+            </a:r>
+          </a:p>
+        </p:txBody>
+      </p:sp>
+      <p:sp>
+        <p:nvSpPr>
+          <p:cNvPr id="5" name="Rectangle 4"/>
           <p:cNvSpPr/>
           <p:nvPr/>
         </p:nvSpPr>
@@ -7758,7 +11530,7 @@
       </p:sp>
       <p:sp>
         <p:nvSpPr>
-          <p:cNvPr id="9" name="TextBox 8"/>
+          <p:cNvPr id="6" name="TextBox 5"/>
           <p:cNvSpPr txBox="1"/>
           <p:nvPr/>
         </p:nvSpPr>
@@ -7801,7 +11573,7 @@
       </p:sp>
       <p:sp>
         <p:nvSpPr>
-          <p:cNvPr id="10" name="TextBox 9"/>
+          <p:cNvPr id="7" name="TextBox 6"/>
           <p:cNvSpPr txBox="1"/>
           <p:nvPr/>
         </p:nvSpPr>
@@ -7829,7 +11601,7 @@
                 </a:solidFill>
                 <a:latin typeface="Roboto"/>
               </a:rPr>
-              <a:t>5</a:t>
+              <a:t/>
             </a:r>
           </a:p>
         </p:txBody>
@@ -7862,14 +11634,48 @@
       <p:grpSpPr/>
       <p:sp>
         <p:nvSpPr>
-          <p:cNvPr id="2" name="Rectangle 1"/>
+          <p:cNvPr id="2" name="TextBox 1"/>
+          <p:cNvSpPr txBox="1"/>
+          <p:nvPr/>
+        </p:nvSpPr>
+        <p:spPr>
+          <a:xfrm>
+            <a:off x="640080" y="457200"/>
+            <a:ext cx="10881360" cy="960120"/>
+          </a:xfrm>
+          <a:prstGeom prst="rect">
+            <a:avLst/>
+          </a:prstGeom>
+          <a:noFill/>
+        </p:spPr>
+        <p:txBody>
+          <a:bodyPr wrap="square" anchor="t" lIns="0" rIns="0" tIns="0" bIns="0">
+            <a:spAutoFit/>
+          </a:bodyPr>
+          <a:lstStyle/>
+          <a:p>
+            <a:r>
+              <a:rPr sz="2800" b="1" i="0">
+                <a:solidFill>
+                  <a:srgbClr val="2A2929"/>
+                </a:solidFill>
+                <a:latin typeface="Roboto"/>
+              </a:rPr>
+              <a:t>Remove what you deployed</a:t>
+            </a:r>
+          </a:p>
+        </p:txBody>
+      </p:sp>
+      <p:sp>
+        <p:nvSpPr>
+          <p:cNvPr id="3" name="Rectangle 2"/>
           <p:cNvSpPr/>
           <p:nvPr/>
         </p:nvSpPr>
         <p:spPr>
           <a:xfrm>
-            <a:off x="0" y="0"/>
-            <a:ext cx="12191695" cy="1234440"/>
+            <a:off x="658368" y="1371600"/>
+            <a:ext cx="1463040" cy="50800"/>
           </a:xfrm>
           <a:prstGeom prst="rect">
             <a:avLst/>
@@ -7906,67 +11712,14 @@
       </p:sp>
       <p:sp>
         <p:nvSpPr>
-          <p:cNvPr id="3" name="Rounded Rectangle 2"/>
-          <p:cNvSpPr/>
-          <p:nvPr/>
-        </p:nvSpPr>
-        <p:spPr>
-          <a:xfrm>
-            <a:off x="640080" y="384048"/>
-            <a:ext cx="1691640" cy="457200"/>
-          </a:xfrm>
-          <a:prstGeom prst="roundRect">
-            <a:avLst/>
-          </a:prstGeom>
-          <a:solidFill>
-            <a:srgbClr val="2A2929"/>
-          </a:solidFill>
-          <a:ln>
-            <a:noFill/>
-          </a:ln>
-          <a:effectLst/>
-        </p:spPr>
-        <p:style>
-          <a:lnRef idx="1">
-            <a:schemeClr val="accent1"/>
-          </a:lnRef>
-          <a:fillRef idx="3">
-            <a:schemeClr val="accent1"/>
-          </a:fillRef>
-          <a:effectRef idx="2">
-            <a:schemeClr val="accent1"/>
-          </a:effectRef>
-          <a:fontRef idx="minor">
-            <a:schemeClr val="lt1"/>
-          </a:fontRef>
-        </p:style>
-        <p:txBody>
-          <a:bodyPr rtlCol="0" anchor="ctr"/>
-          <a:lstStyle/>
-          <a:p>
-            <a:pPr algn="ctr"/>
-            <a:r>
-              <a:rPr sz="1400" b="1" i="0">
-                <a:solidFill>
-                  <a:srgbClr val="FBB900"/>
-                </a:solidFill>
-                <a:latin typeface="Roboto"/>
-              </a:rPr>
-              <a:t>ACTIVITY</a:t>
-            </a:r>
-          </a:p>
-        </p:txBody>
-      </p:sp>
-      <p:sp>
-        <p:nvSpPr>
           <p:cNvPr id="4" name="TextBox 3"/>
           <p:cNvSpPr txBox="1"/>
           <p:nvPr/>
         </p:nvSpPr>
         <p:spPr>
           <a:xfrm>
-            <a:off x="2560320" y="310896"/>
-            <a:ext cx="8961120" cy="685800"/>
+            <a:off x="658368" y="1691640"/>
+            <a:ext cx="10881360" cy="4480560"/>
           </a:xfrm>
           <a:prstGeom prst="rect">
             <a:avLst/>
@@ -7975,40 +11728,6 @@
         </p:spPr>
         <p:txBody>
           <a:bodyPr wrap="square" anchor="ctr" lIns="0" rIns="0" tIns="0" bIns="0">
-            <a:spAutoFit/>
-          </a:bodyPr>
-          <a:lstStyle/>
-          <a:p>
-            <a:r>
-              <a:rPr sz="2600" b="1" i="0">
-                <a:solidFill>
-                  <a:srgbClr val="FFFFFF"/>
-                </a:solidFill>
-                <a:latin typeface="Roboto"/>
-              </a:rPr>
-              <a:t>Configure &amp; test an alarm</a:t>
-            </a:r>
-          </a:p>
-        </p:txBody>
-      </p:sp>
-      <p:sp>
-        <p:nvSpPr>
-          <p:cNvPr id="5" name="TextBox 4"/>
-          <p:cNvSpPr txBox="1"/>
-          <p:nvPr/>
-        </p:nvSpPr>
-        <p:spPr>
-          <a:xfrm>
-            <a:off x="658368" y="1554480"/>
-            <a:ext cx="10881360" cy="4297680"/>
-          </a:xfrm>
-          <a:prstGeom prst="rect">
-            <a:avLst/>
-          </a:prstGeom>
-          <a:noFill/>
-        </p:spPr>
-        <p:txBody>
-          <a:bodyPr wrap="square" anchor="t" lIns="0" rIns="0" tIns="0" bIns="0">
             <a:spAutoFit/>
           </a:bodyPr>
           <a:lstStyle/>
@@ -8025,7 +11744,7 @@
               </a:spcAft>
             </a:pPr>
             <a:r>
-              <a:rPr sz="1700" b="1" i="0">
+              <a:rPr sz="2400" b="1" i="0">
                 <a:solidFill>
                   <a:srgbClr val="EDAB0C"/>
                 </a:solidFill>
@@ -8034,13 +11753,13 @@
               <a:t>■  </a:t>
             </a:r>
             <a:r>
-              <a:rPr sz="1700" b="0" i="0">
+              <a:rPr sz="2400" b="0" i="0">
                 <a:solidFill>
                   <a:srgbClr val="2A2929"/>
                 </a:solidFill>
                 <a:latin typeface="Roboto"/>
               </a:rPr>
-              <a:t>On the practice microservice, configure a metric + a scaling-relevant alarm with a notification.</a:t>
+              <a:t>Tear down through the tooling, not by hand — the stack goes down the way it came up.</a:t>
             </a:r>
           </a:p>
           <a:p>
@@ -8056,7 +11775,7 @@
               </a:spcAft>
             </a:pPr>
             <a:r>
-              <a:rPr sz="1700" b="1" i="0">
+              <a:rPr sz="2400" b="1" i="0">
                 <a:solidFill>
                   <a:srgbClr val="EDAB0C"/>
                 </a:solidFill>
@@ -8065,100 +11784,51 @@
               <a:t>■  </a:t>
             </a:r>
             <a:r>
-              <a:rPr sz="1700" b="0" i="0">
+              <a:rPr sz="2400" b="0" i="0">
                 <a:solidFill>
                   <a:srgbClr val="2A2929"/>
                 </a:solidFill>
                 <a:latin typeface="Roboto"/>
               </a:rPr>
-              <a:t>Drive it to ALARM and back; confirm the notification fired.</a:t>
-            </a:r>
-          </a:p>
-        </p:txBody>
-      </p:sp>
-      <p:sp>
-        <p:nvSpPr>
-          <p:cNvPr id="6" name="Rounded Rectangle 5"/>
-          <p:cNvSpPr/>
-          <p:nvPr/>
-        </p:nvSpPr>
-        <p:spPr>
-          <a:xfrm>
-            <a:off x="640080" y="5897880"/>
-            <a:ext cx="4023360" cy="457200"/>
-          </a:xfrm>
-          <a:prstGeom prst="roundRect">
-            <a:avLst/>
-          </a:prstGeom>
-          <a:solidFill>
-            <a:srgbClr val="F9F9F9"/>
-          </a:solidFill>
-          <a:ln w="12700">
-            <a:solidFill>
-              <a:srgbClr val="CCCCCC"/>
-            </a:solidFill>
-          </a:ln>
-          <a:effectLst/>
-        </p:spPr>
-        <p:style>
-          <a:lnRef idx="1">
-            <a:schemeClr val="accent1"/>
-          </a:lnRef>
-          <a:fillRef idx="3">
-            <a:schemeClr val="accent1"/>
-          </a:fillRef>
-          <a:effectRef idx="2">
-            <a:schemeClr val="accent1"/>
-          </a:effectRef>
-          <a:fontRef idx="minor">
-            <a:schemeClr val="lt1"/>
-          </a:fontRef>
-        </p:style>
-        <p:txBody>
-          <a:bodyPr rtlCol="0" anchor="ctr"/>
-          <a:lstStyle/>
-          <a:p>
-            <a:pPr algn="ctr"/>
-          </a:p>
-        </p:txBody>
-      </p:sp>
-      <p:sp>
-        <p:nvSpPr>
-          <p:cNvPr id="7" name="TextBox 6"/>
-          <p:cNvSpPr txBox="1"/>
-          <p:nvPr/>
-        </p:nvSpPr>
-        <p:spPr>
-          <a:xfrm>
-            <a:off x="822960" y="5943600"/>
-            <a:ext cx="3657600" cy="365760"/>
-          </a:xfrm>
-          <a:prstGeom prst="rect">
-            <a:avLst/>
-          </a:prstGeom>
-          <a:noFill/>
-        </p:spPr>
-        <p:txBody>
-          <a:bodyPr wrap="square" anchor="ctr" lIns="0" rIns="0" tIns="0" bIns="0">
-            <a:spAutoFit/>
-          </a:bodyPr>
-          <a:lstStyle/>
-          <a:p>
-            <a:r>
-              <a:rPr sz="1500" b="1" i="0">
+              <a:t>Confirm the removal: a delete that leaves orphans keeps costing and blocks a rebuild.</a:t>
+            </a:r>
+          </a:p>
+          <a:p>
+            <a:pPr marL="0" indent="0">
+              <a:lnSpc>
+                <a:spcPct val="105000"/>
+              </a:lnSpc>
+              <a:spcBef>
+                <a:spcPts val="0"/>
+              </a:spcBef>
+              <a:spcAft>
+                <a:spcPts val="1000"/>
+              </a:spcAft>
+            </a:pPr>
+            <a:r>
+              <a:rPr sz="2400" b="1" i="0">
+                <a:solidFill>
+                  <a:srgbClr val="EDAB0C"/>
+                </a:solidFill>
+                <a:latin typeface="Roboto"/>
+              </a:rPr>
+              <a:t>■  </a:t>
+            </a:r>
+            <a:r>
+              <a:rPr sz="2400" b="0" i="0">
                 <a:solidFill>
                   <a:srgbClr val="2A2929"/>
                 </a:solidFill>
                 <a:latin typeface="Roboto"/>
               </a:rPr>
-              <a:t>⏱  ~25 min</a:t>
-            </a:r>
-          </a:p>
-        </p:txBody>
-      </p:sp>
-      <p:sp>
-        <p:nvSpPr>
-          <p:cNvPr id="8" name="Rectangle 7"/>
+              <a:t>Multiple stacks come down in reverse dependency order — the one nothing depends on goes first.</a:t>
+            </a:r>
+          </a:p>
+        </p:txBody>
+      </p:sp>
+      <p:sp>
+        <p:nvSpPr>
+          <p:cNvPr id="5" name="Rectangle 4"/>
           <p:cNvSpPr/>
           <p:nvPr/>
         </p:nvSpPr>
@@ -8202,7 +11872,7 @@
       </p:sp>
       <p:sp>
         <p:nvSpPr>
-          <p:cNvPr id="9" name="TextBox 8"/>
+          <p:cNvPr id="6" name="TextBox 5"/>
           <p:cNvSpPr txBox="1"/>
           <p:nvPr/>
         </p:nvSpPr>
@@ -8245,7 +11915,7 @@
       </p:sp>
       <p:sp>
         <p:nvSpPr>
-          <p:cNvPr id="10" name="TextBox 9"/>
+          <p:cNvPr id="7" name="TextBox 6"/>
           <p:cNvSpPr txBox="1"/>
           <p:nvPr/>
         </p:nvSpPr>
